--- a/protected-downloads/praesentation/M23.pptx
+++ b/protected-downloads/praesentation/M23.pptx
@@ -4253,7 +4253,7 @@
                 </a:solidFill>
                 <a:latin typeface="JetBrains Mono"/>
               </a:rPr>
-              <a:t>Benedikt Zoller Coaching  ·  FKB Campus  ·  2026</a:t>
+              <a:t>FKB Campus  ·  2026</a:t>
             </a:r>
           </a:p>
         </p:txBody>
@@ -4654,7 +4654,7 @@
                 </a:solidFill>
                 <a:latin typeface="JetBrains Mono"/>
               </a:rPr>
-              <a:t>Benedikt Zoller Coaching  ·  FKB Campus  ·  M23</a:t>
+              <a:t>FKB Campus  ·  M23</a:t>
             </a:r>
           </a:p>
         </p:txBody>
@@ -5086,7 +5086,7 @@
                 </a:solidFill>
                 <a:latin typeface="JetBrains Mono"/>
               </a:rPr>
-              <a:t>Benedikt Zoller Coaching  ·  FKB Campus  ·  M23</a:t>
+              <a:t>FKB Campus  ·  M23</a:t>
             </a:r>
           </a:p>
         </p:txBody>
@@ -5784,7 +5784,7 @@
                 </a:solidFill>
                 <a:latin typeface="JetBrains Mono"/>
               </a:rPr>
-              <a:t>Benedikt Zoller Coaching  ·  FKB Campus  ·  M23</a:t>
+              <a:t>FKB Campus  ·  M23</a:t>
             </a:r>
           </a:p>
         </p:txBody>
@@ -6297,7 +6297,7 @@
                 </a:solidFill>
                 <a:latin typeface="JetBrains Mono"/>
               </a:rPr>
-              <a:t>Benedikt Zoller Coaching  ·  FKB Campus  ·  M23</a:t>
+              <a:t>FKB Campus  ·  M23</a:t>
             </a:r>
           </a:p>
         </p:txBody>
@@ -6831,7 +6831,7 @@
                 </a:solidFill>
                 <a:latin typeface="JetBrains Mono"/>
               </a:rPr>
-              <a:t>Benedikt Zoller Coaching  ·  FKB Campus  ·  M23</a:t>
+              <a:t>FKB Campus  ·  M23</a:t>
             </a:r>
           </a:p>
         </p:txBody>
@@ -7150,7 +7150,7 @@
                 </a:solidFill>
                 <a:latin typeface="JetBrains Mono"/>
               </a:rPr>
-              <a:t>Benedikt Zoller Coaching  ·  FKB Campus  ·  M23</a:t>
+              <a:t>FKB Campus  ·  M23</a:t>
             </a:r>
           </a:p>
         </p:txBody>
@@ -7504,7 +7504,7 @@
                 </a:solidFill>
                 <a:latin typeface="JetBrains Mono"/>
               </a:rPr>
-              <a:t>Benedikt Zoller Coaching  ·  FKB Campus  ·  M23</a:t>
+              <a:t>FKB Campus  ·  M23</a:t>
             </a:r>
           </a:p>
         </p:txBody>
@@ -7976,7 +7976,7 @@
                 </a:solidFill>
                 <a:latin typeface="JetBrains Mono"/>
               </a:rPr>
-              <a:t>Benedikt Zoller Coaching  ·  FKB Campus  ·  M23</a:t>
+              <a:t>FKB Campus  ·  M23</a:t>
             </a:r>
           </a:p>
         </p:txBody>

--- a/protected-downloads/praesentation/M23.pptx
+++ b/protected-downloads/praesentation/M23.pptx
@@ -5688,7 +5688,7 @@
                 </a:solidFill>
                 <a:latin typeface="Consolas"/>
               </a:rPr>
-              <a:t>16:30–17:00 </a:t>
+              <a:t>16:30–16:40 </a:t>
             </a:r>
             <a:r>
               <a:rPr sz="1200" b="1">
@@ -5697,7 +5697,81 @@
                 </a:solidFill>
                 <a:latin typeface="Arial"/>
               </a:rPr>
-              <a:t>  Abschluss</a:t>
+              <a:t>  Soll-Ist-Abgleich</a:t>
+            </a:r>
+            <a:r>
+              <a:rPr sz="900">
+                <a:solidFill>
+                  <a:srgbClr val="78808C"/>
+                </a:solidFill>
+                <a:latin typeface="Arial"/>
+              </a:rPr>
+              <a:t>  ·  Demo</a:t>
+            </a:r>
+          </a:p>
+          <a:p>
+            <a:pPr>
+              <a:spcBef>
+                <a:spcPts val="400"/>
+              </a:spcBef>
+              <a:spcAft>
+                <a:spcPts val="100"/>
+              </a:spcAft>
+            </a:pPr>
+            <a:r>
+              <a:rPr sz="900">
+                <a:solidFill>
+                  <a:srgbClr val="78808C"/>
+                </a:solidFill>
+                <a:latin typeface="Consolas"/>
+              </a:rPr>
+              <a:t>16:40–17:00 </a:t>
+            </a:r>
+            <a:r>
+              <a:rPr sz="1200" b="1">
+                <a:solidFill>
+                  <a:srgbClr val="3D5466"/>
+                </a:solidFill>
+                <a:latin typeface="Arial"/>
+              </a:rPr>
+              <a:t>  Transfer + Covenants</a:t>
+            </a:r>
+            <a:r>
+              <a:rPr sz="900">
+                <a:solidFill>
+                  <a:srgbClr val="78808C"/>
+                </a:solidFill>
+                <a:latin typeface="Arial"/>
+              </a:rPr>
+              <a:t>  ·  Plenum</a:t>
+            </a:r>
+          </a:p>
+          <a:p>
+            <a:pPr>
+              <a:spcBef>
+                <a:spcPts val="400"/>
+              </a:spcBef>
+              <a:spcAft>
+                <a:spcPts val="100"/>
+              </a:spcAft>
+            </a:pPr>
+            <a:r>
+              <a:rPr sz="900">
+                <a:solidFill>
+                  <a:srgbClr val="78808C"/>
+                </a:solidFill>
+                <a:latin typeface="Consolas"/>
+              </a:rPr>
+              <a:t>17:00–17:15 </a:t>
+            </a:r>
+            <a:r>
+              <a:rPr sz="1200" b="1">
+                <a:solidFill>
+                  <a:srgbClr val="3D5466"/>
+                </a:solidFill>
+                <a:latin typeface="Arial"/>
+              </a:rPr>
+              <a:t>  Reflexion + Abschluss</a:t>
             </a:r>
             <a:r>
               <a:rPr sz="900">

--- a/protected-downloads/praesentation/M23.pptx
+++ b/protected-downloads/praesentation/M23.pptx
@@ -4175,7 +4175,7 @@
                 </a:solidFill>
                 <a:latin typeface="Arial"/>
               </a:rPr>
-              <a:t>v0.1</a:t>
+              <a:t>v1.0</a:t>
             </a:r>
           </a:p>
         </p:txBody>

--- a/protected-downloads/praesentation/M23.pptx
+++ b/protected-downloads/praesentation/M23.pptx
@@ -3850,7 +3850,7 @@
                 <a:solidFill>
                   <a:srgbClr val="C8D2E6"/>
                 </a:solidFill>
-                <a:latin typeface="JetBrains Mono"/>
+                <a:latin typeface="Consolas"/>
               </a:rPr>
               <a:t>FKB CAMPUS  ·  FIRMENKUNDENAKADEMIE  ·  M23</a:t>
             </a:r>
@@ -3885,7 +3885,7 @@
                 <a:solidFill>
                   <a:srgbClr val="FFFFFF"/>
                 </a:solidFill>
-                <a:latin typeface="Source Serif 4"/>
+                <a:latin typeface="Arial"/>
               </a:rPr>
               <a:t>Financial Modelling</a:t>
             </a:r>
@@ -3920,7 +3920,7 @@
                 <a:solidFill>
                   <a:srgbClr val="BECDE6"/>
                 </a:solidFill>
-                <a:latin typeface="Source Serif 4"/>
+                <a:latin typeface="Arial"/>
               </a:rPr>
               <a:t>Mit dem Kunden gemeinsam integrierte Planungsrechnungen erstellen</a:t>
             </a:r>
@@ -3998,7 +3998,7 @@
                 <a:solidFill>
                   <a:srgbClr val="A0B4D2"/>
                 </a:solidFill>
-                <a:latin typeface="JetBrains Mono"/>
+                <a:latin typeface="Consolas"/>
               </a:rPr>
               <a:t>KOMPETENZFELD</a:t>
             </a:r>
@@ -4068,7 +4068,7 @@
                 <a:solidFill>
                   <a:srgbClr val="A0B4D2"/>
                 </a:solidFill>
-                <a:latin typeface="JetBrains Mono"/>
+                <a:latin typeface="Consolas"/>
               </a:rPr>
               <a:t>KOMPETENZSTUFE</a:t>
             </a:r>
@@ -4138,7 +4138,7 @@
                 <a:solidFill>
                   <a:srgbClr val="A0B4D2"/>
                 </a:solidFill>
-                <a:latin typeface="JetBrains Mono"/>
+                <a:latin typeface="Consolas"/>
               </a:rPr>
               <a:t>VERSION</a:t>
             </a:r>
@@ -4251,7 +4251,7 @@
                 <a:solidFill>
                   <a:srgbClr val="96A5BE"/>
                 </a:solidFill>
-                <a:latin typeface="JetBrains Mono"/>
+                <a:latin typeface="Consolas"/>
               </a:rPr>
               <a:t>FKB Campus  ·  2026</a:t>
             </a:r>
@@ -4286,7 +4286,7 @@
                 <a:solidFill>
                   <a:srgbClr val="96A5BE"/>
                 </a:solidFill>
-                <a:latin typeface="JetBrains Mono"/>
+                <a:latin typeface="Consolas"/>
               </a:rPr>
               <a:t>Trainer-Präsentation</a:t>
             </a:r>
@@ -4425,7 +4425,7 @@
                 <a:solidFill>
                   <a:srgbClr val="78808C"/>
                 </a:solidFill>
-                <a:latin typeface="JetBrains Mono"/>
+                <a:latin typeface="Consolas"/>
               </a:rPr>
               <a:t>ÜBERBLICK  ·  M23</a:t>
             </a:r>
@@ -4503,7 +4503,7 @@
                 <a:solidFill>
                   <a:srgbClr val="1F2C56"/>
                 </a:solidFill>
-                <a:latin typeface="Source Serif 4"/>
+                <a:latin typeface="Arial"/>
               </a:rPr>
               <a:t>Worum geht es heute</a:t>
             </a:r>
@@ -4652,7 +4652,7 @@
                 <a:solidFill>
                   <a:srgbClr val="A0B4D2"/>
                 </a:solidFill>
-                <a:latin typeface="JetBrains Mono"/>
+                <a:latin typeface="Consolas"/>
               </a:rPr>
               <a:t>FKB Campus  ·  M23</a:t>
             </a:r>
@@ -4791,7 +4791,7 @@
                 <a:solidFill>
                   <a:srgbClr val="78808C"/>
                 </a:solidFill>
-                <a:latin typeface="JetBrains Mono"/>
+                <a:latin typeface="Consolas"/>
               </a:rPr>
               <a:t>LERNZIELE  ·  M23</a:t>
             </a:r>
@@ -4869,7 +4869,7 @@
                 <a:solidFill>
                   <a:srgbClr val="1F2C56"/>
                 </a:solidFill>
-                <a:latin typeface="Source Serif 4"/>
+                <a:latin typeface="Arial"/>
               </a:rPr>
               <a:t>Was Sie heute mitnehmen</a:t>
             </a:r>
@@ -5084,7 +5084,7 @@
                 <a:solidFill>
                   <a:srgbClr val="A0B4D2"/>
                 </a:solidFill>
-                <a:latin typeface="JetBrains Mono"/>
+                <a:latin typeface="Consolas"/>
               </a:rPr>
               <a:t>FKB Campus  ·  M23</a:t>
             </a:r>
@@ -5223,7 +5223,7 @@
                 <a:solidFill>
                   <a:srgbClr val="78808C"/>
                 </a:solidFill>
-                <a:latin typeface="JetBrains Mono"/>
+                <a:latin typeface="Consolas"/>
               </a:rPr>
               <a:t>AGENDA  ·  M23</a:t>
             </a:r>
@@ -5301,7 +5301,7 @@
                 <a:solidFill>
                   <a:srgbClr val="1F2C56"/>
                 </a:solidFill>
-                <a:latin typeface="Source Serif 4"/>
+                <a:latin typeface="Arial"/>
               </a:rPr>
               <a:t>So läuft das Modul</a:t>
             </a:r>
@@ -5856,7 +5856,7 @@
                 <a:solidFill>
                   <a:srgbClr val="A0B4D2"/>
                 </a:solidFill>
-                <a:latin typeface="JetBrains Mono"/>
+                <a:latin typeface="Consolas"/>
               </a:rPr>
               <a:t>FKB Campus  ·  M23</a:t>
             </a:r>
@@ -5995,7 +5995,7 @@
                 <a:solidFill>
                   <a:srgbClr val="78808C"/>
                 </a:solidFill>
-                <a:latin typeface="JetBrains Mono"/>
+                <a:latin typeface="Consolas"/>
               </a:rPr>
               <a:t>M23  ·  INHALT</a:t>
             </a:r>
@@ -6116,7 +6116,7 @@
                 <a:solidFill>
                   <a:srgbClr val="1F2C56"/>
                 </a:solidFill>
-                <a:latin typeface="Source Serif 4"/>
+                <a:latin typeface="Arial"/>
               </a:rPr>
               <a:t>Theorie-Input: Das integrierte Planungsmodell</a:t>
             </a:r>
@@ -6132,7 +6132,7 @@
         <p:spPr>
           <a:xfrm>
             <a:off x="685800" y="1417320"/>
-            <a:ext cx="10817352" cy="5029200"/>
+            <a:ext cx="10817352" cy="4892040"/>
           </a:xfrm>
           <a:prstGeom prst="rect">
             <a:avLst/>
@@ -6140,7 +6140,7 @@
           <a:noFill/>
         </p:spPr>
         <p:txBody>
-          <a:bodyPr wrap="square">
+          <a:bodyPr wrap="square" anchor="ctr">
             <a:spAutoFit/>
           </a:bodyPr>
           <a:lstStyle/>
@@ -6158,32 +6158,13 @@
                 <a:solidFill>
                   <a:srgbClr val="78808C"/>
                 </a:solidFill>
-                <a:latin typeface="JetBrains Mono"/>
-              </a:rPr>
-              <a:t>WARUM ÜBERHAUPT PLANEN?</a:t>
-            </a:r>
-          </a:p>
-          <a:p>
-            <a:pPr>
-              <a:spcBef>
-                <a:spcPts val="1000"/>
-              </a:spcBef>
-              <a:spcAft>
-                <a:spcPts val="200"/>
-              </a:spcAft>
-            </a:pPr>
-            <a:r>
-              <a:rPr sz="800" b="1">
-                <a:solidFill>
-                  <a:srgbClr val="78808C"/>
-                </a:solidFill>
-                <a:latin typeface="JetBrains Mono"/>
+                <a:latin typeface="Consolas"/>
               </a:rPr>
               <a:t>DIE DREI RECHENWERKE UND IHRE VERKNÜPFUNG</a:t>
             </a:r>
           </a:p>
           <a:p>
-            <a:pPr>
+            <a:pPr marL="190500" indent="-190500">
               <a:spcBef>
                 <a:spcPts val="400"/>
               </a:spcBef>
@@ -6202,7 +6183,7 @@
             </a:r>
           </a:p>
           <a:p>
-            <a:pPr>
+            <a:pPr marL="190500" indent="-190500">
               <a:spcBef>
                 <a:spcPts val="400"/>
               </a:spcBef>
@@ -6221,7 +6202,7 @@
             </a:r>
           </a:p>
           <a:p>
-            <a:pPr>
+            <a:pPr marL="190500" indent="-190500">
               <a:spcBef>
                 <a:spcPts val="400"/>
               </a:spcBef>
@@ -6240,7 +6221,7 @@
             </a:r>
           </a:p>
           <a:p>
-            <a:pPr>
+            <a:pPr marL="190500" indent="-190500">
               <a:spcBef>
                 <a:spcPts val="400"/>
               </a:spcBef>
@@ -6258,44 +6239,6 @@
               <a:t>▸  Die Veränderung des Working Capital (Vorräte, Forderungen, Verbindlichkeiten) ist das Bindeglied zwischen Ergebnis und operativem Cashflow.</a:t>
             </a:r>
           </a:p>
-          <a:p>
-            <a:pPr>
-              <a:spcBef>
-                <a:spcPts val="1000"/>
-              </a:spcBef>
-              <a:spcAft>
-                <a:spcPts val="200"/>
-              </a:spcAft>
-            </a:pPr>
-            <a:r>
-              <a:rPr sz="800" b="1">
-                <a:solidFill>
-                  <a:srgbClr val="78808C"/>
-                </a:solidFill>
-                <a:latin typeface="JetBrains Mono"/>
-              </a:rPr>
-              <a:t>DER WERTTREIBERBAUM</a:t>
-            </a:r>
-          </a:p>
-          <a:p>
-            <a:pPr>
-              <a:spcBef>
-                <a:spcPts val="1000"/>
-              </a:spcBef>
-              <a:spcAft>
-                <a:spcPts val="200"/>
-              </a:spcAft>
-            </a:pPr>
-            <a:r>
-              <a:rPr sz="800" b="1">
-                <a:solidFill>
-                  <a:srgbClr val="78808C"/>
-                </a:solidFill>
-                <a:latin typeface="JetBrains Mono"/>
-              </a:rPr>
-              <a:t>VOM AGREE-EXPORT ZUM MODELL: DIE MAPPING-TABELLE</a:t>
-            </a:r>
-          </a:p>
         </p:txBody>
       </p:sp>
       <p:sp>
@@ -6369,7 +6312,7 @@
                 <a:solidFill>
                   <a:srgbClr val="A0B4D2"/>
                 </a:solidFill>
-                <a:latin typeface="JetBrains Mono"/>
+                <a:latin typeface="Consolas"/>
               </a:rPr>
               <a:t>FKB Campus  ·  M23</a:t>
             </a:r>
@@ -6508,7 +6451,7 @@
                 <a:solidFill>
                   <a:srgbClr val="78808C"/>
                 </a:solidFill>
-                <a:latin typeface="JetBrains Mono"/>
+                <a:latin typeface="Consolas"/>
               </a:rPr>
               <a:t>M23  ·  ARBEITSBLATT</a:t>
             </a:r>
@@ -6629,7 +6572,7 @@
                 <a:solidFill>
                   <a:srgbClr val="1F2C56"/>
                 </a:solidFill>
-                <a:latin typeface="Source Serif 4"/>
+                <a:latin typeface="Arial"/>
               </a:rPr>
               <a:t>Praxisfall: Garten- und Landschaftsbau Musterregion GmbH</a:t>
             </a:r>
@@ -6658,7 +6601,7 @@
           </a:bodyPr>
           <a:lstStyle/>
           <a:p>
-            <a:pPr>
+            <a:pPr marL="190500" indent="-190500">
               <a:spcBef>
                 <a:spcPts val="400"/>
               </a:spcBef>
@@ -6677,7 +6620,7 @@
             </a:r>
           </a:p>
           <a:p>
-            <a:pPr>
+            <a:pPr marL="190500" indent="-190500">
               <a:spcBef>
                 <a:spcPts val="400"/>
               </a:spcBef>
@@ -6696,7 +6639,7 @@
             </a:r>
           </a:p>
           <a:p>
-            <a:pPr>
+            <a:pPr marL="190500" indent="-190500">
               <a:spcBef>
                 <a:spcPts val="400"/>
               </a:spcBef>
@@ -6715,7 +6658,7 @@
             </a:r>
           </a:p>
           <a:p>
-            <a:pPr>
+            <a:pPr marL="190500" indent="-190500">
               <a:spcBef>
                 <a:spcPts val="400"/>
               </a:spcBef>
@@ -6734,7 +6677,7 @@
             </a:r>
           </a:p>
           <a:p>
-            <a:pPr>
+            <a:pPr marL="190500" indent="-190500">
               <a:spcBef>
                 <a:spcPts val="400"/>
               </a:spcBef>
@@ -6903,7 +6846,7 @@
                 <a:solidFill>
                   <a:srgbClr val="A0B4D2"/>
                 </a:solidFill>
-                <a:latin typeface="JetBrains Mono"/>
+                <a:latin typeface="Consolas"/>
               </a:rPr>
               <a:t>FKB Campus  ·  M23</a:t>
             </a:r>
@@ -7042,7 +6985,7 @@
                 <a:solidFill>
                   <a:srgbClr val="78808C"/>
                 </a:solidFill>
-                <a:latin typeface="JetBrains Mono"/>
+                <a:latin typeface="Consolas"/>
               </a:rPr>
               <a:t>M23  ·  SCHAUBILD</a:t>
             </a:r>
@@ -7077,7 +7020,7 @@
                 <a:solidFill>
                   <a:srgbClr val="1F2C56"/>
                 </a:solidFill>
-                <a:latin typeface="Source Serif 4"/>
+                <a:latin typeface="Arial"/>
               </a:rPr>
               <a:t>Architektur des integrierten Planungsmodells</a:t>
             </a:r>
@@ -7222,7 +7165,7 @@
                 <a:solidFill>
                   <a:srgbClr val="A0B4D2"/>
                 </a:solidFill>
-                <a:latin typeface="JetBrains Mono"/>
+                <a:latin typeface="Consolas"/>
               </a:rPr>
               <a:t>FKB Campus  ·  M23</a:t>
             </a:r>
@@ -7257,7 +7200,7 @@
                 <a:solidFill>
                   <a:srgbClr val="A0B4D2"/>
                 </a:solidFill>
-                <a:latin typeface="JetBrains Mono"/>
+                <a:latin typeface="Consolas"/>
               </a:rPr>
               <a:t>Schaubild</a:t>
             </a:r>
@@ -7396,7 +7339,7 @@
                 <a:solidFill>
                   <a:srgbClr val="78808C"/>
                 </a:solidFill>
-                <a:latin typeface="JetBrains Mono"/>
+                <a:latin typeface="Consolas"/>
               </a:rPr>
               <a:t>M23  ·  SCHAUBILD</a:t>
             </a:r>
@@ -7431,7 +7374,7 @@
                 <a:solidFill>
                   <a:srgbClr val="1F2C56"/>
                 </a:solidFill>
-                <a:latin typeface="Source Serif 4"/>
+                <a:latin typeface="Arial"/>
               </a:rPr>
               <a:t>Handlungsempfehlung</a:t>
             </a:r>
@@ -7576,7 +7519,7 @@
                 <a:solidFill>
                   <a:srgbClr val="A0B4D2"/>
                 </a:solidFill>
-                <a:latin typeface="JetBrains Mono"/>
+                <a:latin typeface="Consolas"/>
               </a:rPr>
               <a:t>FKB Campus  ·  M23</a:t>
             </a:r>
@@ -7611,7 +7554,7 @@
                 <a:solidFill>
                   <a:srgbClr val="A0B4D2"/>
                 </a:solidFill>
-                <a:latin typeface="JetBrains Mono"/>
+                <a:latin typeface="Consolas"/>
               </a:rPr>
               <a:t>Schaubild</a:t>
             </a:r>
@@ -7750,7 +7693,7 @@
                 <a:solidFill>
                   <a:srgbClr val="78808C"/>
                 </a:solidFill>
-                <a:latin typeface="JetBrains Mono"/>
+                <a:latin typeface="Consolas"/>
               </a:rPr>
               <a:t>M23  ·  INHALT</a:t>
             </a:r>
@@ -7871,7 +7814,7 @@
                 <a:solidFill>
                   <a:srgbClr val="1F2C56"/>
                 </a:solidFill>
-                <a:latin typeface="Source Serif 4"/>
+                <a:latin typeface="Arial"/>
               </a:rPr>
               <a:t>Reflexionsfragen</a:t>
             </a:r>
@@ -7887,7 +7830,7 @@
         <p:spPr>
           <a:xfrm>
             <a:off x="685800" y="1417320"/>
-            <a:ext cx="10817352" cy="5029200"/>
+            <a:ext cx="10817352" cy="4892040"/>
           </a:xfrm>
           <a:prstGeom prst="rect">
             <a:avLst/>
@@ -7895,12 +7838,12 @@
           <a:noFill/>
         </p:spPr>
         <p:txBody>
-          <a:bodyPr wrap="square">
+          <a:bodyPr wrap="square" anchor="ctr">
             <a:spAutoFit/>
           </a:bodyPr>
           <a:lstStyle/>
           <a:p>
-            <a:pPr>
+            <a:pPr marL="190500" indent="-190500">
               <a:spcBef>
                 <a:spcPts val="400"/>
               </a:spcBef>
@@ -7919,7 +7862,7 @@
             </a:r>
           </a:p>
           <a:p>
-            <a:pPr>
+            <a:pPr marL="190500" indent="-190500">
               <a:spcBef>
                 <a:spcPts val="400"/>
               </a:spcBef>
@@ -7938,7 +7881,7 @@
             </a:r>
           </a:p>
           <a:p>
-            <a:pPr>
+            <a:pPr marL="190500" indent="-190500">
               <a:spcBef>
                 <a:spcPts val="400"/>
               </a:spcBef>
@@ -7957,7 +7900,7 @@
             </a:r>
           </a:p>
           <a:p>
-            <a:pPr>
+            <a:pPr marL="190500" indent="-190500">
               <a:spcBef>
                 <a:spcPts val="400"/>
               </a:spcBef>
@@ -8048,7 +7991,7 @@
                 <a:solidFill>
                   <a:srgbClr val="A0B4D2"/>
                 </a:solidFill>
-                <a:latin typeface="JetBrains Mono"/>
+                <a:latin typeface="Consolas"/>
               </a:rPr>
               <a:t>FKB Campus  ·  M23</a:t>
             </a:r>

--- a/protected-downloads/praesentation/M23.pptx
+++ b/protected-downloads/praesentation/M23.pptx
@@ -14,6 +14,23 @@
     <p:sldId id="262" r:id="rId14"/>
     <p:sldId id="263" r:id="rId15"/>
     <p:sldId id="264" r:id="rId16"/>
+    <p:sldId id="265" r:id="rId17"/>
+    <p:sldId id="266" r:id="rId18"/>
+    <p:sldId id="267" r:id="rId19"/>
+    <p:sldId id="268" r:id="rId20"/>
+    <p:sldId id="269" r:id="rId21"/>
+    <p:sldId id="270" r:id="rId22"/>
+    <p:sldId id="271" r:id="rId23"/>
+    <p:sldId id="272" r:id="rId24"/>
+    <p:sldId id="273" r:id="rId25"/>
+    <p:sldId id="274" r:id="rId26"/>
+    <p:sldId id="275" r:id="rId27"/>
+    <p:sldId id="276" r:id="rId28"/>
+    <p:sldId id="277" r:id="rId29"/>
+    <p:sldId id="278" r:id="rId30"/>
+    <p:sldId id="279" r:id="rId31"/>
+    <p:sldId id="280" r:id="rId32"/>
+    <p:sldId id="281" r:id="rId33"/>
   </p:sldIdLst>
   <p:sldSz cx="12188952" cy="6858000" type="screen4x3"/>
   <p:notesSz cx="6858000" cy="9144000"/>
@@ -535,6 +552,496 @@
 </p:notes>
 </file>
 
+<file path=ppt/notesSlides/notesSlide10.xml><?xml version="1.0" encoding="utf-8"?>
+<p:notes xmlns:a="http://schemas.openxmlformats.org/drawingml/2006/main" xmlns:p="http://schemas.openxmlformats.org/presentationml/2006/main" xmlns:r="http://schemas.openxmlformats.org/officeDocument/2006/relationships">
+  <p:cSld>
+    <p:spTree>
+      <p:nvGrpSpPr>
+        <p:cNvPr id="1" name=""/>
+        <p:cNvGrpSpPr/>
+        <p:nvPr/>
+      </p:nvGrpSpPr>
+      <p:grpSpPr>
+        <a:xfrm>
+          <a:off x="0" y="0"/>
+          <a:ext cx="0" cy="0"/>
+          <a:chOff x="0" y="0"/>
+          <a:chExt cx="0" cy="0"/>
+        </a:xfrm>
+      </p:grpSpPr>
+      <p:sp>
+        <p:nvSpPr>
+          <p:cNvPr id="2" name="Slide Image Placeholder 1"/>
+          <p:cNvSpPr>
+            <a:spLocks noGrp="1"/>
+          </p:cNvSpPr>
+          <p:nvPr>
+            <p:ph type="sldImg" idx="2"/>
+          </p:nvPr>
+        </p:nvSpPr>
+        <p:spPr/>
+      </p:sp>
+      <p:sp>
+        <p:nvSpPr>
+          <p:cNvPr id="3" name="Notes Placeholder 2"/>
+          <p:cNvSpPr>
+            <a:spLocks noGrp="1"/>
+          </p:cNvSpPr>
+          <p:nvPr>
+            <p:ph type="body" idx="3" sz="quarter"/>
+          </p:nvPr>
+        </p:nvSpPr>
+        <p:spPr/>
+        <p:txBody>
+          <a:bodyPr/>
+          <a:lstStyle/>
+          <a:p>
+            <a:r>
+              <a:t>Formelkarte nutzen. Bei DSCR &lt; 1,20 ist Tilgungsstreckung oder Laufzeitverlängerung zu prüfen.</a:t>
+            </a:r>
+          </a:p>
+        </p:txBody>
+      </p:sp>
+      <p:sp>
+        <p:nvSpPr>
+          <p:cNvPr id="4" name="Slide Number Placeholder 3"/>
+          <p:cNvSpPr>
+            <a:spLocks noGrp="1"/>
+          </p:cNvSpPr>
+          <p:nvPr>
+            <p:ph type="sldNum" idx="5" sz="quarter"/>
+          </p:nvPr>
+        </p:nvSpPr>
+        <p:spPr/>
+      </p:sp>
+    </p:spTree>
+  </p:cSld>
+  <p:clrMapOvr>
+    <a:masterClrMapping/>
+  </p:clrMapOvr>
+</p:notes>
+</file>
+
+<file path=ppt/notesSlides/notesSlide11.xml><?xml version="1.0" encoding="utf-8"?>
+<p:notes xmlns:a="http://schemas.openxmlformats.org/drawingml/2006/main" xmlns:p="http://schemas.openxmlformats.org/presentationml/2006/main" xmlns:r="http://schemas.openxmlformats.org/officeDocument/2006/relationships">
+  <p:cSld>
+    <p:spTree>
+      <p:nvGrpSpPr>
+        <p:cNvPr id="1" name=""/>
+        <p:cNvGrpSpPr/>
+        <p:nvPr/>
+      </p:nvGrpSpPr>
+      <p:grpSpPr>
+        <a:xfrm>
+          <a:off x="0" y="0"/>
+          <a:ext cx="0" cy="0"/>
+          <a:chOff x="0" y="0"/>
+          <a:chExt cx="0" cy="0"/>
+        </a:xfrm>
+      </p:grpSpPr>
+      <p:sp>
+        <p:nvSpPr>
+          <p:cNvPr id="2" name="Slide Image Placeholder 1"/>
+          <p:cNvSpPr>
+            <a:spLocks noGrp="1"/>
+          </p:cNvSpPr>
+          <p:nvPr>
+            <p:ph type="sldImg" idx="2"/>
+          </p:nvPr>
+        </p:nvSpPr>
+        <p:spPr/>
+      </p:sp>
+      <p:sp>
+        <p:nvSpPr>
+          <p:cNvPr id="3" name="Notes Placeholder 2"/>
+          <p:cNvSpPr>
+            <a:spLocks noGrp="1"/>
+          </p:cNvSpPr>
+          <p:nvPr>
+            <p:ph type="body" idx="3" sz="quarter"/>
+          </p:nvPr>
+        </p:nvSpPr>
+        <p:spPr/>
+        <p:txBody>
+          <a:bodyPr/>
+          <a:lstStyle/>
+          <a:p>
+            <a:r>
+              <a:t>Gruppenarbeit (AB-5). Der Downside ist der eigentliche Prüfstein der Finanzierung.</a:t>
+            </a:r>
+          </a:p>
+        </p:txBody>
+      </p:sp>
+      <p:sp>
+        <p:nvSpPr>
+          <p:cNvPr id="4" name="Slide Number Placeholder 3"/>
+          <p:cNvSpPr>
+            <a:spLocks noGrp="1"/>
+          </p:cNvSpPr>
+          <p:nvPr>
+            <p:ph type="sldNum" idx="5" sz="quarter"/>
+          </p:nvPr>
+        </p:nvSpPr>
+        <p:spPr/>
+      </p:sp>
+    </p:spTree>
+  </p:cSld>
+  <p:clrMapOvr>
+    <a:masterClrMapping/>
+  </p:clrMapOvr>
+</p:notes>
+</file>
+
+<file path=ppt/notesSlides/notesSlide12.xml><?xml version="1.0" encoding="utf-8"?>
+<p:notes xmlns:a="http://schemas.openxmlformats.org/drawingml/2006/main" xmlns:p="http://schemas.openxmlformats.org/presentationml/2006/main" xmlns:r="http://schemas.openxmlformats.org/officeDocument/2006/relationships">
+  <p:cSld>
+    <p:spTree>
+      <p:nvGrpSpPr>
+        <p:cNvPr id="1" name=""/>
+        <p:cNvGrpSpPr/>
+        <p:nvPr/>
+      </p:nvGrpSpPr>
+      <p:grpSpPr>
+        <a:xfrm>
+          <a:off x="0" y="0"/>
+          <a:ext cx="0" cy="0"/>
+          <a:chOff x="0" y="0"/>
+          <a:chExt cx="0" cy="0"/>
+        </a:xfrm>
+      </p:grpSpPr>
+      <p:sp>
+        <p:nvSpPr>
+          <p:cNvPr id="2" name="Slide Image Placeholder 1"/>
+          <p:cNvSpPr>
+            <a:spLocks noGrp="1"/>
+          </p:cNvSpPr>
+          <p:nvPr>
+            <p:ph type="sldImg" idx="2"/>
+          </p:nvPr>
+        </p:nvSpPr>
+        <p:spPr/>
+      </p:sp>
+      <p:sp>
+        <p:nvSpPr>
+          <p:cNvPr id="3" name="Notes Placeholder 2"/>
+          <p:cNvSpPr>
+            <a:spLocks noGrp="1"/>
+          </p:cNvSpPr>
+          <p:nvPr>
+            <p:ph type="body" idx="3" sz="quarter"/>
+          </p:nvPr>
+        </p:nvSpPr>
+        <p:spPr/>
+        <p:txBody>
+          <a:bodyPr/>
+          <a:lstStyle/>
+          <a:p>
+            <a:r>
+              <a:t>Bei negativer Cashreserve die Betriebsmittellinie dimensionieren und als kurzfristige Linie im Modell abbilden.</a:t>
+            </a:r>
+          </a:p>
+        </p:txBody>
+      </p:sp>
+      <p:sp>
+        <p:nvSpPr>
+          <p:cNvPr id="4" name="Slide Number Placeholder 3"/>
+          <p:cNvSpPr>
+            <a:spLocks noGrp="1"/>
+          </p:cNvSpPr>
+          <p:nvPr>
+            <p:ph type="sldNum" idx="5" sz="quarter"/>
+          </p:nvPr>
+        </p:nvSpPr>
+        <p:spPr/>
+      </p:sp>
+    </p:spTree>
+  </p:cSld>
+  <p:clrMapOvr>
+    <a:masterClrMapping/>
+  </p:clrMapOvr>
+</p:notes>
+</file>
+
+<file path=ppt/notesSlides/notesSlide13.xml><?xml version="1.0" encoding="utf-8"?>
+<p:notes xmlns:a="http://schemas.openxmlformats.org/drawingml/2006/main" xmlns:p="http://schemas.openxmlformats.org/presentationml/2006/main" xmlns:r="http://schemas.openxmlformats.org/officeDocument/2006/relationships">
+  <p:cSld>
+    <p:spTree>
+      <p:nvGrpSpPr>
+        <p:cNvPr id="1" name=""/>
+        <p:cNvGrpSpPr/>
+        <p:nvPr/>
+      </p:nvGrpSpPr>
+      <p:grpSpPr>
+        <a:xfrm>
+          <a:off x="0" y="0"/>
+          <a:ext cx="0" cy="0"/>
+          <a:chOff x="0" y="0"/>
+          <a:chExt cx="0" cy="0"/>
+        </a:xfrm>
+      </p:grpSpPr>
+      <p:sp>
+        <p:nvSpPr>
+          <p:cNvPr id="2" name="Slide Image Placeholder 1"/>
+          <p:cNvSpPr>
+            <a:spLocks noGrp="1"/>
+          </p:cNvSpPr>
+          <p:nvPr>
+            <p:ph type="sldImg" idx="2"/>
+          </p:nvPr>
+        </p:nvSpPr>
+        <p:spPr/>
+      </p:sp>
+      <p:sp>
+        <p:nvSpPr>
+          <p:cNvPr id="3" name="Notes Placeholder 2"/>
+          <p:cNvSpPr>
+            <a:spLocks noGrp="1"/>
+          </p:cNvSpPr>
+          <p:nvPr>
+            <p:ph type="body" idx="3" sz="quarter"/>
+          </p:nvPr>
+        </p:nvSpPr>
+        <p:spPr/>
+        <p:txBody>
+          <a:bodyPr/>
+          <a:lstStyle/>
+          <a:p>
+            <a:r>
+              <a:t>Rollenspiel (AB-6): Ergebnis erklären. Danach Soll-Ist-Abgleich als Monitoring (AB-7, Plan vs. BWA).</a:t>
+            </a:r>
+          </a:p>
+        </p:txBody>
+      </p:sp>
+      <p:sp>
+        <p:nvSpPr>
+          <p:cNvPr id="4" name="Slide Number Placeholder 3"/>
+          <p:cNvSpPr>
+            <a:spLocks noGrp="1"/>
+          </p:cNvSpPr>
+          <p:nvPr>
+            <p:ph type="sldNum" idx="5" sz="quarter"/>
+          </p:nvPr>
+        </p:nvSpPr>
+        <p:spPr/>
+      </p:sp>
+    </p:spTree>
+  </p:cSld>
+  <p:clrMapOvr>
+    <a:masterClrMapping/>
+  </p:clrMapOvr>
+</p:notes>
+</file>
+
+<file path=ppt/notesSlides/notesSlide14.xml><?xml version="1.0" encoding="utf-8"?>
+<p:notes xmlns:a="http://schemas.openxmlformats.org/drawingml/2006/main" xmlns:p="http://schemas.openxmlformats.org/presentationml/2006/main" xmlns:r="http://schemas.openxmlformats.org/officeDocument/2006/relationships">
+  <p:cSld>
+    <p:spTree>
+      <p:nvGrpSpPr>
+        <p:cNvPr id="1" name=""/>
+        <p:cNvGrpSpPr/>
+        <p:nvPr/>
+      </p:nvGrpSpPr>
+      <p:grpSpPr>
+        <a:xfrm>
+          <a:off x="0" y="0"/>
+          <a:ext cx="0" cy="0"/>
+          <a:chOff x="0" y="0"/>
+          <a:chExt cx="0" cy="0"/>
+        </a:xfrm>
+      </p:grpSpPr>
+      <p:sp>
+        <p:nvSpPr>
+          <p:cNvPr id="2" name="Slide Image Placeholder 1"/>
+          <p:cNvSpPr>
+            <a:spLocks noGrp="1"/>
+          </p:cNvSpPr>
+          <p:nvPr>
+            <p:ph type="sldImg" idx="2"/>
+          </p:nvPr>
+        </p:nvSpPr>
+        <p:spPr/>
+      </p:sp>
+      <p:sp>
+        <p:nvSpPr>
+          <p:cNvPr id="3" name="Notes Placeholder 2"/>
+          <p:cNvSpPr>
+            <a:spLocks noGrp="1"/>
+          </p:cNvSpPr>
+          <p:nvPr>
+            <p:ph type="body" idx="3" sz="quarter"/>
+          </p:nvPr>
+        </p:nvSpPr>
+        <p:spPr/>
+        <p:txBody>
+          <a:bodyPr/>
+          <a:lstStyle/>
+          <a:p>
+            <a:r>
+              <a:t>Handlungsempfehlungen: bei EK-Quote &lt; 10 % vor Investitionssprung Eigenkapital-/Nachrangkapital thematisieren; bei DSCR &lt; 1,20 Tilgung strecken.</a:t>
+            </a:r>
+          </a:p>
+        </p:txBody>
+      </p:sp>
+      <p:sp>
+        <p:nvSpPr>
+          <p:cNvPr id="4" name="Slide Number Placeholder 3"/>
+          <p:cNvSpPr>
+            <a:spLocks noGrp="1"/>
+          </p:cNvSpPr>
+          <p:nvPr>
+            <p:ph type="sldNum" idx="5" sz="quarter"/>
+          </p:nvPr>
+        </p:nvSpPr>
+        <p:spPr/>
+      </p:sp>
+    </p:spTree>
+  </p:cSld>
+  <p:clrMapOvr>
+    <a:masterClrMapping/>
+  </p:clrMapOvr>
+</p:notes>
+</file>
+
+<file path=ppt/notesSlides/notesSlide15.xml><?xml version="1.0" encoding="utf-8"?>
+<p:notes xmlns:a="http://schemas.openxmlformats.org/drawingml/2006/main" xmlns:p="http://schemas.openxmlformats.org/presentationml/2006/main" xmlns:r="http://schemas.openxmlformats.org/officeDocument/2006/relationships">
+  <p:cSld>
+    <p:spTree>
+      <p:nvGrpSpPr>
+        <p:cNvPr id="1" name=""/>
+        <p:cNvGrpSpPr/>
+        <p:nvPr/>
+      </p:nvGrpSpPr>
+      <p:grpSpPr>
+        <a:xfrm>
+          <a:off x="0" y="0"/>
+          <a:ext cx="0" cy="0"/>
+          <a:chOff x="0" y="0"/>
+          <a:chExt cx="0" cy="0"/>
+        </a:xfrm>
+      </p:grpSpPr>
+      <p:sp>
+        <p:nvSpPr>
+          <p:cNvPr id="2" name="Slide Image Placeholder 1"/>
+          <p:cNvSpPr>
+            <a:spLocks noGrp="1"/>
+          </p:cNvSpPr>
+          <p:nvPr>
+            <p:ph type="sldImg" idx="2"/>
+          </p:nvPr>
+        </p:nvSpPr>
+        <p:spPr/>
+      </p:sp>
+      <p:sp>
+        <p:nvSpPr>
+          <p:cNvPr id="3" name="Notes Placeholder 2"/>
+          <p:cNvSpPr>
+            <a:spLocks noGrp="1"/>
+          </p:cNvSpPr>
+          <p:nvPr>
+            <p:ph type="body" idx="3" sz="quarter"/>
+          </p:nvPr>
+        </p:nvSpPr>
+        <p:spPr/>
+        <p:txBody>
+          <a:bodyPr/>
+          <a:lstStyle/>
+          <a:p>
+            <a:r>
+              <a:t>Überleitung zum Transfer und Selbstcheck.</a:t>
+            </a:r>
+          </a:p>
+        </p:txBody>
+      </p:sp>
+      <p:sp>
+        <p:nvSpPr>
+          <p:cNvPr id="4" name="Slide Number Placeholder 3"/>
+          <p:cNvSpPr>
+            <a:spLocks noGrp="1"/>
+          </p:cNvSpPr>
+          <p:nvPr>
+            <p:ph type="sldNum" idx="5" sz="quarter"/>
+          </p:nvPr>
+        </p:nvSpPr>
+        <p:spPr/>
+      </p:sp>
+    </p:spTree>
+  </p:cSld>
+  <p:clrMapOvr>
+    <a:masterClrMapping/>
+  </p:clrMapOvr>
+</p:notes>
+</file>
+
+<file path=ppt/notesSlides/notesSlide16.xml><?xml version="1.0" encoding="utf-8"?>
+<p:notes xmlns:a="http://schemas.openxmlformats.org/drawingml/2006/main" xmlns:p="http://schemas.openxmlformats.org/presentationml/2006/main" xmlns:r="http://schemas.openxmlformats.org/officeDocument/2006/relationships">
+  <p:cSld>
+    <p:spTree>
+      <p:nvGrpSpPr>
+        <p:cNvPr id="1" name=""/>
+        <p:cNvGrpSpPr/>
+        <p:nvPr/>
+      </p:nvGrpSpPr>
+      <p:grpSpPr>
+        <a:xfrm>
+          <a:off x="0" y="0"/>
+          <a:ext cx="0" cy="0"/>
+          <a:chOff x="0" y="0"/>
+          <a:chExt cx="0" cy="0"/>
+        </a:xfrm>
+      </p:grpSpPr>
+      <p:sp>
+        <p:nvSpPr>
+          <p:cNvPr id="2" name="Slide Image Placeholder 1"/>
+          <p:cNvSpPr>
+            <a:spLocks noGrp="1"/>
+          </p:cNvSpPr>
+          <p:nvPr>
+            <p:ph type="sldImg" idx="2"/>
+          </p:nvPr>
+        </p:nvSpPr>
+        <p:spPr/>
+      </p:sp>
+      <p:sp>
+        <p:nvSpPr>
+          <p:cNvPr id="3" name="Notes Placeholder 2"/>
+          <p:cNvSpPr>
+            <a:spLocks noGrp="1"/>
+          </p:cNvSpPr>
+          <p:nvPr>
+            <p:ph type="body" idx="3" sz="quarter"/>
+          </p:nvPr>
+        </p:nvSpPr>
+        <p:spPr/>
+        <p:txBody>
+          <a:bodyPr/>
+          <a:lstStyle/>
+          <a:p>
+            <a:r>
+              <a:t>Selbstcheck nach 4 Wochen (AB-8) als Transferanker.</a:t>
+            </a:r>
+          </a:p>
+        </p:txBody>
+      </p:sp>
+      <p:sp>
+        <p:nvSpPr>
+          <p:cNvPr id="4" name="Slide Number Placeholder 3"/>
+          <p:cNvSpPr>
+            <a:spLocks noGrp="1"/>
+          </p:cNvSpPr>
+          <p:nvPr>
+            <p:ph type="sldNum" idx="5" sz="quarter"/>
+          </p:nvPr>
+        </p:nvSpPr>
+        <p:spPr/>
+      </p:sp>
+    </p:spTree>
+  </p:cSld>
+  <p:clrMapOvr>
+    <a:masterClrMapping/>
+  </p:clrMapOvr>
+</p:notes>
+</file>
+
 <file path=ppt/notesSlides/notesSlide2.xml><?xml version="1.0" encoding="utf-8"?>
 <p:notes xmlns:a="http://schemas.openxmlformats.org/drawingml/2006/main" xmlns:p="http://schemas.openxmlformats.org/presentationml/2006/main" xmlns:r="http://schemas.openxmlformats.org/officeDocument/2006/relationships">
   <p:cSld>
@@ -580,7 +1087,7 @@
           <a:lstStyle/>
           <a:p>
             <a:r>
-              <a:t>Siehe Trainerhandbuch (Sektion 3) für Moderationshinweise, Timing und erwartete Teilnehmerreaktionen.</a:t>
+              <a:t>Impuls + Diskussion: Der Jahresabschluss erklärt die Vergangenheit – ob eine Investition tragbar ist, beantwortet erst die Planung.</a:t>
             </a:r>
           </a:p>
         </p:txBody>
@@ -650,17 +1157,7 @@
           <a:lstStyle/>
           <a:p>
             <a:r>
-              <a:t>AB-4 Musterlösung (Trainer-Version)</a:t>
-            </a:r>
-          </a:p>
-          <a:p>
-            <a:r>
-              <a:t>Für das erste Planjahr (Base Case, gerundet, TEUR): EBITDA ≈ 690, freier Cashflow nach Capex ≈ 250, Kapitaldienst (Zins 100 + Tilgung 110) = 210 → DSCR ≈ 1,19 – knapp unter dem Mindeststandard. Net Debt/EBITDA ≈ 2,8 → tragbar. Kernbefund: Die Ertragskraft ist gut, aber die hauchdünne EK-Quote (2 %) und der grenzwertige DSCR machen die zusätzliche Fremdfinanzierung ohne Eigenkapital-/Nachrangkomponente riskant. Empfehlung: Investition in zwei Tranchen, Tilgungsbeginn nach Hochlauf, Gesellschafter-Nachrangdarlehen als EK-Ersatz, DSCR- und EK-Quote-Covenant.</a:t>
-            </a:r>
-          </a:p>
-          <a:p>
-            <a:r>
-              <a:t>Trainer-Hinweis: Die Musterlösung dient als Korridor, nicht als einzig richtige Lösung. Entscheidend ist, dass die Teilnehmer den Zusammenhang EK-Schwäche ↔ Kapitaldienstgrenze erkennen und die Empfehlung an den Cashflow knüpfen.</a:t>
+              <a:t>Die zentrale Frage: Kann der Betrieb Investition und Kapitaldienst tragen, ohne dass die Liquidität kippt?</a:t>
             </a:r>
           </a:p>
         </p:txBody>
@@ -730,7 +1227,357 @@
           <a:lstStyle/>
           <a:p>
             <a:r>
-              <a:t>Siehe Trainerhandbuch (Sektion 3) für Moderationshinweise, Timing und erwartete Teilnehmerreaktionen.</a:t>
+              <a:t>Interaktiver Vortrag am Modell (Planungsmodell XLSX, Beamer). Die Architektur ist die Landkarte des ganzen Tages.</a:t>
+            </a:r>
+          </a:p>
+        </p:txBody>
+      </p:sp>
+      <p:sp>
+        <p:nvSpPr>
+          <p:cNvPr id="4" name="Slide Number Placeholder 3"/>
+          <p:cNvSpPr>
+            <a:spLocks noGrp="1"/>
+          </p:cNvSpPr>
+          <p:nvPr>
+            <p:ph type="sldNum" idx="5" sz="quarter"/>
+          </p:nvPr>
+        </p:nvSpPr>
+        <p:spPr/>
+      </p:sp>
+    </p:spTree>
+  </p:cSld>
+  <p:clrMapOvr>
+    <a:masterClrMapping/>
+  </p:clrMapOvr>
+</p:notes>
+</file>
+
+<file path=ppt/notesSlides/notesSlide5.xml><?xml version="1.0" encoding="utf-8"?>
+<p:notes xmlns:a="http://schemas.openxmlformats.org/drawingml/2006/main" xmlns:p="http://schemas.openxmlformats.org/presentationml/2006/main" xmlns:r="http://schemas.openxmlformats.org/officeDocument/2006/relationships">
+  <p:cSld>
+    <p:spTree>
+      <p:nvGrpSpPr>
+        <p:cNvPr id="1" name=""/>
+        <p:cNvGrpSpPr/>
+        <p:nvPr/>
+      </p:nvGrpSpPr>
+      <p:grpSpPr>
+        <a:xfrm>
+          <a:off x="0" y="0"/>
+          <a:ext cx="0" cy="0"/>
+          <a:chOff x="0" y="0"/>
+          <a:chExt cx="0" cy="0"/>
+        </a:xfrm>
+      </p:grpSpPr>
+      <p:sp>
+        <p:nvSpPr>
+          <p:cNvPr id="2" name="Slide Image Placeholder 1"/>
+          <p:cNvSpPr>
+            <a:spLocks noGrp="1"/>
+          </p:cNvSpPr>
+          <p:nvPr>
+            <p:ph type="sldImg" idx="2"/>
+          </p:nvPr>
+        </p:nvSpPr>
+        <p:spPr/>
+      </p:sp>
+      <p:sp>
+        <p:nvSpPr>
+          <p:cNvPr id="3" name="Notes Placeholder 2"/>
+          <p:cNvSpPr>
+            <a:spLocks noGrp="1"/>
+          </p:cNvSpPr>
+          <p:nvPr>
+            <p:ph type="body" idx="3" sz="quarter"/>
+          </p:nvPr>
+        </p:nvSpPr>
+        <p:spPr/>
+        <p:txBody>
+          <a:bodyPr/>
+          <a:lstStyle/>
+          <a:p>
+            <a:r>
+              <a:t>Auffälligkeit: Umsatz und Marge wachsen, Zinsdeckung steigt – aber die EK-Quote ist mit ~2 % strukturell sehr dünn. Trägt der Betrieb die Investition?</a:t>
+            </a:r>
+          </a:p>
+        </p:txBody>
+      </p:sp>
+      <p:sp>
+        <p:nvSpPr>
+          <p:cNvPr id="4" name="Slide Number Placeholder 3"/>
+          <p:cNvSpPr>
+            <a:spLocks noGrp="1"/>
+          </p:cNvSpPr>
+          <p:nvPr>
+            <p:ph type="sldNum" idx="5" sz="quarter"/>
+          </p:nvPr>
+        </p:nvSpPr>
+        <p:spPr/>
+      </p:sp>
+    </p:spTree>
+  </p:cSld>
+  <p:clrMapOvr>
+    <a:masterClrMapping/>
+  </p:clrMapOvr>
+</p:notes>
+</file>
+
+<file path=ppt/notesSlides/notesSlide6.xml><?xml version="1.0" encoding="utf-8"?>
+<p:notes xmlns:a="http://schemas.openxmlformats.org/drawingml/2006/main" xmlns:p="http://schemas.openxmlformats.org/presentationml/2006/main" xmlns:r="http://schemas.openxmlformats.org/officeDocument/2006/relationships">
+  <p:cSld>
+    <p:spTree>
+      <p:nvGrpSpPr>
+        <p:cNvPr id="1" name=""/>
+        <p:cNvGrpSpPr/>
+        <p:nvPr/>
+      </p:nvGrpSpPr>
+      <p:grpSpPr>
+        <a:xfrm>
+          <a:off x="0" y="0"/>
+          <a:ext cx="0" cy="0"/>
+          <a:chOff x="0" y="0"/>
+          <a:chExt cx="0" cy="0"/>
+        </a:xfrm>
+      </p:grpSpPr>
+      <p:sp>
+        <p:nvSpPr>
+          <p:cNvPr id="2" name="Slide Image Placeholder 1"/>
+          <p:cNvSpPr>
+            <a:spLocks noGrp="1"/>
+          </p:cNvSpPr>
+          <p:nvPr>
+            <p:ph type="sldImg" idx="2"/>
+          </p:nvPr>
+        </p:nvSpPr>
+        <p:spPr/>
+      </p:sp>
+      <p:sp>
+        <p:nvSpPr>
+          <p:cNvPr id="3" name="Notes Placeholder 2"/>
+          <p:cNvSpPr>
+            <a:spLocks noGrp="1"/>
+          </p:cNvSpPr>
+          <p:nvPr>
+            <p:ph type="body" idx="3" sz="quarter"/>
+          </p:nvPr>
+        </p:nvSpPr>
+        <p:spPr/>
+        <p:txBody>
+          <a:bodyPr/>
+          <a:lstStyle/>
+          <a:p>
+            <a:r>
+              <a:t>Partnerarbeit am Laptop mit dem XLSX-Planungsmodell. Mapping-Tabelle als Brücke von agree ins Modell.</a:t>
+            </a:r>
+          </a:p>
+        </p:txBody>
+      </p:sp>
+      <p:sp>
+        <p:nvSpPr>
+          <p:cNvPr id="4" name="Slide Number Placeholder 3"/>
+          <p:cNvSpPr>
+            <a:spLocks noGrp="1"/>
+          </p:cNvSpPr>
+          <p:nvPr>
+            <p:ph type="sldNum" idx="5" sz="quarter"/>
+          </p:nvPr>
+        </p:nvSpPr>
+        <p:spPr/>
+      </p:sp>
+    </p:spTree>
+  </p:cSld>
+  <p:clrMapOvr>
+    <a:masterClrMapping/>
+  </p:clrMapOvr>
+</p:notes>
+</file>
+
+<file path=ppt/notesSlides/notesSlide7.xml><?xml version="1.0" encoding="utf-8"?>
+<p:notes xmlns:a="http://schemas.openxmlformats.org/drawingml/2006/main" xmlns:p="http://schemas.openxmlformats.org/presentationml/2006/main" xmlns:r="http://schemas.openxmlformats.org/officeDocument/2006/relationships">
+  <p:cSld>
+    <p:spTree>
+      <p:nvGrpSpPr>
+        <p:cNvPr id="1" name=""/>
+        <p:cNvGrpSpPr/>
+        <p:nvPr/>
+      </p:nvGrpSpPr>
+      <p:grpSpPr>
+        <a:xfrm>
+          <a:off x="0" y="0"/>
+          <a:ext cx="0" cy="0"/>
+          <a:chOff x="0" y="0"/>
+          <a:chExt cx="0" cy="0"/>
+        </a:xfrm>
+      </p:grpSpPr>
+      <p:sp>
+        <p:nvSpPr>
+          <p:cNvPr id="2" name="Slide Image Placeholder 1"/>
+          <p:cNvSpPr>
+            <a:spLocks noGrp="1"/>
+          </p:cNvSpPr>
+          <p:nvPr>
+            <p:ph type="sldImg" idx="2"/>
+          </p:nvPr>
+        </p:nvSpPr>
+        <p:spPr/>
+      </p:sp>
+      <p:sp>
+        <p:nvSpPr>
+          <p:cNvPr id="3" name="Notes Placeholder 2"/>
+          <p:cNvSpPr>
+            <a:spLocks noGrp="1"/>
+          </p:cNvSpPr>
+          <p:nvPr>
+            <p:ph type="body" idx="3" sz="quarter"/>
+          </p:nvPr>
+        </p:nvSpPr>
+        <p:spPr/>
+        <p:txBody>
+          <a:bodyPr/>
+          <a:lstStyle/>
+          <a:p>
+            <a:r>
+              <a:t>Vortrag + Einzelarbeit (AB-3). Jede Annahme sichtbar dokumentieren – Nachvollziehbarkeit vor Präzision.</a:t>
+            </a:r>
+          </a:p>
+        </p:txBody>
+      </p:sp>
+      <p:sp>
+        <p:nvSpPr>
+          <p:cNvPr id="4" name="Slide Number Placeholder 3"/>
+          <p:cNvSpPr>
+            <a:spLocks noGrp="1"/>
+          </p:cNvSpPr>
+          <p:nvPr>
+            <p:ph type="sldNum" idx="5" sz="quarter"/>
+          </p:nvPr>
+        </p:nvSpPr>
+        <p:spPr/>
+      </p:sp>
+    </p:spTree>
+  </p:cSld>
+  <p:clrMapOvr>
+    <a:masterClrMapping/>
+  </p:clrMapOvr>
+</p:notes>
+</file>
+
+<file path=ppt/notesSlides/notesSlide8.xml><?xml version="1.0" encoding="utf-8"?>
+<p:notes xmlns:a="http://schemas.openxmlformats.org/drawingml/2006/main" xmlns:p="http://schemas.openxmlformats.org/presentationml/2006/main" xmlns:r="http://schemas.openxmlformats.org/officeDocument/2006/relationships">
+  <p:cSld>
+    <p:spTree>
+      <p:nvGrpSpPr>
+        <p:cNvPr id="1" name=""/>
+        <p:cNvGrpSpPr/>
+        <p:nvPr/>
+      </p:nvGrpSpPr>
+      <p:grpSpPr>
+        <a:xfrm>
+          <a:off x="0" y="0"/>
+          <a:ext cx="0" cy="0"/>
+          <a:chOff x="0" y="0"/>
+          <a:chExt cx="0" cy="0"/>
+        </a:xfrm>
+      </p:grpSpPr>
+      <p:sp>
+        <p:nvSpPr>
+          <p:cNvPr id="2" name="Slide Image Placeholder 1"/>
+          <p:cNvSpPr>
+            <a:spLocks noGrp="1"/>
+          </p:cNvSpPr>
+          <p:nvPr>
+            <p:ph type="sldImg" idx="2"/>
+          </p:nvPr>
+        </p:nvSpPr>
+        <p:spPr/>
+      </p:sp>
+      <p:sp>
+        <p:nvSpPr>
+          <p:cNvPr id="3" name="Notes Placeholder 2"/>
+          <p:cNvSpPr>
+            <a:spLocks noGrp="1"/>
+          </p:cNvSpPr>
+          <p:nvPr>
+            <p:ph type="body" idx="3" sz="quarter"/>
+          </p:nvPr>
+        </p:nvSpPr>
+        <p:spPr/>
+        <p:txBody>
+          <a:bodyPr/>
+          <a:lstStyle/>
+          <a:p>
+            <a:r>
+              <a:t>Einzelarbeit am XLSX. Der Bilanzausgleich ist der Moment, in dem sich zeigt, ob der Plan konsistent ist.</a:t>
+            </a:r>
+          </a:p>
+        </p:txBody>
+      </p:sp>
+      <p:sp>
+        <p:nvSpPr>
+          <p:cNvPr id="4" name="Slide Number Placeholder 3"/>
+          <p:cNvSpPr>
+            <a:spLocks noGrp="1"/>
+          </p:cNvSpPr>
+          <p:nvPr>
+            <p:ph type="sldNum" idx="5" sz="quarter"/>
+          </p:nvPr>
+        </p:nvSpPr>
+        <p:spPr/>
+      </p:sp>
+    </p:spTree>
+  </p:cSld>
+  <p:clrMapOvr>
+    <a:masterClrMapping/>
+  </p:clrMapOvr>
+</p:notes>
+</file>
+
+<file path=ppt/notesSlides/notesSlide9.xml><?xml version="1.0" encoding="utf-8"?>
+<p:notes xmlns:a="http://schemas.openxmlformats.org/drawingml/2006/main" xmlns:p="http://schemas.openxmlformats.org/presentationml/2006/main" xmlns:r="http://schemas.openxmlformats.org/officeDocument/2006/relationships">
+  <p:cSld>
+    <p:spTree>
+      <p:nvGrpSpPr>
+        <p:cNvPr id="1" name=""/>
+        <p:cNvGrpSpPr/>
+        <p:nvPr/>
+      </p:nvGrpSpPr>
+      <p:grpSpPr>
+        <a:xfrm>
+          <a:off x="0" y="0"/>
+          <a:ext cx="0" cy="0"/>
+          <a:chOff x="0" y="0"/>
+          <a:chExt cx="0" cy="0"/>
+        </a:xfrm>
+      </p:grpSpPr>
+      <p:sp>
+        <p:nvSpPr>
+          <p:cNvPr id="2" name="Slide Image Placeholder 1"/>
+          <p:cNvSpPr>
+            <a:spLocks noGrp="1"/>
+          </p:cNvSpPr>
+          <p:nvPr>
+            <p:ph type="sldImg" idx="2"/>
+          </p:nvPr>
+        </p:nvSpPr>
+        <p:spPr/>
+      </p:sp>
+      <p:sp>
+        <p:nvSpPr>
+          <p:cNvPr id="3" name="Notes Placeholder 2"/>
+          <p:cNvSpPr>
+            <a:spLocks noGrp="1"/>
+          </p:cNvSpPr>
+          <p:nvPr>
+            <p:ph type="body" idx="3" sz="quarter"/>
+          </p:nvPr>
+        </p:nvSpPr>
+        <p:spPr/>
+        <p:txBody>
+          <a:bodyPr/>
+          <a:lstStyle/>
+          <a:p>
+            <a:r>
+              <a:t>Vortrag + Partnerarbeit (AB-4). Formelkarte als Werkzeug. Kennzahlen im Kontext des GaLaBau-Falls lesen.</a:t>
             </a:r>
           </a:p>
         </p:txBody>
@@ -4301,6 +5148,4073 @@
 </p:sld>
 </file>
 
+<file path=ppt/slides/slide10.xml><?xml version="1.0" encoding="utf-8"?>
+<p:sld xmlns:a="http://schemas.openxmlformats.org/drawingml/2006/main" xmlns:p="http://schemas.openxmlformats.org/presentationml/2006/main" xmlns:r="http://schemas.openxmlformats.org/officeDocument/2006/relationships">
+  <p:cSld>
+    <p:spTree>
+      <p:nvGrpSpPr>
+        <p:cNvPr id="1" name=""/>
+        <p:cNvGrpSpPr/>
+        <p:nvPr/>
+      </p:nvGrpSpPr>
+      <p:grpSpPr/>
+      <p:sp>
+        <p:nvSpPr>
+          <p:cNvPr id="2" name="Rectangle 1"/>
+          <p:cNvSpPr/>
+          <p:nvPr/>
+        </p:nvSpPr>
+        <p:spPr>
+          <a:xfrm>
+            <a:off x="0" y="0"/>
+            <a:ext cx="12188952" cy="6858000"/>
+          </a:xfrm>
+          <a:prstGeom prst="rect">
+            <a:avLst/>
+          </a:prstGeom>
+          <a:solidFill>
+            <a:srgbClr val="FFFFFF"/>
+          </a:solidFill>
+          <a:ln>
+            <a:noFill/>
+          </a:ln>
+        </p:spPr>
+        <p:style>
+          <a:lnRef idx="1">
+            <a:schemeClr val="accent1"/>
+          </a:lnRef>
+          <a:fillRef idx="3">
+            <a:schemeClr val="accent1"/>
+          </a:fillRef>
+          <a:effectRef idx="2">
+            <a:schemeClr val="accent1"/>
+          </a:effectRef>
+          <a:fontRef idx="minor">
+            <a:schemeClr val="lt1"/>
+          </a:fontRef>
+        </p:style>
+        <p:txBody>
+          <a:bodyPr rtlCol="0" anchor="ctr"/>
+          <a:lstStyle/>
+          <a:p>
+            <a:pPr algn="ctr"/>
+          </a:p>
+        </p:txBody>
+      </p:sp>
+      <p:sp>
+        <p:nvSpPr>
+          <p:cNvPr id="3" name="Rectangle 2"/>
+          <p:cNvSpPr/>
+          <p:nvPr/>
+        </p:nvSpPr>
+        <p:spPr>
+          <a:xfrm>
+            <a:off x="0" y="0"/>
+            <a:ext cx="12188952" cy="50292"/>
+          </a:xfrm>
+          <a:prstGeom prst="rect">
+            <a:avLst/>
+          </a:prstGeom>
+          <a:solidFill>
+            <a:srgbClr val="1F2C56"/>
+          </a:solidFill>
+          <a:ln>
+            <a:noFill/>
+          </a:ln>
+        </p:spPr>
+        <p:style>
+          <a:lnRef idx="1">
+            <a:schemeClr val="accent1"/>
+          </a:lnRef>
+          <a:fillRef idx="3">
+            <a:schemeClr val="accent1"/>
+          </a:fillRef>
+          <a:effectRef idx="2">
+            <a:schemeClr val="accent1"/>
+          </a:effectRef>
+          <a:fontRef idx="minor">
+            <a:schemeClr val="lt1"/>
+          </a:fontRef>
+        </p:style>
+        <p:txBody>
+          <a:bodyPr rtlCol="0" anchor="ctr"/>
+          <a:lstStyle/>
+          <a:p>
+            <a:pPr algn="ctr"/>
+          </a:p>
+        </p:txBody>
+      </p:sp>
+      <p:sp>
+        <p:nvSpPr>
+          <p:cNvPr id="4" name="TextBox 3"/>
+          <p:cNvSpPr txBox="1"/>
+          <p:nvPr/>
+        </p:nvSpPr>
+        <p:spPr>
+          <a:xfrm>
+            <a:off x="685800" y="109728"/>
+            <a:ext cx="10817352" cy="228600"/>
+          </a:xfrm>
+          <a:prstGeom prst="rect">
+            <a:avLst/>
+          </a:prstGeom>
+          <a:noFill/>
+        </p:spPr>
+        <p:txBody>
+          <a:bodyPr wrap="none">
+            <a:spAutoFit/>
+          </a:bodyPr>
+          <a:lstStyle/>
+          <a:p>
+            <a:pPr algn="l"/>
+            <a:r>
+              <a:rPr sz="750">
+                <a:solidFill>
+                  <a:srgbClr val="78808C"/>
+                </a:solidFill>
+                <a:latin typeface="Consolas"/>
+              </a:rPr>
+              <a:t>M23  ·  ÜBERSICHT</a:t>
+            </a:r>
+          </a:p>
+        </p:txBody>
+      </p:sp>
+      <p:sp>
+        <p:nvSpPr>
+          <p:cNvPr id="5" name="TextBox 4"/>
+          <p:cNvSpPr txBox="1"/>
+          <p:nvPr/>
+        </p:nvSpPr>
+        <p:spPr>
+          <a:xfrm>
+            <a:off x="685800" y="502920"/>
+            <a:ext cx="10817352" cy="594360"/>
+          </a:xfrm>
+          <a:prstGeom prst="rect">
+            <a:avLst/>
+          </a:prstGeom>
+          <a:noFill/>
+        </p:spPr>
+        <p:txBody>
+          <a:bodyPr wrap="square">
+            <a:spAutoFit/>
+          </a:bodyPr>
+          <a:lstStyle/>
+          <a:p>
+            <a:pPr algn="l"/>
+            <a:r>
+              <a:rPr sz="2000" b="1" i="0">
+                <a:solidFill>
+                  <a:srgbClr val="1F2C56"/>
+                </a:solidFill>
+                <a:latin typeface="Arial"/>
+              </a:rPr>
+              <a:t>Praxisfall GaLaBau Musterregion: Ausgangslage</a:t>
+            </a:r>
+          </a:p>
+        </p:txBody>
+      </p:sp>
+      <p:sp>
+        <p:nvSpPr>
+          <p:cNvPr id="6" name="Rectangle 5"/>
+          <p:cNvSpPr/>
+          <p:nvPr/>
+        </p:nvSpPr>
+        <p:spPr>
+          <a:xfrm>
+            <a:off x="685800" y="1143000"/>
+            <a:ext cx="10817352" cy="25400"/>
+          </a:xfrm>
+          <a:prstGeom prst="rect">
+            <a:avLst/>
+          </a:prstGeom>
+          <a:solidFill>
+            <a:srgbClr val="D9C089"/>
+          </a:solidFill>
+          <a:ln>
+            <a:noFill/>
+          </a:ln>
+        </p:spPr>
+        <p:style>
+          <a:lnRef idx="1">
+            <a:schemeClr val="accent1"/>
+          </a:lnRef>
+          <a:fillRef idx="3">
+            <a:schemeClr val="accent1"/>
+          </a:fillRef>
+          <a:effectRef idx="2">
+            <a:schemeClr val="accent1"/>
+          </a:effectRef>
+          <a:fontRef idx="minor">
+            <a:schemeClr val="lt1"/>
+          </a:fontRef>
+        </p:style>
+        <p:txBody>
+          <a:bodyPr rtlCol="0" anchor="ctr"/>
+          <a:lstStyle/>
+          <a:p>
+            <a:pPr algn="ctr"/>
+          </a:p>
+        </p:txBody>
+      </p:sp>
+      <p:graphicFrame>
+        <p:nvGraphicFramePr>
+          <p:cNvPr id="7" name="Table 6"/>
+          <p:cNvGraphicFramePr>
+            <a:graphicFrameLocks noGrp="1"/>
+          </p:cNvGraphicFramePr>
+          <p:nvPr/>
+        </p:nvGraphicFramePr>
+        <p:xfrm>
+          <a:off x="685800" y="1417320"/>
+          <a:ext cx="10817352" cy="1536192"/>
+        </p:xfrm>
+        <a:graphic>
+          <a:graphicData uri="http://schemas.openxmlformats.org/drawingml/2006/table">
+            <a:tbl>
+              <a:tblPr firstRow="1" bandRow="1">
+                <a:tableStyleId>{5C22544A-7EE6-4342-B048-85BDC9FD1C3A}</a:tableStyleId>
+              </a:tblPr>
+              <a:tblGrid>
+                <a:gridCol w="3605784"/>
+                <a:gridCol w="3605784"/>
+                <a:gridCol w="3605784"/>
+              </a:tblGrid>
+              <a:tr h="384048">
+                <a:tc>
+                  <a:txBody>
+                    <a:bodyPr/>
+                    <a:lstStyle/>
+                    <a:p>
+                      <a:r>
+                        <a:rPr sz="1100" b="1">
+                          <a:solidFill>
+                            <a:srgbClr val="FFFFFF"/>
+                          </a:solidFill>
+                          <a:latin typeface="Arial"/>
+                        </a:rPr>
+                        <a:t>Kennzahl</a:t>
+                      </a:r>
+                    </a:p>
+                  </a:txBody>
+                  <a:tcPr>
+                    <a:solidFill>
+                      <a:srgbClr val="1F2C56"/>
+                    </a:solidFill>
+                  </a:tcPr>
+                </a:tc>
+                <a:tc>
+                  <a:txBody>
+                    <a:bodyPr/>
+                    <a:lstStyle/>
+                    <a:p>
+                      <a:r>
+                        <a:rPr sz="1100" b="1">
+                          <a:solidFill>
+                            <a:srgbClr val="FFFFFF"/>
+                          </a:solidFill>
+                          <a:latin typeface="Arial"/>
+                        </a:rPr>
+                        <a:t>2023</a:t>
+                      </a:r>
+                    </a:p>
+                  </a:txBody>
+                  <a:tcPr>
+                    <a:solidFill>
+                      <a:srgbClr val="1F2C56"/>
+                    </a:solidFill>
+                  </a:tcPr>
+                </a:tc>
+                <a:tc>
+                  <a:txBody>
+                    <a:bodyPr/>
+                    <a:lstStyle/>
+                    <a:p>
+                      <a:r>
+                        <a:rPr sz="1100" b="1">
+                          <a:solidFill>
+                            <a:srgbClr val="FFFFFF"/>
+                          </a:solidFill>
+                          <a:latin typeface="Arial"/>
+                        </a:rPr>
+                        <a:t>2024</a:t>
+                      </a:r>
+                    </a:p>
+                  </a:txBody>
+                  <a:tcPr>
+                    <a:solidFill>
+                      <a:srgbClr val="1F2C56"/>
+                    </a:solidFill>
+                  </a:tcPr>
+                </a:tc>
+              </a:tr>
+              <a:tr h="384048">
+                <a:tc>
+                  <a:txBody>
+                    <a:bodyPr/>
+                    <a:lstStyle/>
+                    <a:p>
+                      <a:r>
+                        <a:rPr sz="1050">
+                          <a:solidFill>
+                            <a:srgbClr val="3D5466"/>
+                          </a:solidFill>
+                          <a:latin typeface="Arial"/>
+                        </a:rPr>
+                        <a:t>Umsatzerlöse (TEUR)</a:t>
+                      </a:r>
+                    </a:p>
+                  </a:txBody>
+                  <a:tcPr/>
+                </a:tc>
+                <a:tc>
+                  <a:txBody>
+                    <a:bodyPr/>
+                    <a:lstStyle/>
+                    <a:p>
+                      <a:r>
+                        <a:rPr sz="1050">
+                          <a:solidFill>
+                            <a:srgbClr val="3D5466"/>
+                          </a:solidFill>
+                          <a:latin typeface="Arial"/>
+                        </a:rPr>
+                        <a:t>3.574</a:t>
+                      </a:r>
+                    </a:p>
+                  </a:txBody>
+                  <a:tcPr/>
+                </a:tc>
+                <a:tc>
+                  <a:txBody>
+                    <a:bodyPr/>
+                    <a:lstStyle/>
+                    <a:p>
+                      <a:r>
+                        <a:rPr sz="1050">
+                          <a:solidFill>
+                            <a:srgbClr val="3D5466"/>
+                          </a:solidFill>
+                          <a:latin typeface="Arial"/>
+                        </a:rPr>
+                        <a:t>4.301</a:t>
+                      </a:r>
+                    </a:p>
+                  </a:txBody>
+                  <a:tcPr/>
+                </a:tc>
+              </a:tr>
+              <a:tr h="384048">
+                <a:tc>
+                  <a:txBody>
+                    <a:bodyPr/>
+                    <a:lstStyle/>
+                    <a:p>
+                      <a:r>
+                        <a:rPr sz="1050">
+                          <a:solidFill>
+                            <a:srgbClr val="3D5466"/>
+                          </a:solidFill>
+                          <a:latin typeface="Arial"/>
+                        </a:rPr>
+                        <a:t>Zinsdeckungsgrad</a:t>
+                      </a:r>
+                    </a:p>
+                  </a:txBody>
+                  <a:tcPr/>
+                </a:tc>
+                <a:tc>
+                  <a:txBody>
+                    <a:bodyPr/>
+                    <a:lstStyle/>
+                    <a:p>
+                      <a:r>
+                        <a:rPr sz="1050">
+                          <a:solidFill>
+                            <a:srgbClr val="3D5466"/>
+                          </a:solidFill>
+                          <a:latin typeface="Arial"/>
+                        </a:rPr>
+                        <a:t>1,27</a:t>
+                      </a:r>
+                    </a:p>
+                  </a:txBody>
+                  <a:tcPr/>
+                </a:tc>
+                <a:tc>
+                  <a:txBody>
+                    <a:bodyPr/>
+                    <a:lstStyle/>
+                    <a:p>
+                      <a:r>
+                        <a:rPr sz="1050">
+                          <a:solidFill>
+                            <a:srgbClr val="3D5466"/>
+                          </a:solidFill>
+                          <a:latin typeface="Arial"/>
+                        </a:rPr>
+                        <a:t>2,47</a:t>
+                      </a:r>
+                    </a:p>
+                  </a:txBody>
+                  <a:tcPr/>
+                </a:tc>
+              </a:tr>
+              <a:tr h="384048">
+                <a:tc>
+                  <a:txBody>
+                    <a:bodyPr/>
+                    <a:lstStyle/>
+                    <a:p>
+                      <a:r>
+                        <a:rPr sz="1050">
+                          <a:solidFill>
+                            <a:srgbClr val="3D5466"/>
+                          </a:solidFill>
+                          <a:latin typeface="Arial"/>
+                        </a:rPr>
+                        <a:t>EK-Quote</a:t>
+                      </a:r>
+                    </a:p>
+                  </a:txBody>
+                  <a:tcPr/>
+                </a:tc>
+                <a:tc>
+                  <a:txBody>
+                    <a:bodyPr/>
+                    <a:lstStyle/>
+                    <a:p>
+                      <a:r>
+                        <a:rPr sz="1050">
+                          <a:solidFill>
+                            <a:srgbClr val="3D5466"/>
+                          </a:solidFill>
+                          <a:latin typeface="Arial"/>
+                        </a:rPr>
+                        <a:t>~2 %</a:t>
+                      </a:r>
+                    </a:p>
+                  </a:txBody>
+                  <a:tcPr/>
+                </a:tc>
+                <a:tc>
+                  <a:txBody>
+                    <a:bodyPr/>
+                    <a:lstStyle/>
+                    <a:p>
+                      <a:r>
+                        <a:rPr sz="1050">
+                          <a:solidFill>
+                            <a:srgbClr val="3D5466"/>
+                          </a:solidFill>
+                          <a:latin typeface="Arial"/>
+                        </a:rPr>
+                        <a:t>~2 %</a:t>
+                      </a:r>
+                    </a:p>
+                  </a:txBody>
+                  <a:tcPr/>
+                </a:tc>
+              </a:tr>
+            </a:tbl>
+          </a:graphicData>
+        </a:graphic>
+      </p:graphicFrame>
+      <p:sp>
+        <p:nvSpPr>
+          <p:cNvPr id="8" name="Rectangle 7"/>
+          <p:cNvSpPr/>
+          <p:nvPr/>
+        </p:nvSpPr>
+        <p:spPr>
+          <a:xfrm>
+            <a:off x="0" y="6510528"/>
+            <a:ext cx="12188952" cy="347472"/>
+          </a:xfrm>
+          <a:prstGeom prst="rect">
+            <a:avLst/>
+          </a:prstGeom>
+          <a:solidFill>
+            <a:srgbClr val="0A1937"/>
+          </a:solidFill>
+          <a:ln>
+            <a:noFill/>
+          </a:ln>
+        </p:spPr>
+        <p:style>
+          <a:lnRef idx="1">
+            <a:schemeClr val="accent1"/>
+          </a:lnRef>
+          <a:fillRef idx="3">
+            <a:schemeClr val="accent1"/>
+          </a:fillRef>
+          <a:effectRef idx="2">
+            <a:schemeClr val="accent1"/>
+          </a:effectRef>
+          <a:fontRef idx="minor">
+            <a:schemeClr val="lt1"/>
+          </a:fontRef>
+        </p:style>
+        <p:txBody>
+          <a:bodyPr rtlCol="0" anchor="ctr"/>
+          <a:lstStyle/>
+          <a:p>
+            <a:pPr algn="ctr"/>
+          </a:p>
+        </p:txBody>
+      </p:sp>
+      <p:sp>
+        <p:nvSpPr>
+          <p:cNvPr id="9" name="TextBox 8"/>
+          <p:cNvSpPr txBox="1"/>
+          <p:nvPr/>
+        </p:nvSpPr>
+        <p:spPr>
+          <a:xfrm>
+            <a:off x="685800" y="6583680"/>
+            <a:ext cx="6490411" cy="256032"/>
+          </a:xfrm>
+          <a:prstGeom prst="rect">
+            <a:avLst/>
+          </a:prstGeom>
+          <a:noFill/>
+        </p:spPr>
+        <p:txBody>
+          <a:bodyPr wrap="none">
+            <a:spAutoFit/>
+          </a:bodyPr>
+          <a:lstStyle/>
+          <a:p>
+            <a:pPr algn="l"/>
+            <a:r>
+              <a:rPr sz="700">
+                <a:solidFill>
+                  <a:srgbClr val="A0B4D2"/>
+                </a:solidFill>
+                <a:latin typeface="Consolas"/>
+              </a:rPr>
+              <a:t>FKB Campus  ·  M23</a:t>
+            </a:r>
+          </a:p>
+        </p:txBody>
+      </p:sp>
+      <p:sp>
+        <p:nvSpPr>
+          <p:cNvPr id="10" name="TextBox 9"/>
+          <p:cNvSpPr txBox="1"/>
+          <p:nvPr/>
+        </p:nvSpPr>
+        <p:spPr>
+          <a:xfrm>
+            <a:off x="7176211" y="6583680"/>
+            <a:ext cx="4326940" cy="256032"/>
+          </a:xfrm>
+          <a:prstGeom prst="rect">
+            <a:avLst/>
+          </a:prstGeom>
+          <a:noFill/>
+        </p:spPr>
+        <p:txBody>
+          <a:bodyPr wrap="none">
+            <a:spAutoFit/>
+          </a:bodyPr>
+          <a:lstStyle/>
+          <a:p>
+            <a:pPr algn="r"/>
+            <a:r>
+              <a:rPr sz="700">
+                <a:solidFill>
+                  <a:srgbClr val="A0B4D2"/>
+                </a:solidFill>
+                <a:latin typeface="Consolas"/>
+              </a:rPr>
+              <a:t>Übersicht</a:t>
+            </a:r>
+          </a:p>
+        </p:txBody>
+      </p:sp>
+    </p:spTree>
+  </p:cSld>
+  <p:clrMapOvr>
+    <a:masterClrMapping/>
+  </p:clrMapOvr>
+</p:sld>
+</file>
+
+<file path=ppt/slides/slide11.xml><?xml version="1.0" encoding="utf-8"?>
+<p:sld xmlns:a="http://schemas.openxmlformats.org/drawingml/2006/main" xmlns:p="http://schemas.openxmlformats.org/presentationml/2006/main" xmlns:r="http://schemas.openxmlformats.org/officeDocument/2006/relationships">
+  <p:cSld>
+    <p:spTree>
+      <p:nvGrpSpPr>
+        <p:cNvPr id="1" name=""/>
+        <p:cNvGrpSpPr/>
+        <p:nvPr/>
+      </p:nvGrpSpPr>
+      <p:grpSpPr/>
+      <p:sp>
+        <p:nvSpPr>
+          <p:cNvPr id="2" name="Rectangle 1"/>
+          <p:cNvSpPr/>
+          <p:nvPr/>
+        </p:nvSpPr>
+        <p:spPr>
+          <a:xfrm>
+            <a:off x="0" y="0"/>
+            <a:ext cx="12188952" cy="6858000"/>
+          </a:xfrm>
+          <a:prstGeom prst="rect">
+            <a:avLst/>
+          </a:prstGeom>
+          <a:solidFill>
+            <a:srgbClr val="EDEDF3"/>
+          </a:solidFill>
+          <a:ln>
+            <a:noFill/>
+          </a:ln>
+        </p:spPr>
+        <p:style>
+          <a:lnRef idx="1">
+            <a:schemeClr val="accent1"/>
+          </a:lnRef>
+          <a:fillRef idx="3">
+            <a:schemeClr val="accent1"/>
+          </a:fillRef>
+          <a:effectRef idx="2">
+            <a:schemeClr val="accent1"/>
+          </a:effectRef>
+          <a:fontRef idx="minor">
+            <a:schemeClr val="lt1"/>
+          </a:fontRef>
+        </p:style>
+        <p:txBody>
+          <a:bodyPr rtlCol="0" anchor="ctr"/>
+          <a:lstStyle/>
+          <a:p>
+            <a:pPr algn="ctr"/>
+          </a:p>
+        </p:txBody>
+      </p:sp>
+      <p:sp>
+        <p:nvSpPr>
+          <p:cNvPr id="3" name="Rectangle 2"/>
+          <p:cNvSpPr/>
+          <p:nvPr/>
+        </p:nvSpPr>
+        <p:spPr>
+          <a:xfrm>
+            <a:off x="0" y="0"/>
+            <a:ext cx="12188952" cy="50292"/>
+          </a:xfrm>
+          <a:prstGeom prst="rect">
+            <a:avLst/>
+          </a:prstGeom>
+          <a:solidFill>
+            <a:srgbClr val="1F2C56"/>
+          </a:solidFill>
+          <a:ln>
+            <a:noFill/>
+          </a:ln>
+        </p:spPr>
+        <p:style>
+          <a:lnRef idx="1">
+            <a:schemeClr val="accent1"/>
+          </a:lnRef>
+          <a:fillRef idx="3">
+            <a:schemeClr val="accent1"/>
+          </a:fillRef>
+          <a:effectRef idx="2">
+            <a:schemeClr val="accent1"/>
+          </a:effectRef>
+          <a:fontRef idx="minor">
+            <a:schemeClr val="lt1"/>
+          </a:fontRef>
+        </p:style>
+        <p:txBody>
+          <a:bodyPr rtlCol="0" anchor="ctr"/>
+          <a:lstStyle/>
+          <a:p>
+            <a:pPr algn="ctr"/>
+          </a:p>
+        </p:txBody>
+      </p:sp>
+      <p:sp>
+        <p:nvSpPr>
+          <p:cNvPr id="4" name="TextBox 3"/>
+          <p:cNvSpPr txBox="1"/>
+          <p:nvPr/>
+        </p:nvSpPr>
+        <p:spPr>
+          <a:xfrm>
+            <a:off x="685800" y="109728"/>
+            <a:ext cx="10817352" cy="228600"/>
+          </a:xfrm>
+          <a:prstGeom prst="rect">
+            <a:avLst/>
+          </a:prstGeom>
+          <a:noFill/>
+        </p:spPr>
+        <p:txBody>
+          <a:bodyPr wrap="none">
+            <a:spAutoFit/>
+          </a:bodyPr>
+          <a:lstStyle/>
+          <a:p>
+            <a:pPr algn="l"/>
+            <a:r>
+              <a:rPr sz="750">
+                <a:solidFill>
+                  <a:srgbClr val="78808C"/>
+                </a:solidFill>
+                <a:latin typeface="Consolas"/>
+              </a:rPr>
+              <a:t>M23  ·  ARBEITSBLATT</a:t>
+            </a:r>
+          </a:p>
+        </p:txBody>
+      </p:sp>
+      <p:sp>
+        <p:nvSpPr>
+          <p:cNvPr id="5" name="Rectangle 4"/>
+          <p:cNvSpPr/>
+          <p:nvPr/>
+        </p:nvSpPr>
+        <p:spPr>
+          <a:xfrm>
+            <a:off x="0" y="1234440"/>
+            <a:ext cx="12188952" cy="12700"/>
+          </a:xfrm>
+          <a:prstGeom prst="rect">
+            <a:avLst/>
+          </a:prstGeom>
+          <a:solidFill>
+            <a:srgbClr val="D8DFE4"/>
+          </a:solidFill>
+          <a:ln>
+            <a:noFill/>
+          </a:ln>
+        </p:spPr>
+        <p:style>
+          <a:lnRef idx="1">
+            <a:schemeClr val="accent1"/>
+          </a:lnRef>
+          <a:fillRef idx="3">
+            <a:schemeClr val="accent1"/>
+          </a:fillRef>
+          <a:effectRef idx="2">
+            <a:schemeClr val="accent1"/>
+          </a:effectRef>
+          <a:fontRef idx="minor">
+            <a:schemeClr val="lt1"/>
+          </a:fontRef>
+        </p:style>
+        <p:txBody>
+          <a:bodyPr rtlCol="0" anchor="ctr"/>
+          <a:lstStyle/>
+          <a:p>
+            <a:pPr algn="ctr"/>
+          </a:p>
+        </p:txBody>
+      </p:sp>
+      <p:sp>
+        <p:nvSpPr>
+          <p:cNvPr id="6" name="Rectangle 5"/>
+          <p:cNvSpPr/>
+          <p:nvPr/>
+        </p:nvSpPr>
+        <p:spPr>
+          <a:xfrm>
+            <a:off x="685800" y="502920"/>
+            <a:ext cx="36576" cy="658368"/>
+          </a:xfrm>
+          <a:prstGeom prst="rect">
+            <a:avLst/>
+          </a:prstGeom>
+          <a:solidFill>
+            <a:srgbClr val="D9C089"/>
+          </a:solidFill>
+          <a:ln>
+            <a:noFill/>
+          </a:ln>
+        </p:spPr>
+        <p:style>
+          <a:lnRef idx="1">
+            <a:schemeClr val="accent1"/>
+          </a:lnRef>
+          <a:fillRef idx="3">
+            <a:schemeClr val="accent1"/>
+          </a:fillRef>
+          <a:effectRef idx="2">
+            <a:schemeClr val="accent1"/>
+          </a:effectRef>
+          <a:fontRef idx="minor">
+            <a:schemeClr val="lt1"/>
+          </a:fontRef>
+        </p:style>
+        <p:txBody>
+          <a:bodyPr rtlCol="0" anchor="ctr"/>
+          <a:lstStyle/>
+          <a:p>
+            <a:pPr algn="ctr"/>
+          </a:p>
+        </p:txBody>
+      </p:sp>
+      <p:sp>
+        <p:nvSpPr>
+          <p:cNvPr id="7" name="TextBox 6"/>
+          <p:cNvSpPr txBox="1"/>
+          <p:nvPr/>
+        </p:nvSpPr>
+        <p:spPr>
+          <a:xfrm>
+            <a:off x="813816" y="502920"/>
+            <a:ext cx="10634472" cy="685800"/>
+          </a:xfrm>
+          <a:prstGeom prst="rect">
+            <a:avLst/>
+          </a:prstGeom>
+          <a:noFill/>
+        </p:spPr>
+        <p:txBody>
+          <a:bodyPr wrap="square">
+            <a:spAutoFit/>
+          </a:bodyPr>
+          <a:lstStyle/>
+          <a:p>
+            <a:pPr algn="l"/>
+            <a:r>
+              <a:rPr sz="2400" b="1" i="0">
+                <a:solidFill>
+                  <a:srgbClr val="1F2C56"/>
+                </a:solidFill>
+                <a:latin typeface="Arial"/>
+              </a:rPr>
+              <a:t>agree-Daten ins Modell überführen</a:t>
+            </a:r>
+          </a:p>
+        </p:txBody>
+      </p:sp>
+      <p:sp>
+        <p:nvSpPr>
+          <p:cNvPr id="8" name="TextBox 7"/>
+          <p:cNvSpPr txBox="1"/>
+          <p:nvPr/>
+        </p:nvSpPr>
+        <p:spPr>
+          <a:xfrm>
+            <a:off x="685800" y="1554480"/>
+            <a:ext cx="10817352" cy="3840480"/>
+          </a:xfrm>
+          <a:prstGeom prst="rect">
+            <a:avLst/>
+          </a:prstGeom>
+          <a:noFill/>
+        </p:spPr>
+        <p:txBody>
+          <a:bodyPr wrap="square">
+            <a:spAutoFit/>
+          </a:bodyPr>
+          <a:lstStyle/>
+          <a:p>
+            <a:pPr marL="190500" indent="-190500">
+              <a:spcBef>
+                <a:spcPts val="400"/>
+              </a:spcBef>
+              <a:spcAft>
+                <a:spcPts val="200"/>
+              </a:spcAft>
+            </a:pPr>
+            <a:r>
+              <a:rPr sz="1400">
+                <a:solidFill>
+                  <a:srgbClr val="3D5466"/>
+                </a:solidFill>
+                <a:latin typeface="Arial"/>
+              </a:rPr>
+              <a:t>▸  Sichten Sie den agree-Export der GaLaBau Musterregion GmbH (AB-1).</a:t>
+            </a:r>
+          </a:p>
+          <a:p>
+            <a:pPr marL="190500" indent="-190500">
+              <a:spcBef>
+                <a:spcPts val="400"/>
+              </a:spcBef>
+              <a:spcAft>
+                <a:spcPts val="200"/>
+              </a:spcAft>
+            </a:pPr>
+            <a:r>
+              <a:rPr sz="1400">
+                <a:solidFill>
+                  <a:srgbClr val="3D5466"/>
+                </a:solidFill>
+                <a:latin typeface="Arial"/>
+              </a:rPr>
+              <a:t>▸  Vollziehen Sie das Mapping in die Modellstruktur nach (AB-2).</a:t>
+            </a:r>
+          </a:p>
+          <a:p>
+            <a:pPr marL="190500" indent="-190500">
+              <a:spcBef>
+                <a:spcPts val="400"/>
+              </a:spcBef>
+              <a:spcAft>
+                <a:spcPts val="200"/>
+              </a:spcAft>
+            </a:pPr>
+            <a:r>
+              <a:rPr sz="1400">
+                <a:solidFill>
+                  <a:srgbClr val="3D5466"/>
+                </a:solidFill>
+                <a:latin typeface="Arial"/>
+              </a:rPr>
+              <a:t>▸  Prüfen Sie die Vollständigkeit der überführten Positionen.</a:t>
+            </a:r>
+          </a:p>
+        </p:txBody>
+      </p:sp>
+      <p:sp>
+        <p:nvSpPr>
+          <p:cNvPr id="9" name="Rectangle 8"/>
+          <p:cNvSpPr/>
+          <p:nvPr/>
+        </p:nvSpPr>
+        <p:spPr>
+          <a:xfrm>
+            <a:off x="685800" y="5486400"/>
+            <a:ext cx="10817352" cy="640080"/>
+          </a:xfrm>
+          <a:prstGeom prst="rect">
+            <a:avLst/>
+          </a:prstGeom>
+          <a:solidFill>
+            <a:srgbClr val="1F2C56"/>
+          </a:solidFill>
+          <a:ln>
+            <a:noFill/>
+          </a:ln>
+        </p:spPr>
+        <p:style>
+          <a:lnRef idx="1">
+            <a:schemeClr val="accent1"/>
+          </a:lnRef>
+          <a:fillRef idx="3">
+            <a:schemeClr val="accent1"/>
+          </a:fillRef>
+          <a:effectRef idx="2">
+            <a:schemeClr val="accent1"/>
+          </a:effectRef>
+          <a:fontRef idx="minor">
+            <a:schemeClr val="lt1"/>
+          </a:fontRef>
+        </p:style>
+        <p:txBody>
+          <a:bodyPr rtlCol="0" anchor="ctr"/>
+          <a:lstStyle/>
+          <a:p>
+            <a:pPr algn="ctr"/>
+          </a:p>
+        </p:txBody>
+      </p:sp>
+      <p:sp>
+        <p:nvSpPr>
+          <p:cNvPr id="10" name="TextBox 9"/>
+          <p:cNvSpPr txBox="1"/>
+          <p:nvPr/>
+        </p:nvSpPr>
+        <p:spPr>
+          <a:xfrm>
+            <a:off x="868680" y="5596128"/>
+            <a:ext cx="10451592" cy="457200"/>
+          </a:xfrm>
+          <a:prstGeom prst="rect">
+            <a:avLst/>
+          </a:prstGeom>
+          <a:noFill/>
+        </p:spPr>
+        <p:txBody>
+          <a:bodyPr wrap="square">
+            <a:spAutoFit/>
+          </a:bodyPr>
+          <a:lstStyle/>
+          <a:p>
+            <a:pPr algn="l"/>
+            <a:r>
+              <a:rPr sz="1300" b="1" i="0">
+                <a:solidFill>
+                  <a:srgbClr val="FFFFFF"/>
+                </a:solidFill>
+                <a:latin typeface="Arial"/>
+              </a:rPr>
+              <a:t>→  Bearbeitung im Teilnehmer-Workbook (Arbeitsblatt mit Ausfüllfeldern)</a:t>
+            </a:r>
+          </a:p>
+        </p:txBody>
+      </p:sp>
+      <p:sp>
+        <p:nvSpPr>
+          <p:cNvPr id="11" name="Rectangle 10"/>
+          <p:cNvSpPr/>
+          <p:nvPr/>
+        </p:nvSpPr>
+        <p:spPr>
+          <a:xfrm>
+            <a:off x="0" y="6510528"/>
+            <a:ext cx="12188952" cy="347472"/>
+          </a:xfrm>
+          <a:prstGeom prst="rect">
+            <a:avLst/>
+          </a:prstGeom>
+          <a:solidFill>
+            <a:srgbClr val="0A1937"/>
+          </a:solidFill>
+          <a:ln>
+            <a:noFill/>
+          </a:ln>
+        </p:spPr>
+        <p:style>
+          <a:lnRef idx="1">
+            <a:schemeClr val="accent1"/>
+          </a:lnRef>
+          <a:fillRef idx="3">
+            <a:schemeClr val="accent1"/>
+          </a:fillRef>
+          <a:effectRef idx="2">
+            <a:schemeClr val="accent1"/>
+          </a:effectRef>
+          <a:fontRef idx="minor">
+            <a:schemeClr val="lt1"/>
+          </a:fontRef>
+        </p:style>
+        <p:txBody>
+          <a:bodyPr rtlCol="0" anchor="ctr"/>
+          <a:lstStyle/>
+          <a:p>
+            <a:pPr algn="ctr"/>
+          </a:p>
+        </p:txBody>
+      </p:sp>
+      <p:sp>
+        <p:nvSpPr>
+          <p:cNvPr id="12" name="TextBox 11"/>
+          <p:cNvSpPr txBox="1"/>
+          <p:nvPr/>
+        </p:nvSpPr>
+        <p:spPr>
+          <a:xfrm>
+            <a:off x="685800" y="6583680"/>
+            <a:ext cx="6490411" cy="256032"/>
+          </a:xfrm>
+          <a:prstGeom prst="rect">
+            <a:avLst/>
+          </a:prstGeom>
+          <a:noFill/>
+        </p:spPr>
+        <p:txBody>
+          <a:bodyPr wrap="none">
+            <a:spAutoFit/>
+          </a:bodyPr>
+          <a:lstStyle/>
+          <a:p>
+            <a:pPr algn="l"/>
+            <a:r>
+              <a:rPr sz="700">
+                <a:solidFill>
+                  <a:srgbClr val="A0B4D2"/>
+                </a:solidFill>
+                <a:latin typeface="Consolas"/>
+              </a:rPr>
+              <a:t>FKB Campus  ·  M23</a:t>
+            </a:r>
+          </a:p>
+        </p:txBody>
+      </p:sp>
+    </p:spTree>
+  </p:cSld>
+  <p:clrMapOvr>
+    <a:masterClrMapping/>
+  </p:clrMapOvr>
+</p:sld>
+</file>
+
+<file path=ppt/slides/slide12.xml><?xml version="1.0" encoding="utf-8"?>
+<p:sld xmlns:a="http://schemas.openxmlformats.org/drawingml/2006/main" xmlns:p="http://schemas.openxmlformats.org/presentationml/2006/main" xmlns:r="http://schemas.openxmlformats.org/officeDocument/2006/relationships">
+  <p:cSld>
+    <p:spTree>
+      <p:nvGrpSpPr>
+        <p:cNvPr id="1" name=""/>
+        <p:cNvGrpSpPr/>
+        <p:nvPr/>
+      </p:nvGrpSpPr>
+      <p:grpSpPr/>
+      <p:sp>
+        <p:nvSpPr>
+          <p:cNvPr id="2" name="Rectangle 1"/>
+          <p:cNvSpPr/>
+          <p:nvPr/>
+        </p:nvSpPr>
+        <p:spPr>
+          <a:xfrm>
+            <a:off x="0" y="0"/>
+            <a:ext cx="12188952" cy="6858000"/>
+          </a:xfrm>
+          <a:prstGeom prst="rect">
+            <a:avLst/>
+          </a:prstGeom>
+          <a:solidFill>
+            <a:srgbClr val="1F2C56"/>
+          </a:solidFill>
+          <a:ln>
+            <a:noFill/>
+          </a:ln>
+        </p:spPr>
+        <p:style>
+          <a:lnRef idx="1">
+            <a:schemeClr val="accent1"/>
+          </a:lnRef>
+          <a:fillRef idx="3">
+            <a:schemeClr val="accent1"/>
+          </a:fillRef>
+          <a:effectRef idx="2">
+            <a:schemeClr val="accent1"/>
+          </a:effectRef>
+          <a:fontRef idx="minor">
+            <a:schemeClr val="lt1"/>
+          </a:fontRef>
+        </p:style>
+        <p:txBody>
+          <a:bodyPr rtlCol="0" anchor="ctr"/>
+          <a:lstStyle/>
+          <a:p>
+            <a:pPr algn="ctr"/>
+          </a:p>
+        </p:txBody>
+      </p:sp>
+      <p:sp>
+        <p:nvSpPr>
+          <p:cNvPr id="3" name="TextBox 2"/>
+          <p:cNvSpPr txBox="1"/>
+          <p:nvPr/>
+        </p:nvSpPr>
+        <p:spPr>
+          <a:xfrm>
+            <a:off x="685800" y="2377440"/>
+            <a:ext cx="10817352" cy="365760"/>
+          </a:xfrm>
+          <a:prstGeom prst="rect">
+            <a:avLst/>
+          </a:prstGeom>
+          <a:noFill/>
+        </p:spPr>
+        <p:txBody>
+          <a:bodyPr wrap="none">
+            <a:spAutoFit/>
+          </a:bodyPr>
+          <a:lstStyle/>
+          <a:p>
+            <a:pPr algn="l"/>
+            <a:r>
+              <a:rPr sz="1200">
+                <a:solidFill>
+                  <a:srgbClr val="D9C089"/>
+                </a:solidFill>
+                <a:latin typeface="Consolas"/>
+              </a:rPr>
+              <a:t>11:15–12:30</a:t>
+            </a:r>
+          </a:p>
+        </p:txBody>
+      </p:sp>
+      <p:sp>
+        <p:nvSpPr>
+          <p:cNvPr id="4" name="Rectangle 3"/>
+          <p:cNvSpPr/>
+          <p:nvPr/>
+        </p:nvSpPr>
+        <p:spPr>
+          <a:xfrm>
+            <a:off x="685800" y="2788920"/>
+            <a:ext cx="548640" cy="38100"/>
+          </a:xfrm>
+          <a:prstGeom prst="rect">
+            <a:avLst/>
+          </a:prstGeom>
+          <a:solidFill>
+            <a:srgbClr val="D9C089"/>
+          </a:solidFill>
+          <a:ln>
+            <a:noFill/>
+          </a:ln>
+        </p:spPr>
+        <p:style>
+          <a:lnRef idx="1">
+            <a:schemeClr val="accent1"/>
+          </a:lnRef>
+          <a:fillRef idx="3">
+            <a:schemeClr val="accent1"/>
+          </a:fillRef>
+          <a:effectRef idx="2">
+            <a:schemeClr val="accent1"/>
+          </a:effectRef>
+          <a:fontRef idx="minor">
+            <a:schemeClr val="lt1"/>
+          </a:fontRef>
+        </p:style>
+        <p:txBody>
+          <a:bodyPr rtlCol="0" anchor="ctr"/>
+          <a:lstStyle/>
+          <a:p>
+            <a:pPr algn="ctr"/>
+          </a:p>
+        </p:txBody>
+      </p:sp>
+      <p:sp>
+        <p:nvSpPr>
+          <p:cNvPr id="5" name="TextBox 4"/>
+          <p:cNvSpPr txBox="1"/>
+          <p:nvPr/>
+        </p:nvSpPr>
+        <p:spPr>
+          <a:xfrm>
+            <a:off x="685800" y="3017520"/>
+            <a:ext cx="10817352" cy="1463040"/>
+          </a:xfrm>
+          <a:prstGeom prst="rect">
+            <a:avLst/>
+          </a:prstGeom>
+          <a:noFill/>
+        </p:spPr>
+        <p:txBody>
+          <a:bodyPr wrap="square">
+            <a:spAutoFit/>
+          </a:bodyPr>
+          <a:lstStyle/>
+          <a:p>
+            <a:pPr algn="l"/>
+            <a:r>
+              <a:rPr sz="4000" b="1" i="0">
+                <a:solidFill>
+                  <a:srgbClr val="FFFFFF"/>
+                </a:solidFill>
+                <a:latin typeface="Arial"/>
+              </a:rPr>
+              <a:t>Input 2 &amp; Übung 2: Annahmen &amp; Planung</a:t>
+            </a:r>
+          </a:p>
+        </p:txBody>
+      </p:sp>
+      <p:sp>
+        <p:nvSpPr>
+          <p:cNvPr id="6" name="TextBox 5"/>
+          <p:cNvSpPr txBox="1"/>
+          <p:nvPr/>
+        </p:nvSpPr>
+        <p:spPr>
+          <a:xfrm>
+            <a:off x="685800" y="4480560"/>
+            <a:ext cx="8653881" cy="1280160"/>
+          </a:xfrm>
+          <a:prstGeom prst="rect">
+            <a:avLst/>
+          </a:prstGeom>
+          <a:noFill/>
+        </p:spPr>
+        <p:txBody>
+          <a:bodyPr wrap="square">
+            <a:spAutoFit/>
+          </a:bodyPr>
+          <a:lstStyle/>
+          <a:p>
+            <a:pPr algn="l"/>
+            <a:r>
+              <a:rPr sz="1600" b="0" i="0">
+                <a:solidFill>
+                  <a:srgbClr val="C8D2E6"/>
+                </a:solidFill>
+                <a:latin typeface="Arial"/>
+              </a:rPr>
+              <a:t>Werttreiber setzen und GuV, Bilanz, Cashflow bis zum Bilanzausgleich planen.</a:t>
+            </a:r>
+          </a:p>
+        </p:txBody>
+      </p:sp>
+      <p:sp>
+        <p:nvSpPr>
+          <p:cNvPr id="7" name="TextBox 6"/>
+          <p:cNvSpPr txBox="1"/>
+          <p:nvPr/>
+        </p:nvSpPr>
+        <p:spPr>
+          <a:xfrm>
+            <a:off x="685800" y="6355080"/>
+            <a:ext cx="10817352" cy="274320"/>
+          </a:xfrm>
+          <a:prstGeom prst="rect">
+            <a:avLst/>
+          </a:prstGeom>
+          <a:noFill/>
+        </p:spPr>
+        <p:txBody>
+          <a:bodyPr wrap="none">
+            <a:spAutoFit/>
+          </a:bodyPr>
+          <a:lstStyle/>
+          <a:p>
+            <a:pPr algn="l"/>
+            <a:r>
+              <a:rPr sz="700">
+                <a:solidFill>
+                  <a:srgbClr val="8CA0C3"/>
+                </a:solidFill>
+                <a:latin typeface="Consolas"/>
+              </a:rPr>
+              <a:t>FKB Campus  ·  M23</a:t>
+            </a:r>
+          </a:p>
+        </p:txBody>
+      </p:sp>
+    </p:spTree>
+  </p:cSld>
+  <p:clrMapOvr>
+    <a:masterClrMapping/>
+  </p:clrMapOvr>
+</p:sld>
+</file>
+
+<file path=ppt/slides/slide13.xml><?xml version="1.0" encoding="utf-8"?>
+<p:sld xmlns:a="http://schemas.openxmlformats.org/drawingml/2006/main" xmlns:p="http://schemas.openxmlformats.org/presentationml/2006/main" xmlns:r="http://schemas.openxmlformats.org/officeDocument/2006/relationships">
+  <p:cSld>
+    <p:spTree>
+      <p:nvGrpSpPr>
+        <p:cNvPr id="1" name=""/>
+        <p:cNvGrpSpPr/>
+        <p:nvPr/>
+      </p:nvGrpSpPr>
+      <p:grpSpPr/>
+      <p:sp>
+        <p:nvSpPr>
+          <p:cNvPr id="2" name="Rectangle 1"/>
+          <p:cNvSpPr/>
+          <p:nvPr/>
+        </p:nvSpPr>
+        <p:spPr>
+          <a:xfrm>
+            <a:off x="0" y="0"/>
+            <a:ext cx="12188952" cy="6858000"/>
+          </a:xfrm>
+          <a:prstGeom prst="rect">
+            <a:avLst/>
+          </a:prstGeom>
+          <a:solidFill>
+            <a:srgbClr val="EDEDF3"/>
+          </a:solidFill>
+          <a:ln>
+            <a:noFill/>
+          </a:ln>
+        </p:spPr>
+        <p:style>
+          <a:lnRef idx="1">
+            <a:schemeClr val="accent1"/>
+          </a:lnRef>
+          <a:fillRef idx="3">
+            <a:schemeClr val="accent1"/>
+          </a:fillRef>
+          <a:effectRef idx="2">
+            <a:schemeClr val="accent1"/>
+          </a:effectRef>
+          <a:fontRef idx="minor">
+            <a:schemeClr val="lt1"/>
+          </a:fontRef>
+        </p:style>
+        <p:txBody>
+          <a:bodyPr rtlCol="0" anchor="ctr"/>
+          <a:lstStyle/>
+          <a:p>
+            <a:pPr algn="ctr"/>
+          </a:p>
+        </p:txBody>
+      </p:sp>
+      <p:sp>
+        <p:nvSpPr>
+          <p:cNvPr id="3" name="Rectangle 2"/>
+          <p:cNvSpPr/>
+          <p:nvPr/>
+        </p:nvSpPr>
+        <p:spPr>
+          <a:xfrm>
+            <a:off x="0" y="0"/>
+            <a:ext cx="12188952" cy="50292"/>
+          </a:xfrm>
+          <a:prstGeom prst="rect">
+            <a:avLst/>
+          </a:prstGeom>
+          <a:solidFill>
+            <a:srgbClr val="1F2C56"/>
+          </a:solidFill>
+          <a:ln>
+            <a:noFill/>
+          </a:ln>
+        </p:spPr>
+        <p:style>
+          <a:lnRef idx="1">
+            <a:schemeClr val="accent1"/>
+          </a:lnRef>
+          <a:fillRef idx="3">
+            <a:schemeClr val="accent1"/>
+          </a:fillRef>
+          <a:effectRef idx="2">
+            <a:schemeClr val="accent1"/>
+          </a:effectRef>
+          <a:fontRef idx="minor">
+            <a:schemeClr val="lt1"/>
+          </a:fontRef>
+        </p:style>
+        <p:txBody>
+          <a:bodyPr rtlCol="0" anchor="ctr"/>
+          <a:lstStyle/>
+          <a:p>
+            <a:pPr algn="ctr"/>
+          </a:p>
+        </p:txBody>
+      </p:sp>
+      <p:sp>
+        <p:nvSpPr>
+          <p:cNvPr id="4" name="TextBox 3"/>
+          <p:cNvSpPr txBox="1"/>
+          <p:nvPr/>
+        </p:nvSpPr>
+        <p:spPr>
+          <a:xfrm>
+            <a:off x="685800" y="109728"/>
+            <a:ext cx="10817352" cy="228600"/>
+          </a:xfrm>
+          <a:prstGeom prst="rect">
+            <a:avLst/>
+          </a:prstGeom>
+          <a:noFill/>
+        </p:spPr>
+        <p:txBody>
+          <a:bodyPr wrap="none">
+            <a:spAutoFit/>
+          </a:bodyPr>
+          <a:lstStyle/>
+          <a:p>
+            <a:pPr algn="l"/>
+            <a:r>
+              <a:rPr sz="750">
+                <a:solidFill>
+                  <a:srgbClr val="78808C"/>
+                </a:solidFill>
+                <a:latin typeface="Consolas"/>
+              </a:rPr>
+              <a:t>M23  ·  INHALT</a:t>
+            </a:r>
+          </a:p>
+        </p:txBody>
+      </p:sp>
+      <p:sp>
+        <p:nvSpPr>
+          <p:cNvPr id="5" name="Rectangle 4"/>
+          <p:cNvSpPr/>
+          <p:nvPr/>
+        </p:nvSpPr>
+        <p:spPr>
+          <a:xfrm>
+            <a:off x="0" y="1234440"/>
+            <a:ext cx="12188952" cy="12700"/>
+          </a:xfrm>
+          <a:prstGeom prst="rect">
+            <a:avLst/>
+          </a:prstGeom>
+          <a:solidFill>
+            <a:srgbClr val="D8DFE4"/>
+          </a:solidFill>
+          <a:ln>
+            <a:noFill/>
+          </a:ln>
+        </p:spPr>
+        <p:style>
+          <a:lnRef idx="1">
+            <a:schemeClr val="accent1"/>
+          </a:lnRef>
+          <a:fillRef idx="3">
+            <a:schemeClr val="accent1"/>
+          </a:fillRef>
+          <a:effectRef idx="2">
+            <a:schemeClr val="accent1"/>
+          </a:effectRef>
+          <a:fontRef idx="minor">
+            <a:schemeClr val="lt1"/>
+          </a:fontRef>
+        </p:style>
+        <p:txBody>
+          <a:bodyPr rtlCol="0" anchor="ctr"/>
+          <a:lstStyle/>
+          <a:p>
+            <a:pPr algn="ctr"/>
+          </a:p>
+        </p:txBody>
+      </p:sp>
+      <p:sp>
+        <p:nvSpPr>
+          <p:cNvPr id="6" name="Rectangle 5"/>
+          <p:cNvSpPr/>
+          <p:nvPr/>
+        </p:nvSpPr>
+        <p:spPr>
+          <a:xfrm>
+            <a:off x="685800" y="502920"/>
+            <a:ext cx="36576" cy="658368"/>
+          </a:xfrm>
+          <a:prstGeom prst="rect">
+            <a:avLst/>
+          </a:prstGeom>
+          <a:solidFill>
+            <a:srgbClr val="D9C089"/>
+          </a:solidFill>
+          <a:ln>
+            <a:noFill/>
+          </a:ln>
+        </p:spPr>
+        <p:style>
+          <a:lnRef idx="1">
+            <a:schemeClr val="accent1"/>
+          </a:lnRef>
+          <a:fillRef idx="3">
+            <a:schemeClr val="accent1"/>
+          </a:fillRef>
+          <a:effectRef idx="2">
+            <a:schemeClr val="accent1"/>
+          </a:effectRef>
+          <a:fontRef idx="minor">
+            <a:schemeClr val="lt1"/>
+          </a:fontRef>
+        </p:style>
+        <p:txBody>
+          <a:bodyPr rtlCol="0" anchor="ctr"/>
+          <a:lstStyle/>
+          <a:p>
+            <a:pPr algn="ctr"/>
+          </a:p>
+        </p:txBody>
+      </p:sp>
+      <p:sp>
+        <p:nvSpPr>
+          <p:cNvPr id="7" name="TextBox 6"/>
+          <p:cNvSpPr txBox="1"/>
+          <p:nvPr/>
+        </p:nvSpPr>
+        <p:spPr>
+          <a:xfrm>
+            <a:off x="813816" y="502920"/>
+            <a:ext cx="10634472" cy="685800"/>
+          </a:xfrm>
+          <a:prstGeom prst="rect">
+            <a:avLst/>
+          </a:prstGeom>
+          <a:noFill/>
+        </p:spPr>
+        <p:txBody>
+          <a:bodyPr wrap="square">
+            <a:spAutoFit/>
+          </a:bodyPr>
+          <a:lstStyle/>
+          <a:p>
+            <a:pPr algn="l"/>
+            <a:r>
+              <a:rPr sz="2400" b="1" i="0">
+                <a:solidFill>
+                  <a:srgbClr val="1F2C56"/>
+                </a:solidFill>
+                <a:latin typeface="Arial"/>
+              </a:rPr>
+              <a:t>Annahmen und Werttreiber setzen</a:t>
+            </a:r>
+          </a:p>
+        </p:txBody>
+      </p:sp>
+      <p:sp>
+        <p:nvSpPr>
+          <p:cNvPr id="8" name="TextBox 7"/>
+          <p:cNvSpPr txBox="1"/>
+          <p:nvPr/>
+        </p:nvSpPr>
+        <p:spPr>
+          <a:xfrm>
+            <a:off x="685800" y="1417320"/>
+            <a:ext cx="10817352" cy="4892040"/>
+          </a:xfrm>
+          <a:prstGeom prst="rect">
+            <a:avLst/>
+          </a:prstGeom>
+          <a:noFill/>
+        </p:spPr>
+        <p:txBody>
+          <a:bodyPr wrap="square" anchor="ctr">
+            <a:spAutoFit/>
+          </a:bodyPr>
+          <a:lstStyle/>
+          <a:p>
+            <a:pPr marL="177800" indent="-177800">
+              <a:spcBef>
+                <a:spcPts val="600"/>
+              </a:spcBef>
+              <a:spcAft>
+                <a:spcPts val="200"/>
+              </a:spcAft>
+            </a:pPr>
+            <a:r>
+              <a:rPr sz="1200" i="1">
+                <a:solidFill>
+                  <a:srgbClr val="3D5466"/>
+                </a:solidFill>
+                <a:latin typeface="Arial"/>
+              </a:rPr>
+              <a:t>→  Hinterfrage die Annahme, nicht nur das Ergebnis – ein Modell ist immer nur so gut wie seine Prämissen.</a:t>
+            </a:r>
+          </a:p>
+          <a:p>
+            <a:pPr marL="190500" indent="-190500">
+              <a:spcBef>
+                <a:spcPts val="400"/>
+              </a:spcBef>
+              <a:spcAft>
+                <a:spcPts val="200"/>
+              </a:spcAft>
+            </a:pPr>
+            <a:r>
+              <a:rPr sz="1300">
+                <a:solidFill>
+                  <a:srgbClr val="3D5466"/>
+                </a:solidFill>
+                <a:latin typeface="Arial"/>
+              </a:rPr>
+              <a:t>▸  Werttreiber: Umsatzwachstum, Marge, Investitionen, Working Capital.</a:t>
+            </a:r>
+          </a:p>
+          <a:p>
+            <a:pPr marL="190500" indent="-190500">
+              <a:spcBef>
+                <a:spcPts val="400"/>
+              </a:spcBef>
+              <a:spcAft>
+                <a:spcPts val="200"/>
+              </a:spcAft>
+            </a:pPr>
+            <a:r>
+              <a:rPr sz="1300">
+                <a:solidFill>
+                  <a:srgbClr val="3D5466"/>
+                </a:solidFill>
+                <a:latin typeface="Arial"/>
+              </a:rPr>
+              <a:t>▸  Bilanzausgleich: das Modell schließt nur, wenn Finanzierung und Cashflow zusammenpassen.</a:t>
+            </a:r>
+          </a:p>
+        </p:txBody>
+      </p:sp>
+      <p:sp>
+        <p:nvSpPr>
+          <p:cNvPr id="9" name="Rectangle 8"/>
+          <p:cNvSpPr/>
+          <p:nvPr/>
+        </p:nvSpPr>
+        <p:spPr>
+          <a:xfrm>
+            <a:off x="0" y="6510528"/>
+            <a:ext cx="12188952" cy="347472"/>
+          </a:xfrm>
+          <a:prstGeom prst="rect">
+            <a:avLst/>
+          </a:prstGeom>
+          <a:solidFill>
+            <a:srgbClr val="0A1937"/>
+          </a:solidFill>
+          <a:ln>
+            <a:noFill/>
+          </a:ln>
+        </p:spPr>
+        <p:style>
+          <a:lnRef idx="1">
+            <a:schemeClr val="accent1"/>
+          </a:lnRef>
+          <a:fillRef idx="3">
+            <a:schemeClr val="accent1"/>
+          </a:fillRef>
+          <a:effectRef idx="2">
+            <a:schemeClr val="accent1"/>
+          </a:effectRef>
+          <a:fontRef idx="minor">
+            <a:schemeClr val="lt1"/>
+          </a:fontRef>
+        </p:style>
+        <p:txBody>
+          <a:bodyPr rtlCol="0" anchor="ctr"/>
+          <a:lstStyle/>
+          <a:p>
+            <a:pPr algn="ctr"/>
+          </a:p>
+        </p:txBody>
+      </p:sp>
+      <p:sp>
+        <p:nvSpPr>
+          <p:cNvPr id="10" name="TextBox 9"/>
+          <p:cNvSpPr txBox="1"/>
+          <p:nvPr/>
+        </p:nvSpPr>
+        <p:spPr>
+          <a:xfrm>
+            <a:off x="685800" y="6583680"/>
+            <a:ext cx="6490411" cy="256032"/>
+          </a:xfrm>
+          <a:prstGeom prst="rect">
+            <a:avLst/>
+          </a:prstGeom>
+          <a:noFill/>
+        </p:spPr>
+        <p:txBody>
+          <a:bodyPr wrap="none">
+            <a:spAutoFit/>
+          </a:bodyPr>
+          <a:lstStyle/>
+          <a:p>
+            <a:pPr algn="l"/>
+            <a:r>
+              <a:rPr sz="700">
+                <a:solidFill>
+                  <a:srgbClr val="A0B4D2"/>
+                </a:solidFill>
+                <a:latin typeface="Consolas"/>
+              </a:rPr>
+              <a:t>FKB Campus  ·  M23</a:t>
+            </a:r>
+          </a:p>
+        </p:txBody>
+      </p:sp>
+    </p:spTree>
+  </p:cSld>
+  <p:clrMapOvr>
+    <a:masterClrMapping/>
+  </p:clrMapOvr>
+</p:sld>
+</file>
+
+<file path=ppt/slides/slide14.xml><?xml version="1.0" encoding="utf-8"?>
+<p:sld xmlns:a="http://schemas.openxmlformats.org/drawingml/2006/main" xmlns:p="http://schemas.openxmlformats.org/presentationml/2006/main" xmlns:r="http://schemas.openxmlformats.org/officeDocument/2006/relationships">
+  <p:cSld>
+    <p:spTree>
+      <p:nvGrpSpPr>
+        <p:cNvPr id="1" name=""/>
+        <p:cNvGrpSpPr/>
+        <p:nvPr/>
+      </p:nvGrpSpPr>
+      <p:grpSpPr/>
+      <p:sp>
+        <p:nvSpPr>
+          <p:cNvPr id="2" name="Rectangle 1"/>
+          <p:cNvSpPr/>
+          <p:nvPr/>
+        </p:nvSpPr>
+        <p:spPr>
+          <a:xfrm>
+            <a:off x="0" y="0"/>
+            <a:ext cx="12188952" cy="6858000"/>
+          </a:xfrm>
+          <a:prstGeom prst="rect">
+            <a:avLst/>
+          </a:prstGeom>
+          <a:solidFill>
+            <a:srgbClr val="EDEDF3"/>
+          </a:solidFill>
+          <a:ln>
+            <a:noFill/>
+          </a:ln>
+        </p:spPr>
+        <p:style>
+          <a:lnRef idx="1">
+            <a:schemeClr val="accent1"/>
+          </a:lnRef>
+          <a:fillRef idx="3">
+            <a:schemeClr val="accent1"/>
+          </a:fillRef>
+          <a:effectRef idx="2">
+            <a:schemeClr val="accent1"/>
+          </a:effectRef>
+          <a:fontRef idx="minor">
+            <a:schemeClr val="lt1"/>
+          </a:fontRef>
+        </p:style>
+        <p:txBody>
+          <a:bodyPr rtlCol="0" anchor="ctr"/>
+          <a:lstStyle/>
+          <a:p>
+            <a:pPr algn="ctr"/>
+          </a:p>
+        </p:txBody>
+      </p:sp>
+      <p:sp>
+        <p:nvSpPr>
+          <p:cNvPr id="3" name="Rectangle 2"/>
+          <p:cNvSpPr/>
+          <p:nvPr/>
+        </p:nvSpPr>
+        <p:spPr>
+          <a:xfrm>
+            <a:off x="0" y="0"/>
+            <a:ext cx="12188952" cy="50292"/>
+          </a:xfrm>
+          <a:prstGeom prst="rect">
+            <a:avLst/>
+          </a:prstGeom>
+          <a:solidFill>
+            <a:srgbClr val="1F2C56"/>
+          </a:solidFill>
+          <a:ln>
+            <a:noFill/>
+          </a:ln>
+        </p:spPr>
+        <p:style>
+          <a:lnRef idx="1">
+            <a:schemeClr val="accent1"/>
+          </a:lnRef>
+          <a:fillRef idx="3">
+            <a:schemeClr val="accent1"/>
+          </a:fillRef>
+          <a:effectRef idx="2">
+            <a:schemeClr val="accent1"/>
+          </a:effectRef>
+          <a:fontRef idx="minor">
+            <a:schemeClr val="lt1"/>
+          </a:fontRef>
+        </p:style>
+        <p:txBody>
+          <a:bodyPr rtlCol="0" anchor="ctr"/>
+          <a:lstStyle/>
+          <a:p>
+            <a:pPr algn="ctr"/>
+          </a:p>
+        </p:txBody>
+      </p:sp>
+      <p:sp>
+        <p:nvSpPr>
+          <p:cNvPr id="4" name="TextBox 3"/>
+          <p:cNvSpPr txBox="1"/>
+          <p:nvPr/>
+        </p:nvSpPr>
+        <p:spPr>
+          <a:xfrm>
+            <a:off x="685800" y="109728"/>
+            <a:ext cx="10817352" cy="228600"/>
+          </a:xfrm>
+          <a:prstGeom prst="rect">
+            <a:avLst/>
+          </a:prstGeom>
+          <a:noFill/>
+        </p:spPr>
+        <p:txBody>
+          <a:bodyPr wrap="none">
+            <a:spAutoFit/>
+          </a:bodyPr>
+          <a:lstStyle/>
+          <a:p>
+            <a:pPr algn="l"/>
+            <a:r>
+              <a:rPr sz="750">
+                <a:solidFill>
+                  <a:srgbClr val="78808C"/>
+                </a:solidFill>
+                <a:latin typeface="Consolas"/>
+              </a:rPr>
+              <a:t>M23  ·  ARBEITSBLATT</a:t>
+            </a:r>
+          </a:p>
+        </p:txBody>
+      </p:sp>
+      <p:sp>
+        <p:nvSpPr>
+          <p:cNvPr id="5" name="Rectangle 4"/>
+          <p:cNvSpPr/>
+          <p:nvPr/>
+        </p:nvSpPr>
+        <p:spPr>
+          <a:xfrm>
+            <a:off x="0" y="1234440"/>
+            <a:ext cx="12188952" cy="12700"/>
+          </a:xfrm>
+          <a:prstGeom prst="rect">
+            <a:avLst/>
+          </a:prstGeom>
+          <a:solidFill>
+            <a:srgbClr val="D8DFE4"/>
+          </a:solidFill>
+          <a:ln>
+            <a:noFill/>
+          </a:ln>
+        </p:spPr>
+        <p:style>
+          <a:lnRef idx="1">
+            <a:schemeClr val="accent1"/>
+          </a:lnRef>
+          <a:fillRef idx="3">
+            <a:schemeClr val="accent1"/>
+          </a:fillRef>
+          <a:effectRef idx="2">
+            <a:schemeClr val="accent1"/>
+          </a:effectRef>
+          <a:fontRef idx="minor">
+            <a:schemeClr val="lt1"/>
+          </a:fontRef>
+        </p:style>
+        <p:txBody>
+          <a:bodyPr rtlCol="0" anchor="ctr"/>
+          <a:lstStyle/>
+          <a:p>
+            <a:pPr algn="ctr"/>
+          </a:p>
+        </p:txBody>
+      </p:sp>
+      <p:sp>
+        <p:nvSpPr>
+          <p:cNvPr id="6" name="Rectangle 5"/>
+          <p:cNvSpPr/>
+          <p:nvPr/>
+        </p:nvSpPr>
+        <p:spPr>
+          <a:xfrm>
+            <a:off x="685800" y="502920"/>
+            <a:ext cx="36576" cy="658368"/>
+          </a:xfrm>
+          <a:prstGeom prst="rect">
+            <a:avLst/>
+          </a:prstGeom>
+          <a:solidFill>
+            <a:srgbClr val="D9C089"/>
+          </a:solidFill>
+          <a:ln>
+            <a:noFill/>
+          </a:ln>
+        </p:spPr>
+        <p:style>
+          <a:lnRef idx="1">
+            <a:schemeClr val="accent1"/>
+          </a:lnRef>
+          <a:fillRef idx="3">
+            <a:schemeClr val="accent1"/>
+          </a:fillRef>
+          <a:effectRef idx="2">
+            <a:schemeClr val="accent1"/>
+          </a:effectRef>
+          <a:fontRef idx="minor">
+            <a:schemeClr val="lt1"/>
+          </a:fontRef>
+        </p:style>
+        <p:txBody>
+          <a:bodyPr rtlCol="0" anchor="ctr"/>
+          <a:lstStyle/>
+          <a:p>
+            <a:pPr algn="ctr"/>
+          </a:p>
+        </p:txBody>
+      </p:sp>
+      <p:sp>
+        <p:nvSpPr>
+          <p:cNvPr id="7" name="TextBox 6"/>
+          <p:cNvSpPr txBox="1"/>
+          <p:nvPr/>
+        </p:nvSpPr>
+        <p:spPr>
+          <a:xfrm>
+            <a:off x="813816" y="502920"/>
+            <a:ext cx="10634472" cy="685800"/>
+          </a:xfrm>
+          <a:prstGeom prst="rect">
+            <a:avLst/>
+          </a:prstGeom>
+          <a:noFill/>
+        </p:spPr>
+        <p:txBody>
+          <a:bodyPr wrap="square">
+            <a:spAutoFit/>
+          </a:bodyPr>
+          <a:lstStyle/>
+          <a:p>
+            <a:pPr algn="l"/>
+            <a:r>
+              <a:rPr sz="2400" b="1" i="0">
+                <a:solidFill>
+                  <a:srgbClr val="1F2C56"/>
+                </a:solidFill>
+                <a:latin typeface="Arial"/>
+              </a:rPr>
+              <a:t>GuV, Bilanz und Cashflow planen</a:t>
+            </a:r>
+          </a:p>
+        </p:txBody>
+      </p:sp>
+      <p:sp>
+        <p:nvSpPr>
+          <p:cNvPr id="8" name="TextBox 7"/>
+          <p:cNvSpPr txBox="1"/>
+          <p:nvPr/>
+        </p:nvSpPr>
+        <p:spPr>
+          <a:xfrm>
+            <a:off x="685800" y="1554480"/>
+            <a:ext cx="10817352" cy="3840480"/>
+          </a:xfrm>
+          <a:prstGeom prst="rect">
+            <a:avLst/>
+          </a:prstGeom>
+          <a:noFill/>
+        </p:spPr>
+        <p:txBody>
+          <a:bodyPr wrap="square">
+            <a:spAutoFit/>
+          </a:bodyPr>
+          <a:lstStyle/>
+          <a:p>
+            <a:pPr marL="190500" indent="-190500">
+              <a:spcBef>
+                <a:spcPts val="400"/>
+              </a:spcBef>
+              <a:spcAft>
+                <a:spcPts val="200"/>
+              </a:spcAft>
+            </a:pPr>
+            <a:r>
+              <a:rPr sz="1400">
+                <a:solidFill>
+                  <a:srgbClr val="3D5466"/>
+                </a:solidFill>
+                <a:latin typeface="Arial"/>
+              </a:rPr>
+              <a:t>▸  Setzen Sie die Annahmen und Werttreiber im Modell (AB-3).</a:t>
+            </a:r>
+          </a:p>
+          <a:p>
+            <a:pPr marL="190500" indent="-190500">
+              <a:spcBef>
+                <a:spcPts val="400"/>
+              </a:spcBef>
+              <a:spcAft>
+                <a:spcPts val="200"/>
+              </a:spcAft>
+            </a:pPr>
+            <a:r>
+              <a:rPr sz="1400">
+                <a:solidFill>
+                  <a:srgbClr val="3D5466"/>
+                </a:solidFill>
+                <a:latin typeface="Arial"/>
+              </a:rPr>
+              <a:t>▸  Planen Sie GuV, Bilanz und Cashflow integriert.</a:t>
+            </a:r>
+          </a:p>
+          <a:p>
+            <a:pPr marL="190500" indent="-190500">
+              <a:spcBef>
+                <a:spcPts val="400"/>
+              </a:spcBef>
+              <a:spcAft>
+                <a:spcPts val="200"/>
+              </a:spcAft>
+            </a:pPr>
+            <a:r>
+              <a:rPr sz="1400">
+                <a:solidFill>
+                  <a:srgbClr val="3D5466"/>
+                </a:solidFill>
+                <a:latin typeface="Arial"/>
+              </a:rPr>
+              <a:t>▸  Stellen Sie den Bilanzausgleich her – der Plan muss sich schließen.</a:t>
+            </a:r>
+          </a:p>
+        </p:txBody>
+      </p:sp>
+      <p:sp>
+        <p:nvSpPr>
+          <p:cNvPr id="9" name="Rectangle 8"/>
+          <p:cNvSpPr/>
+          <p:nvPr/>
+        </p:nvSpPr>
+        <p:spPr>
+          <a:xfrm>
+            <a:off x="685800" y="5486400"/>
+            <a:ext cx="10817352" cy="640080"/>
+          </a:xfrm>
+          <a:prstGeom prst="rect">
+            <a:avLst/>
+          </a:prstGeom>
+          <a:solidFill>
+            <a:srgbClr val="1F2C56"/>
+          </a:solidFill>
+          <a:ln>
+            <a:noFill/>
+          </a:ln>
+        </p:spPr>
+        <p:style>
+          <a:lnRef idx="1">
+            <a:schemeClr val="accent1"/>
+          </a:lnRef>
+          <a:fillRef idx="3">
+            <a:schemeClr val="accent1"/>
+          </a:fillRef>
+          <a:effectRef idx="2">
+            <a:schemeClr val="accent1"/>
+          </a:effectRef>
+          <a:fontRef idx="minor">
+            <a:schemeClr val="lt1"/>
+          </a:fontRef>
+        </p:style>
+        <p:txBody>
+          <a:bodyPr rtlCol="0" anchor="ctr"/>
+          <a:lstStyle/>
+          <a:p>
+            <a:pPr algn="ctr"/>
+          </a:p>
+        </p:txBody>
+      </p:sp>
+      <p:sp>
+        <p:nvSpPr>
+          <p:cNvPr id="10" name="TextBox 9"/>
+          <p:cNvSpPr txBox="1"/>
+          <p:nvPr/>
+        </p:nvSpPr>
+        <p:spPr>
+          <a:xfrm>
+            <a:off x="868680" y="5596128"/>
+            <a:ext cx="10451592" cy="457200"/>
+          </a:xfrm>
+          <a:prstGeom prst="rect">
+            <a:avLst/>
+          </a:prstGeom>
+          <a:noFill/>
+        </p:spPr>
+        <p:txBody>
+          <a:bodyPr wrap="square">
+            <a:spAutoFit/>
+          </a:bodyPr>
+          <a:lstStyle/>
+          <a:p>
+            <a:pPr algn="l"/>
+            <a:r>
+              <a:rPr sz="1300" b="1" i="0">
+                <a:solidFill>
+                  <a:srgbClr val="FFFFFF"/>
+                </a:solidFill>
+                <a:latin typeface="Arial"/>
+              </a:rPr>
+              <a:t>→  Bearbeitung im Teilnehmer-Workbook (Arbeitsblatt mit Ausfüllfeldern)</a:t>
+            </a:r>
+          </a:p>
+        </p:txBody>
+      </p:sp>
+      <p:sp>
+        <p:nvSpPr>
+          <p:cNvPr id="11" name="Rectangle 10"/>
+          <p:cNvSpPr/>
+          <p:nvPr/>
+        </p:nvSpPr>
+        <p:spPr>
+          <a:xfrm>
+            <a:off x="0" y="6510528"/>
+            <a:ext cx="12188952" cy="347472"/>
+          </a:xfrm>
+          <a:prstGeom prst="rect">
+            <a:avLst/>
+          </a:prstGeom>
+          <a:solidFill>
+            <a:srgbClr val="0A1937"/>
+          </a:solidFill>
+          <a:ln>
+            <a:noFill/>
+          </a:ln>
+        </p:spPr>
+        <p:style>
+          <a:lnRef idx="1">
+            <a:schemeClr val="accent1"/>
+          </a:lnRef>
+          <a:fillRef idx="3">
+            <a:schemeClr val="accent1"/>
+          </a:fillRef>
+          <a:effectRef idx="2">
+            <a:schemeClr val="accent1"/>
+          </a:effectRef>
+          <a:fontRef idx="minor">
+            <a:schemeClr val="lt1"/>
+          </a:fontRef>
+        </p:style>
+        <p:txBody>
+          <a:bodyPr rtlCol="0" anchor="ctr"/>
+          <a:lstStyle/>
+          <a:p>
+            <a:pPr algn="ctr"/>
+          </a:p>
+        </p:txBody>
+      </p:sp>
+      <p:sp>
+        <p:nvSpPr>
+          <p:cNvPr id="12" name="TextBox 11"/>
+          <p:cNvSpPr txBox="1"/>
+          <p:nvPr/>
+        </p:nvSpPr>
+        <p:spPr>
+          <a:xfrm>
+            <a:off x="685800" y="6583680"/>
+            <a:ext cx="6490411" cy="256032"/>
+          </a:xfrm>
+          <a:prstGeom prst="rect">
+            <a:avLst/>
+          </a:prstGeom>
+          <a:noFill/>
+        </p:spPr>
+        <p:txBody>
+          <a:bodyPr wrap="none">
+            <a:spAutoFit/>
+          </a:bodyPr>
+          <a:lstStyle/>
+          <a:p>
+            <a:pPr algn="l"/>
+            <a:r>
+              <a:rPr sz="700">
+                <a:solidFill>
+                  <a:srgbClr val="A0B4D2"/>
+                </a:solidFill>
+                <a:latin typeface="Consolas"/>
+              </a:rPr>
+              <a:t>FKB Campus  ·  M23</a:t>
+            </a:r>
+          </a:p>
+        </p:txBody>
+      </p:sp>
+    </p:spTree>
+  </p:cSld>
+  <p:clrMapOvr>
+    <a:masterClrMapping/>
+  </p:clrMapOvr>
+</p:sld>
+</file>
+
+<file path=ppt/slides/slide15.xml><?xml version="1.0" encoding="utf-8"?>
+<p:sld xmlns:a="http://schemas.openxmlformats.org/drawingml/2006/main" xmlns:p="http://schemas.openxmlformats.org/presentationml/2006/main" xmlns:r="http://schemas.openxmlformats.org/officeDocument/2006/relationships">
+  <p:cSld>
+    <p:spTree>
+      <p:nvGrpSpPr>
+        <p:cNvPr id="1" name=""/>
+        <p:cNvGrpSpPr/>
+        <p:nvPr/>
+      </p:nvGrpSpPr>
+      <p:grpSpPr/>
+      <p:sp>
+        <p:nvSpPr>
+          <p:cNvPr id="2" name="Rectangle 1"/>
+          <p:cNvSpPr/>
+          <p:nvPr/>
+        </p:nvSpPr>
+        <p:spPr>
+          <a:xfrm>
+            <a:off x="0" y="0"/>
+            <a:ext cx="12188952" cy="6858000"/>
+          </a:xfrm>
+          <a:prstGeom prst="rect">
+            <a:avLst/>
+          </a:prstGeom>
+          <a:solidFill>
+            <a:srgbClr val="1F2C56"/>
+          </a:solidFill>
+          <a:ln>
+            <a:noFill/>
+          </a:ln>
+        </p:spPr>
+        <p:style>
+          <a:lnRef idx="1">
+            <a:schemeClr val="accent1"/>
+          </a:lnRef>
+          <a:fillRef idx="3">
+            <a:schemeClr val="accent1"/>
+          </a:fillRef>
+          <a:effectRef idx="2">
+            <a:schemeClr val="accent1"/>
+          </a:effectRef>
+          <a:fontRef idx="minor">
+            <a:schemeClr val="lt1"/>
+          </a:fontRef>
+        </p:style>
+        <p:txBody>
+          <a:bodyPr rtlCol="0" anchor="ctr"/>
+          <a:lstStyle/>
+          <a:p>
+            <a:pPr algn="ctr"/>
+          </a:p>
+        </p:txBody>
+      </p:sp>
+      <p:sp>
+        <p:nvSpPr>
+          <p:cNvPr id="3" name="TextBox 2"/>
+          <p:cNvSpPr txBox="1"/>
+          <p:nvPr/>
+        </p:nvSpPr>
+        <p:spPr>
+          <a:xfrm>
+            <a:off x="685800" y="2377440"/>
+            <a:ext cx="10817352" cy="365760"/>
+          </a:xfrm>
+          <a:prstGeom prst="rect">
+            <a:avLst/>
+          </a:prstGeom>
+          <a:noFill/>
+        </p:spPr>
+        <p:txBody>
+          <a:bodyPr wrap="none">
+            <a:spAutoFit/>
+          </a:bodyPr>
+          <a:lstStyle/>
+          <a:p>
+            <a:pPr algn="l"/>
+            <a:r>
+              <a:rPr sz="1200">
+                <a:solidFill>
+                  <a:srgbClr val="D9C089"/>
+                </a:solidFill>
+                <a:latin typeface="Consolas"/>
+              </a:rPr>
+              <a:t>13:30–14:30</a:t>
+            </a:r>
+          </a:p>
+        </p:txBody>
+      </p:sp>
+      <p:sp>
+        <p:nvSpPr>
+          <p:cNvPr id="4" name="Rectangle 3"/>
+          <p:cNvSpPr/>
+          <p:nvPr/>
+        </p:nvSpPr>
+        <p:spPr>
+          <a:xfrm>
+            <a:off x="685800" y="2788920"/>
+            <a:ext cx="548640" cy="38100"/>
+          </a:xfrm>
+          <a:prstGeom prst="rect">
+            <a:avLst/>
+          </a:prstGeom>
+          <a:solidFill>
+            <a:srgbClr val="D9C089"/>
+          </a:solidFill>
+          <a:ln>
+            <a:noFill/>
+          </a:ln>
+        </p:spPr>
+        <p:style>
+          <a:lnRef idx="1">
+            <a:schemeClr val="accent1"/>
+          </a:lnRef>
+          <a:fillRef idx="3">
+            <a:schemeClr val="accent1"/>
+          </a:fillRef>
+          <a:effectRef idx="2">
+            <a:schemeClr val="accent1"/>
+          </a:effectRef>
+          <a:fontRef idx="minor">
+            <a:schemeClr val="lt1"/>
+          </a:fontRef>
+        </p:style>
+        <p:txBody>
+          <a:bodyPr rtlCol="0" anchor="ctr"/>
+          <a:lstStyle/>
+          <a:p>
+            <a:pPr algn="ctr"/>
+          </a:p>
+        </p:txBody>
+      </p:sp>
+      <p:sp>
+        <p:nvSpPr>
+          <p:cNvPr id="5" name="TextBox 4"/>
+          <p:cNvSpPr txBox="1"/>
+          <p:nvPr/>
+        </p:nvSpPr>
+        <p:spPr>
+          <a:xfrm>
+            <a:off x="685800" y="3017520"/>
+            <a:ext cx="10817352" cy="1463040"/>
+          </a:xfrm>
+          <a:prstGeom prst="rect">
+            <a:avLst/>
+          </a:prstGeom>
+          <a:noFill/>
+        </p:spPr>
+        <p:txBody>
+          <a:bodyPr wrap="square">
+            <a:spAutoFit/>
+          </a:bodyPr>
+          <a:lstStyle/>
+          <a:p>
+            <a:pPr algn="l"/>
+            <a:r>
+              <a:rPr sz="4000" b="1" i="0">
+                <a:solidFill>
+                  <a:srgbClr val="FFFFFF"/>
+                </a:solidFill>
+                <a:latin typeface="Arial"/>
+              </a:rPr>
+              <a:t>Input 3 &amp; Übung 3: Kapitaldienst</a:t>
+            </a:r>
+          </a:p>
+        </p:txBody>
+      </p:sp>
+      <p:sp>
+        <p:nvSpPr>
+          <p:cNvPr id="6" name="TextBox 5"/>
+          <p:cNvSpPr txBox="1"/>
+          <p:nvPr/>
+        </p:nvSpPr>
+        <p:spPr>
+          <a:xfrm>
+            <a:off x="685800" y="4480560"/>
+            <a:ext cx="8653881" cy="1280160"/>
+          </a:xfrm>
+          <a:prstGeom prst="rect">
+            <a:avLst/>
+          </a:prstGeom>
+          <a:noFill/>
+        </p:spPr>
+        <p:txBody>
+          <a:bodyPr wrap="square">
+            <a:spAutoFit/>
+          </a:bodyPr>
+          <a:lstStyle/>
+          <a:p>
+            <a:pPr algn="l"/>
+            <a:r>
+              <a:rPr sz="1600" b="0" i="0">
+                <a:solidFill>
+                  <a:srgbClr val="C8D2E6"/>
+                </a:solidFill>
+                <a:latin typeface="Arial"/>
+              </a:rPr>
+              <a:t>Kapitaldienstfähigkeit, DSCR und Debt Schedule berechnen und lesen.</a:t>
+            </a:r>
+          </a:p>
+        </p:txBody>
+      </p:sp>
+      <p:sp>
+        <p:nvSpPr>
+          <p:cNvPr id="7" name="TextBox 6"/>
+          <p:cNvSpPr txBox="1"/>
+          <p:nvPr/>
+        </p:nvSpPr>
+        <p:spPr>
+          <a:xfrm>
+            <a:off x="685800" y="6355080"/>
+            <a:ext cx="10817352" cy="274320"/>
+          </a:xfrm>
+          <a:prstGeom prst="rect">
+            <a:avLst/>
+          </a:prstGeom>
+          <a:noFill/>
+        </p:spPr>
+        <p:txBody>
+          <a:bodyPr wrap="none">
+            <a:spAutoFit/>
+          </a:bodyPr>
+          <a:lstStyle/>
+          <a:p>
+            <a:pPr algn="l"/>
+            <a:r>
+              <a:rPr sz="700">
+                <a:solidFill>
+                  <a:srgbClr val="8CA0C3"/>
+                </a:solidFill>
+                <a:latin typeface="Consolas"/>
+              </a:rPr>
+              <a:t>FKB Campus  ·  M23</a:t>
+            </a:r>
+          </a:p>
+        </p:txBody>
+      </p:sp>
+    </p:spTree>
+  </p:cSld>
+  <p:clrMapOvr>
+    <a:masterClrMapping/>
+  </p:clrMapOvr>
+</p:sld>
+</file>
+
+<file path=ppt/slides/slide16.xml><?xml version="1.0" encoding="utf-8"?>
+<p:sld xmlns:a="http://schemas.openxmlformats.org/drawingml/2006/main" xmlns:p="http://schemas.openxmlformats.org/presentationml/2006/main" xmlns:r="http://schemas.openxmlformats.org/officeDocument/2006/relationships">
+  <p:cSld>
+    <p:spTree>
+      <p:nvGrpSpPr>
+        <p:cNvPr id="1" name=""/>
+        <p:cNvGrpSpPr/>
+        <p:nvPr/>
+      </p:nvGrpSpPr>
+      <p:grpSpPr/>
+      <p:sp>
+        <p:nvSpPr>
+          <p:cNvPr id="2" name="Rectangle 1"/>
+          <p:cNvSpPr/>
+          <p:nvPr/>
+        </p:nvSpPr>
+        <p:spPr>
+          <a:xfrm>
+            <a:off x="0" y="0"/>
+            <a:ext cx="12188952" cy="6858000"/>
+          </a:xfrm>
+          <a:prstGeom prst="rect">
+            <a:avLst/>
+          </a:prstGeom>
+          <a:solidFill>
+            <a:srgbClr val="EDEDF3"/>
+          </a:solidFill>
+          <a:ln>
+            <a:noFill/>
+          </a:ln>
+        </p:spPr>
+        <p:style>
+          <a:lnRef idx="1">
+            <a:schemeClr val="accent1"/>
+          </a:lnRef>
+          <a:fillRef idx="3">
+            <a:schemeClr val="accent1"/>
+          </a:fillRef>
+          <a:effectRef idx="2">
+            <a:schemeClr val="accent1"/>
+          </a:effectRef>
+          <a:fontRef idx="minor">
+            <a:schemeClr val="lt1"/>
+          </a:fontRef>
+        </p:style>
+        <p:txBody>
+          <a:bodyPr rtlCol="0" anchor="ctr"/>
+          <a:lstStyle/>
+          <a:p>
+            <a:pPr algn="ctr"/>
+          </a:p>
+        </p:txBody>
+      </p:sp>
+      <p:sp>
+        <p:nvSpPr>
+          <p:cNvPr id="3" name="Rectangle 2"/>
+          <p:cNvSpPr/>
+          <p:nvPr/>
+        </p:nvSpPr>
+        <p:spPr>
+          <a:xfrm>
+            <a:off x="0" y="0"/>
+            <a:ext cx="12188952" cy="50292"/>
+          </a:xfrm>
+          <a:prstGeom prst="rect">
+            <a:avLst/>
+          </a:prstGeom>
+          <a:solidFill>
+            <a:srgbClr val="1F2C56"/>
+          </a:solidFill>
+          <a:ln>
+            <a:noFill/>
+          </a:ln>
+        </p:spPr>
+        <p:style>
+          <a:lnRef idx="1">
+            <a:schemeClr val="accent1"/>
+          </a:lnRef>
+          <a:fillRef idx="3">
+            <a:schemeClr val="accent1"/>
+          </a:fillRef>
+          <a:effectRef idx="2">
+            <a:schemeClr val="accent1"/>
+          </a:effectRef>
+          <a:fontRef idx="minor">
+            <a:schemeClr val="lt1"/>
+          </a:fontRef>
+        </p:style>
+        <p:txBody>
+          <a:bodyPr rtlCol="0" anchor="ctr"/>
+          <a:lstStyle/>
+          <a:p>
+            <a:pPr algn="ctr"/>
+          </a:p>
+        </p:txBody>
+      </p:sp>
+      <p:sp>
+        <p:nvSpPr>
+          <p:cNvPr id="4" name="TextBox 3"/>
+          <p:cNvSpPr txBox="1"/>
+          <p:nvPr/>
+        </p:nvSpPr>
+        <p:spPr>
+          <a:xfrm>
+            <a:off x="685800" y="109728"/>
+            <a:ext cx="10817352" cy="228600"/>
+          </a:xfrm>
+          <a:prstGeom prst="rect">
+            <a:avLst/>
+          </a:prstGeom>
+          <a:noFill/>
+        </p:spPr>
+        <p:txBody>
+          <a:bodyPr wrap="none">
+            <a:spAutoFit/>
+          </a:bodyPr>
+          <a:lstStyle/>
+          <a:p>
+            <a:pPr algn="l"/>
+            <a:r>
+              <a:rPr sz="750">
+                <a:solidFill>
+                  <a:srgbClr val="78808C"/>
+                </a:solidFill>
+                <a:latin typeface="Consolas"/>
+              </a:rPr>
+              <a:t>M23  ·  INHALT</a:t>
+            </a:r>
+          </a:p>
+        </p:txBody>
+      </p:sp>
+      <p:sp>
+        <p:nvSpPr>
+          <p:cNvPr id="5" name="Rectangle 4"/>
+          <p:cNvSpPr/>
+          <p:nvPr/>
+        </p:nvSpPr>
+        <p:spPr>
+          <a:xfrm>
+            <a:off x="0" y="1234440"/>
+            <a:ext cx="12188952" cy="12700"/>
+          </a:xfrm>
+          <a:prstGeom prst="rect">
+            <a:avLst/>
+          </a:prstGeom>
+          <a:solidFill>
+            <a:srgbClr val="D8DFE4"/>
+          </a:solidFill>
+          <a:ln>
+            <a:noFill/>
+          </a:ln>
+        </p:spPr>
+        <p:style>
+          <a:lnRef idx="1">
+            <a:schemeClr val="accent1"/>
+          </a:lnRef>
+          <a:fillRef idx="3">
+            <a:schemeClr val="accent1"/>
+          </a:fillRef>
+          <a:effectRef idx="2">
+            <a:schemeClr val="accent1"/>
+          </a:effectRef>
+          <a:fontRef idx="minor">
+            <a:schemeClr val="lt1"/>
+          </a:fontRef>
+        </p:style>
+        <p:txBody>
+          <a:bodyPr rtlCol="0" anchor="ctr"/>
+          <a:lstStyle/>
+          <a:p>
+            <a:pPr algn="ctr"/>
+          </a:p>
+        </p:txBody>
+      </p:sp>
+      <p:sp>
+        <p:nvSpPr>
+          <p:cNvPr id="6" name="Rectangle 5"/>
+          <p:cNvSpPr/>
+          <p:nvPr/>
+        </p:nvSpPr>
+        <p:spPr>
+          <a:xfrm>
+            <a:off x="685800" y="502920"/>
+            <a:ext cx="36576" cy="658368"/>
+          </a:xfrm>
+          <a:prstGeom prst="rect">
+            <a:avLst/>
+          </a:prstGeom>
+          <a:solidFill>
+            <a:srgbClr val="D9C089"/>
+          </a:solidFill>
+          <a:ln>
+            <a:noFill/>
+          </a:ln>
+        </p:spPr>
+        <p:style>
+          <a:lnRef idx="1">
+            <a:schemeClr val="accent1"/>
+          </a:lnRef>
+          <a:fillRef idx="3">
+            <a:schemeClr val="accent1"/>
+          </a:fillRef>
+          <a:effectRef idx="2">
+            <a:schemeClr val="accent1"/>
+          </a:effectRef>
+          <a:fontRef idx="minor">
+            <a:schemeClr val="lt1"/>
+          </a:fontRef>
+        </p:style>
+        <p:txBody>
+          <a:bodyPr rtlCol="0" anchor="ctr"/>
+          <a:lstStyle/>
+          <a:p>
+            <a:pPr algn="ctr"/>
+          </a:p>
+        </p:txBody>
+      </p:sp>
+      <p:sp>
+        <p:nvSpPr>
+          <p:cNvPr id="7" name="TextBox 6"/>
+          <p:cNvSpPr txBox="1"/>
+          <p:nvPr/>
+        </p:nvSpPr>
+        <p:spPr>
+          <a:xfrm>
+            <a:off x="813816" y="502920"/>
+            <a:ext cx="10634472" cy="685800"/>
+          </a:xfrm>
+          <a:prstGeom prst="rect">
+            <a:avLst/>
+          </a:prstGeom>
+          <a:noFill/>
+        </p:spPr>
+        <p:txBody>
+          <a:bodyPr wrap="square">
+            <a:spAutoFit/>
+          </a:bodyPr>
+          <a:lstStyle/>
+          <a:p>
+            <a:pPr algn="l"/>
+            <a:r>
+              <a:rPr sz="2400" b="1" i="0">
+                <a:solidFill>
+                  <a:srgbClr val="1F2C56"/>
+                </a:solidFill>
+                <a:latin typeface="Arial"/>
+              </a:rPr>
+              <a:t>Kapitaldienstfähigkeit und DSCR</a:t>
+            </a:r>
+          </a:p>
+        </p:txBody>
+      </p:sp>
+      <p:sp>
+        <p:nvSpPr>
+          <p:cNvPr id="8" name="TextBox 7"/>
+          <p:cNvSpPr txBox="1"/>
+          <p:nvPr/>
+        </p:nvSpPr>
+        <p:spPr>
+          <a:xfrm>
+            <a:off x="685800" y="1417320"/>
+            <a:ext cx="10817352" cy="4892040"/>
+          </a:xfrm>
+          <a:prstGeom prst="rect">
+            <a:avLst/>
+          </a:prstGeom>
+          <a:noFill/>
+        </p:spPr>
+        <p:txBody>
+          <a:bodyPr wrap="square" anchor="ctr">
+            <a:spAutoFit/>
+          </a:bodyPr>
+          <a:lstStyle/>
+          <a:p>
+            <a:pPr marL="177800" indent="-177800">
+              <a:spcBef>
+                <a:spcPts val="600"/>
+              </a:spcBef>
+              <a:spcAft>
+                <a:spcPts val="200"/>
+              </a:spcAft>
+            </a:pPr>
+            <a:r>
+              <a:rPr sz="1200" i="1">
+                <a:solidFill>
+                  <a:srgbClr val="3D5466"/>
+                </a:solidFill>
+                <a:latin typeface="Arial"/>
+              </a:rPr>
+              <a:t>→  Der DSCR sagt, ob der Cashflow den Kapitaldienst trägt – unter 1,0 zahlt das Unternehmen aus der Substanz.</a:t>
+            </a:r>
+          </a:p>
+          <a:p>
+            <a:pPr marL="190500" indent="-190500">
+              <a:spcBef>
+                <a:spcPts val="400"/>
+              </a:spcBef>
+              <a:spcAft>
+                <a:spcPts val="200"/>
+              </a:spcAft>
+            </a:pPr>
+            <a:r>
+              <a:rPr sz="1300">
+                <a:solidFill>
+                  <a:srgbClr val="3D5466"/>
+                </a:solidFill>
+                <a:latin typeface="Arial"/>
+              </a:rPr>
+              <a:t>▸  Debt Schedule: Darlehensplan mit Zins und Tilgung über die Laufzeit.</a:t>
+            </a:r>
+          </a:p>
+          <a:p>
+            <a:pPr marL="190500" indent="-190500">
+              <a:spcBef>
+                <a:spcPts val="400"/>
+              </a:spcBef>
+              <a:spcAft>
+                <a:spcPts val="200"/>
+              </a:spcAft>
+            </a:pPr>
+            <a:r>
+              <a:rPr sz="1300">
+                <a:solidFill>
+                  <a:srgbClr val="3D5466"/>
+                </a:solidFill>
+                <a:latin typeface="Arial"/>
+              </a:rPr>
+              <a:t>▸  DSCR = operativer Cashflow / Kapitaldienst; Zielwert deutlich über 1,0.</a:t>
+            </a:r>
+          </a:p>
+        </p:txBody>
+      </p:sp>
+      <p:sp>
+        <p:nvSpPr>
+          <p:cNvPr id="9" name="Rectangle 8"/>
+          <p:cNvSpPr/>
+          <p:nvPr/>
+        </p:nvSpPr>
+        <p:spPr>
+          <a:xfrm>
+            <a:off x="0" y="6510528"/>
+            <a:ext cx="12188952" cy="347472"/>
+          </a:xfrm>
+          <a:prstGeom prst="rect">
+            <a:avLst/>
+          </a:prstGeom>
+          <a:solidFill>
+            <a:srgbClr val="0A1937"/>
+          </a:solidFill>
+          <a:ln>
+            <a:noFill/>
+          </a:ln>
+        </p:spPr>
+        <p:style>
+          <a:lnRef idx="1">
+            <a:schemeClr val="accent1"/>
+          </a:lnRef>
+          <a:fillRef idx="3">
+            <a:schemeClr val="accent1"/>
+          </a:fillRef>
+          <a:effectRef idx="2">
+            <a:schemeClr val="accent1"/>
+          </a:effectRef>
+          <a:fontRef idx="minor">
+            <a:schemeClr val="lt1"/>
+          </a:fontRef>
+        </p:style>
+        <p:txBody>
+          <a:bodyPr rtlCol="0" anchor="ctr"/>
+          <a:lstStyle/>
+          <a:p>
+            <a:pPr algn="ctr"/>
+          </a:p>
+        </p:txBody>
+      </p:sp>
+      <p:sp>
+        <p:nvSpPr>
+          <p:cNvPr id="10" name="TextBox 9"/>
+          <p:cNvSpPr txBox="1"/>
+          <p:nvPr/>
+        </p:nvSpPr>
+        <p:spPr>
+          <a:xfrm>
+            <a:off x="685800" y="6583680"/>
+            <a:ext cx="6490411" cy="256032"/>
+          </a:xfrm>
+          <a:prstGeom prst="rect">
+            <a:avLst/>
+          </a:prstGeom>
+          <a:noFill/>
+        </p:spPr>
+        <p:txBody>
+          <a:bodyPr wrap="none">
+            <a:spAutoFit/>
+          </a:bodyPr>
+          <a:lstStyle/>
+          <a:p>
+            <a:pPr algn="l"/>
+            <a:r>
+              <a:rPr sz="700">
+                <a:solidFill>
+                  <a:srgbClr val="A0B4D2"/>
+                </a:solidFill>
+                <a:latin typeface="Consolas"/>
+              </a:rPr>
+              <a:t>FKB Campus  ·  M23</a:t>
+            </a:r>
+          </a:p>
+        </p:txBody>
+      </p:sp>
+    </p:spTree>
+  </p:cSld>
+  <p:clrMapOvr>
+    <a:masterClrMapping/>
+  </p:clrMapOvr>
+</p:sld>
+</file>
+
+<file path=ppt/slides/slide17.xml><?xml version="1.0" encoding="utf-8"?>
+<p:sld xmlns:a="http://schemas.openxmlformats.org/drawingml/2006/main" xmlns:p="http://schemas.openxmlformats.org/presentationml/2006/main" xmlns:r="http://schemas.openxmlformats.org/officeDocument/2006/relationships">
+  <p:cSld>
+    <p:spTree>
+      <p:nvGrpSpPr>
+        <p:cNvPr id="1" name=""/>
+        <p:cNvGrpSpPr/>
+        <p:nvPr/>
+      </p:nvGrpSpPr>
+      <p:grpSpPr/>
+      <p:sp>
+        <p:nvSpPr>
+          <p:cNvPr id="2" name="Rectangle 1"/>
+          <p:cNvSpPr/>
+          <p:nvPr/>
+        </p:nvSpPr>
+        <p:spPr>
+          <a:xfrm>
+            <a:off x="0" y="0"/>
+            <a:ext cx="12188952" cy="6858000"/>
+          </a:xfrm>
+          <a:prstGeom prst="rect">
+            <a:avLst/>
+          </a:prstGeom>
+          <a:solidFill>
+            <a:srgbClr val="EDEDF3"/>
+          </a:solidFill>
+          <a:ln>
+            <a:noFill/>
+          </a:ln>
+        </p:spPr>
+        <p:style>
+          <a:lnRef idx="1">
+            <a:schemeClr val="accent1"/>
+          </a:lnRef>
+          <a:fillRef idx="3">
+            <a:schemeClr val="accent1"/>
+          </a:fillRef>
+          <a:effectRef idx="2">
+            <a:schemeClr val="accent1"/>
+          </a:effectRef>
+          <a:fontRef idx="minor">
+            <a:schemeClr val="lt1"/>
+          </a:fontRef>
+        </p:style>
+        <p:txBody>
+          <a:bodyPr rtlCol="0" anchor="ctr"/>
+          <a:lstStyle/>
+          <a:p>
+            <a:pPr algn="ctr"/>
+          </a:p>
+        </p:txBody>
+      </p:sp>
+      <p:sp>
+        <p:nvSpPr>
+          <p:cNvPr id="3" name="Rectangle 2"/>
+          <p:cNvSpPr/>
+          <p:nvPr/>
+        </p:nvSpPr>
+        <p:spPr>
+          <a:xfrm>
+            <a:off x="0" y="0"/>
+            <a:ext cx="12188952" cy="50292"/>
+          </a:xfrm>
+          <a:prstGeom prst="rect">
+            <a:avLst/>
+          </a:prstGeom>
+          <a:solidFill>
+            <a:srgbClr val="1F2C56"/>
+          </a:solidFill>
+          <a:ln>
+            <a:noFill/>
+          </a:ln>
+        </p:spPr>
+        <p:style>
+          <a:lnRef idx="1">
+            <a:schemeClr val="accent1"/>
+          </a:lnRef>
+          <a:fillRef idx="3">
+            <a:schemeClr val="accent1"/>
+          </a:fillRef>
+          <a:effectRef idx="2">
+            <a:schemeClr val="accent1"/>
+          </a:effectRef>
+          <a:fontRef idx="minor">
+            <a:schemeClr val="lt1"/>
+          </a:fontRef>
+        </p:style>
+        <p:txBody>
+          <a:bodyPr rtlCol="0" anchor="ctr"/>
+          <a:lstStyle/>
+          <a:p>
+            <a:pPr algn="ctr"/>
+          </a:p>
+        </p:txBody>
+      </p:sp>
+      <p:sp>
+        <p:nvSpPr>
+          <p:cNvPr id="4" name="TextBox 3"/>
+          <p:cNvSpPr txBox="1"/>
+          <p:nvPr/>
+        </p:nvSpPr>
+        <p:spPr>
+          <a:xfrm>
+            <a:off x="685800" y="109728"/>
+            <a:ext cx="10817352" cy="228600"/>
+          </a:xfrm>
+          <a:prstGeom prst="rect">
+            <a:avLst/>
+          </a:prstGeom>
+          <a:noFill/>
+        </p:spPr>
+        <p:txBody>
+          <a:bodyPr wrap="none">
+            <a:spAutoFit/>
+          </a:bodyPr>
+          <a:lstStyle/>
+          <a:p>
+            <a:pPr algn="l"/>
+            <a:r>
+              <a:rPr sz="750">
+                <a:solidFill>
+                  <a:srgbClr val="78808C"/>
+                </a:solidFill>
+                <a:latin typeface="Consolas"/>
+              </a:rPr>
+              <a:t>M23  ·  ARBEITSBLATT</a:t>
+            </a:r>
+          </a:p>
+        </p:txBody>
+      </p:sp>
+      <p:sp>
+        <p:nvSpPr>
+          <p:cNvPr id="5" name="Rectangle 4"/>
+          <p:cNvSpPr/>
+          <p:nvPr/>
+        </p:nvSpPr>
+        <p:spPr>
+          <a:xfrm>
+            <a:off x="0" y="1234440"/>
+            <a:ext cx="12188952" cy="12700"/>
+          </a:xfrm>
+          <a:prstGeom prst="rect">
+            <a:avLst/>
+          </a:prstGeom>
+          <a:solidFill>
+            <a:srgbClr val="D8DFE4"/>
+          </a:solidFill>
+          <a:ln>
+            <a:noFill/>
+          </a:ln>
+        </p:spPr>
+        <p:style>
+          <a:lnRef idx="1">
+            <a:schemeClr val="accent1"/>
+          </a:lnRef>
+          <a:fillRef idx="3">
+            <a:schemeClr val="accent1"/>
+          </a:fillRef>
+          <a:effectRef idx="2">
+            <a:schemeClr val="accent1"/>
+          </a:effectRef>
+          <a:fontRef idx="minor">
+            <a:schemeClr val="lt1"/>
+          </a:fontRef>
+        </p:style>
+        <p:txBody>
+          <a:bodyPr rtlCol="0" anchor="ctr"/>
+          <a:lstStyle/>
+          <a:p>
+            <a:pPr algn="ctr"/>
+          </a:p>
+        </p:txBody>
+      </p:sp>
+      <p:sp>
+        <p:nvSpPr>
+          <p:cNvPr id="6" name="Rectangle 5"/>
+          <p:cNvSpPr/>
+          <p:nvPr/>
+        </p:nvSpPr>
+        <p:spPr>
+          <a:xfrm>
+            <a:off x="685800" y="502920"/>
+            <a:ext cx="36576" cy="658368"/>
+          </a:xfrm>
+          <a:prstGeom prst="rect">
+            <a:avLst/>
+          </a:prstGeom>
+          <a:solidFill>
+            <a:srgbClr val="D9C089"/>
+          </a:solidFill>
+          <a:ln>
+            <a:noFill/>
+          </a:ln>
+        </p:spPr>
+        <p:style>
+          <a:lnRef idx="1">
+            <a:schemeClr val="accent1"/>
+          </a:lnRef>
+          <a:fillRef idx="3">
+            <a:schemeClr val="accent1"/>
+          </a:fillRef>
+          <a:effectRef idx="2">
+            <a:schemeClr val="accent1"/>
+          </a:effectRef>
+          <a:fontRef idx="minor">
+            <a:schemeClr val="lt1"/>
+          </a:fontRef>
+        </p:style>
+        <p:txBody>
+          <a:bodyPr rtlCol="0" anchor="ctr"/>
+          <a:lstStyle/>
+          <a:p>
+            <a:pPr algn="ctr"/>
+          </a:p>
+        </p:txBody>
+      </p:sp>
+      <p:sp>
+        <p:nvSpPr>
+          <p:cNvPr id="7" name="TextBox 6"/>
+          <p:cNvSpPr txBox="1"/>
+          <p:nvPr/>
+        </p:nvSpPr>
+        <p:spPr>
+          <a:xfrm>
+            <a:off x="813816" y="502920"/>
+            <a:ext cx="10634472" cy="685800"/>
+          </a:xfrm>
+          <a:prstGeom prst="rect">
+            <a:avLst/>
+          </a:prstGeom>
+          <a:noFill/>
+        </p:spPr>
+        <p:txBody>
+          <a:bodyPr wrap="square">
+            <a:spAutoFit/>
+          </a:bodyPr>
+          <a:lstStyle/>
+          <a:p>
+            <a:pPr algn="l"/>
+            <a:r>
+              <a:rPr sz="2400" b="1" i="0">
+                <a:solidFill>
+                  <a:srgbClr val="1F2C56"/>
+                </a:solidFill>
+                <a:latin typeface="Arial"/>
+              </a:rPr>
+              <a:t>Debt Schedule und DSCR bearbeiten</a:t>
+            </a:r>
+          </a:p>
+        </p:txBody>
+      </p:sp>
+      <p:sp>
+        <p:nvSpPr>
+          <p:cNvPr id="8" name="TextBox 7"/>
+          <p:cNvSpPr txBox="1"/>
+          <p:nvPr/>
+        </p:nvSpPr>
+        <p:spPr>
+          <a:xfrm>
+            <a:off x="685800" y="1554480"/>
+            <a:ext cx="10817352" cy="3840480"/>
+          </a:xfrm>
+          <a:prstGeom prst="rect">
+            <a:avLst/>
+          </a:prstGeom>
+          <a:noFill/>
+        </p:spPr>
+        <p:txBody>
+          <a:bodyPr wrap="square">
+            <a:spAutoFit/>
+          </a:bodyPr>
+          <a:lstStyle/>
+          <a:p>
+            <a:pPr marL="190500" indent="-190500">
+              <a:spcBef>
+                <a:spcPts val="400"/>
+              </a:spcBef>
+              <a:spcAft>
+                <a:spcPts val="200"/>
+              </a:spcAft>
+            </a:pPr>
+            <a:r>
+              <a:rPr sz="1400">
+                <a:solidFill>
+                  <a:srgbClr val="3D5466"/>
+                </a:solidFill>
+                <a:latin typeface="Arial"/>
+              </a:rPr>
+              <a:t>▸  Bauen Sie den Debt Schedule für die geplante Investition (AB-4).</a:t>
+            </a:r>
+          </a:p>
+          <a:p>
+            <a:pPr marL="190500" indent="-190500">
+              <a:spcBef>
+                <a:spcPts val="400"/>
+              </a:spcBef>
+              <a:spcAft>
+                <a:spcPts val="200"/>
+              </a:spcAft>
+            </a:pPr>
+            <a:r>
+              <a:rPr sz="1400">
+                <a:solidFill>
+                  <a:srgbClr val="3D5466"/>
+                </a:solidFill>
+                <a:latin typeface="Arial"/>
+              </a:rPr>
+              <a:t>▸  Berechnen Sie den DSCR im Base Case und lesen Sie ihn im Kontext.</a:t>
+            </a:r>
+          </a:p>
+          <a:p>
+            <a:pPr marL="190500" indent="-190500">
+              <a:spcBef>
+                <a:spcPts val="400"/>
+              </a:spcBef>
+              <a:spcAft>
+                <a:spcPts val="200"/>
+              </a:spcAft>
+            </a:pPr>
+            <a:r>
+              <a:rPr sz="1400">
+                <a:solidFill>
+                  <a:srgbClr val="3D5466"/>
+                </a:solidFill>
+                <a:latin typeface="Arial"/>
+              </a:rPr>
+              <a:t>▸  Bewerten Sie die Kapitaldienstfähigkeit über den Planungshorizont.</a:t>
+            </a:r>
+          </a:p>
+        </p:txBody>
+      </p:sp>
+      <p:sp>
+        <p:nvSpPr>
+          <p:cNvPr id="9" name="Rectangle 8"/>
+          <p:cNvSpPr/>
+          <p:nvPr/>
+        </p:nvSpPr>
+        <p:spPr>
+          <a:xfrm>
+            <a:off x="685800" y="5486400"/>
+            <a:ext cx="10817352" cy="640080"/>
+          </a:xfrm>
+          <a:prstGeom prst="rect">
+            <a:avLst/>
+          </a:prstGeom>
+          <a:solidFill>
+            <a:srgbClr val="1F2C56"/>
+          </a:solidFill>
+          <a:ln>
+            <a:noFill/>
+          </a:ln>
+        </p:spPr>
+        <p:style>
+          <a:lnRef idx="1">
+            <a:schemeClr val="accent1"/>
+          </a:lnRef>
+          <a:fillRef idx="3">
+            <a:schemeClr val="accent1"/>
+          </a:fillRef>
+          <a:effectRef idx="2">
+            <a:schemeClr val="accent1"/>
+          </a:effectRef>
+          <a:fontRef idx="minor">
+            <a:schemeClr val="lt1"/>
+          </a:fontRef>
+        </p:style>
+        <p:txBody>
+          <a:bodyPr rtlCol="0" anchor="ctr"/>
+          <a:lstStyle/>
+          <a:p>
+            <a:pPr algn="ctr"/>
+          </a:p>
+        </p:txBody>
+      </p:sp>
+      <p:sp>
+        <p:nvSpPr>
+          <p:cNvPr id="10" name="TextBox 9"/>
+          <p:cNvSpPr txBox="1"/>
+          <p:nvPr/>
+        </p:nvSpPr>
+        <p:spPr>
+          <a:xfrm>
+            <a:off x="868680" y="5596128"/>
+            <a:ext cx="10451592" cy="457200"/>
+          </a:xfrm>
+          <a:prstGeom prst="rect">
+            <a:avLst/>
+          </a:prstGeom>
+          <a:noFill/>
+        </p:spPr>
+        <p:txBody>
+          <a:bodyPr wrap="square">
+            <a:spAutoFit/>
+          </a:bodyPr>
+          <a:lstStyle/>
+          <a:p>
+            <a:pPr algn="l"/>
+            <a:r>
+              <a:rPr sz="1300" b="1" i="0">
+                <a:solidFill>
+                  <a:srgbClr val="FFFFFF"/>
+                </a:solidFill>
+                <a:latin typeface="Arial"/>
+              </a:rPr>
+              <a:t>→  Bearbeitung im Teilnehmer-Workbook (Arbeitsblatt mit Ausfüllfeldern)</a:t>
+            </a:r>
+          </a:p>
+        </p:txBody>
+      </p:sp>
+      <p:sp>
+        <p:nvSpPr>
+          <p:cNvPr id="11" name="Rectangle 10"/>
+          <p:cNvSpPr/>
+          <p:nvPr/>
+        </p:nvSpPr>
+        <p:spPr>
+          <a:xfrm>
+            <a:off x="0" y="6510528"/>
+            <a:ext cx="12188952" cy="347472"/>
+          </a:xfrm>
+          <a:prstGeom prst="rect">
+            <a:avLst/>
+          </a:prstGeom>
+          <a:solidFill>
+            <a:srgbClr val="0A1937"/>
+          </a:solidFill>
+          <a:ln>
+            <a:noFill/>
+          </a:ln>
+        </p:spPr>
+        <p:style>
+          <a:lnRef idx="1">
+            <a:schemeClr val="accent1"/>
+          </a:lnRef>
+          <a:fillRef idx="3">
+            <a:schemeClr val="accent1"/>
+          </a:fillRef>
+          <a:effectRef idx="2">
+            <a:schemeClr val="accent1"/>
+          </a:effectRef>
+          <a:fontRef idx="minor">
+            <a:schemeClr val="lt1"/>
+          </a:fontRef>
+        </p:style>
+        <p:txBody>
+          <a:bodyPr rtlCol="0" anchor="ctr"/>
+          <a:lstStyle/>
+          <a:p>
+            <a:pPr algn="ctr"/>
+          </a:p>
+        </p:txBody>
+      </p:sp>
+      <p:sp>
+        <p:nvSpPr>
+          <p:cNvPr id="12" name="TextBox 11"/>
+          <p:cNvSpPr txBox="1"/>
+          <p:nvPr/>
+        </p:nvSpPr>
+        <p:spPr>
+          <a:xfrm>
+            <a:off x="685800" y="6583680"/>
+            <a:ext cx="6490411" cy="256032"/>
+          </a:xfrm>
+          <a:prstGeom prst="rect">
+            <a:avLst/>
+          </a:prstGeom>
+          <a:noFill/>
+        </p:spPr>
+        <p:txBody>
+          <a:bodyPr wrap="none">
+            <a:spAutoFit/>
+          </a:bodyPr>
+          <a:lstStyle/>
+          <a:p>
+            <a:pPr algn="l"/>
+            <a:r>
+              <a:rPr sz="700">
+                <a:solidFill>
+                  <a:srgbClr val="A0B4D2"/>
+                </a:solidFill>
+                <a:latin typeface="Consolas"/>
+              </a:rPr>
+              <a:t>FKB Campus  ·  M23</a:t>
+            </a:r>
+          </a:p>
+        </p:txBody>
+      </p:sp>
+    </p:spTree>
+  </p:cSld>
+  <p:clrMapOvr>
+    <a:masterClrMapping/>
+  </p:clrMapOvr>
+</p:sld>
+</file>
+
+<file path=ppt/slides/slide18.xml><?xml version="1.0" encoding="utf-8"?>
+<p:sld xmlns:a="http://schemas.openxmlformats.org/drawingml/2006/main" xmlns:p="http://schemas.openxmlformats.org/presentationml/2006/main" xmlns:r="http://schemas.openxmlformats.org/officeDocument/2006/relationships">
+  <p:cSld>
+    <p:spTree>
+      <p:nvGrpSpPr>
+        <p:cNvPr id="1" name=""/>
+        <p:cNvGrpSpPr/>
+        <p:nvPr/>
+      </p:nvGrpSpPr>
+      <p:grpSpPr/>
+      <p:sp>
+        <p:nvSpPr>
+          <p:cNvPr id="2" name="Rectangle 1"/>
+          <p:cNvSpPr/>
+          <p:nvPr/>
+        </p:nvSpPr>
+        <p:spPr>
+          <a:xfrm>
+            <a:off x="0" y="0"/>
+            <a:ext cx="12188952" cy="6858000"/>
+          </a:xfrm>
+          <a:prstGeom prst="rect">
+            <a:avLst/>
+          </a:prstGeom>
+          <a:solidFill>
+            <a:srgbClr val="1F2C56"/>
+          </a:solidFill>
+          <a:ln>
+            <a:noFill/>
+          </a:ln>
+        </p:spPr>
+        <p:style>
+          <a:lnRef idx="1">
+            <a:schemeClr val="accent1"/>
+          </a:lnRef>
+          <a:fillRef idx="3">
+            <a:schemeClr val="accent1"/>
+          </a:fillRef>
+          <a:effectRef idx="2">
+            <a:schemeClr val="accent1"/>
+          </a:effectRef>
+          <a:fontRef idx="minor">
+            <a:schemeClr val="lt1"/>
+          </a:fontRef>
+        </p:style>
+        <p:txBody>
+          <a:bodyPr rtlCol="0" anchor="ctr"/>
+          <a:lstStyle/>
+          <a:p>
+            <a:pPr algn="ctr"/>
+          </a:p>
+        </p:txBody>
+      </p:sp>
+      <p:sp>
+        <p:nvSpPr>
+          <p:cNvPr id="3" name="TextBox 2"/>
+          <p:cNvSpPr txBox="1"/>
+          <p:nvPr/>
+        </p:nvSpPr>
+        <p:spPr>
+          <a:xfrm>
+            <a:off x="685800" y="2377440"/>
+            <a:ext cx="10817352" cy="365760"/>
+          </a:xfrm>
+          <a:prstGeom prst="rect">
+            <a:avLst/>
+          </a:prstGeom>
+          <a:noFill/>
+        </p:spPr>
+        <p:txBody>
+          <a:bodyPr wrap="none">
+            <a:spAutoFit/>
+          </a:bodyPr>
+          <a:lstStyle/>
+          <a:p>
+            <a:pPr algn="l"/>
+            <a:r>
+              <a:rPr sz="1200">
+                <a:solidFill>
+                  <a:srgbClr val="D9C089"/>
+                </a:solidFill>
+                <a:latin typeface="Consolas"/>
+              </a:rPr>
+              <a:t>14:30–15:30</a:t>
+            </a:r>
+          </a:p>
+        </p:txBody>
+      </p:sp>
+      <p:sp>
+        <p:nvSpPr>
+          <p:cNvPr id="4" name="Rectangle 3"/>
+          <p:cNvSpPr/>
+          <p:nvPr/>
+        </p:nvSpPr>
+        <p:spPr>
+          <a:xfrm>
+            <a:off x="685800" y="2788920"/>
+            <a:ext cx="548640" cy="38100"/>
+          </a:xfrm>
+          <a:prstGeom prst="rect">
+            <a:avLst/>
+          </a:prstGeom>
+          <a:solidFill>
+            <a:srgbClr val="D9C089"/>
+          </a:solidFill>
+          <a:ln>
+            <a:noFill/>
+          </a:ln>
+        </p:spPr>
+        <p:style>
+          <a:lnRef idx="1">
+            <a:schemeClr val="accent1"/>
+          </a:lnRef>
+          <a:fillRef idx="3">
+            <a:schemeClr val="accent1"/>
+          </a:fillRef>
+          <a:effectRef idx="2">
+            <a:schemeClr val="accent1"/>
+          </a:effectRef>
+          <a:fontRef idx="minor">
+            <a:schemeClr val="lt1"/>
+          </a:fontRef>
+        </p:style>
+        <p:txBody>
+          <a:bodyPr rtlCol="0" anchor="ctr"/>
+          <a:lstStyle/>
+          <a:p>
+            <a:pPr algn="ctr"/>
+          </a:p>
+        </p:txBody>
+      </p:sp>
+      <p:sp>
+        <p:nvSpPr>
+          <p:cNvPr id="5" name="TextBox 4"/>
+          <p:cNvSpPr txBox="1"/>
+          <p:nvPr/>
+        </p:nvSpPr>
+        <p:spPr>
+          <a:xfrm>
+            <a:off x="685800" y="3017520"/>
+            <a:ext cx="10817352" cy="1463040"/>
+          </a:xfrm>
+          <a:prstGeom prst="rect">
+            <a:avLst/>
+          </a:prstGeom>
+          <a:noFill/>
+        </p:spPr>
+        <p:txBody>
+          <a:bodyPr wrap="square">
+            <a:spAutoFit/>
+          </a:bodyPr>
+          <a:lstStyle/>
+          <a:p>
+            <a:pPr algn="l"/>
+            <a:r>
+              <a:rPr sz="4000" b="1" i="0">
+                <a:solidFill>
+                  <a:srgbClr val="FFFFFF"/>
+                </a:solidFill>
+                <a:latin typeface="Arial"/>
+              </a:rPr>
+              <a:t>Übung 4: Stresstest</a:t>
+            </a:r>
+          </a:p>
+        </p:txBody>
+      </p:sp>
+      <p:sp>
+        <p:nvSpPr>
+          <p:cNvPr id="6" name="TextBox 5"/>
+          <p:cNvSpPr txBox="1"/>
+          <p:nvPr/>
+        </p:nvSpPr>
+        <p:spPr>
+          <a:xfrm>
+            <a:off x="685800" y="4480560"/>
+            <a:ext cx="8653881" cy="1280160"/>
+          </a:xfrm>
+          <a:prstGeom prst="rect">
+            <a:avLst/>
+          </a:prstGeom>
+          <a:noFill/>
+        </p:spPr>
+        <p:txBody>
+          <a:bodyPr wrap="square">
+            <a:spAutoFit/>
+          </a:bodyPr>
+          <a:lstStyle/>
+          <a:p>
+            <a:pPr algn="l"/>
+            <a:r>
+              <a:rPr sz="1600" b="0" i="0">
+                <a:solidFill>
+                  <a:srgbClr val="C8D2E6"/>
+                </a:solidFill>
+                <a:latin typeface="Arial"/>
+              </a:rPr>
+              <a:t>Das Modell unter Druck setzen – Base, Upside, Downside und der Covenant-Bruchpunkt.</a:t>
+            </a:r>
+          </a:p>
+        </p:txBody>
+      </p:sp>
+      <p:sp>
+        <p:nvSpPr>
+          <p:cNvPr id="7" name="TextBox 6"/>
+          <p:cNvSpPr txBox="1"/>
+          <p:nvPr/>
+        </p:nvSpPr>
+        <p:spPr>
+          <a:xfrm>
+            <a:off x="685800" y="6355080"/>
+            <a:ext cx="10817352" cy="274320"/>
+          </a:xfrm>
+          <a:prstGeom prst="rect">
+            <a:avLst/>
+          </a:prstGeom>
+          <a:noFill/>
+        </p:spPr>
+        <p:txBody>
+          <a:bodyPr wrap="none">
+            <a:spAutoFit/>
+          </a:bodyPr>
+          <a:lstStyle/>
+          <a:p>
+            <a:pPr algn="l"/>
+            <a:r>
+              <a:rPr sz="700">
+                <a:solidFill>
+                  <a:srgbClr val="8CA0C3"/>
+                </a:solidFill>
+                <a:latin typeface="Consolas"/>
+              </a:rPr>
+              <a:t>FKB Campus  ·  M23</a:t>
+            </a:r>
+          </a:p>
+        </p:txBody>
+      </p:sp>
+    </p:spTree>
+  </p:cSld>
+  <p:clrMapOvr>
+    <a:masterClrMapping/>
+  </p:clrMapOvr>
+</p:sld>
+</file>
+
+<file path=ppt/slides/slide19.xml><?xml version="1.0" encoding="utf-8"?>
+<p:sld xmlns:a="http://schemas.openxmlformats.org/drawingml/2006/main" xmlns:p="http://schemas.openxmlformats.org/presentationml/2006/main" xmlns:r="http://schemas.openxmlformats.org/officeDocument/2006/relationships">
+  <p:cSld>
+    <p:spTree>
+      <p:nvGrpSpPr>
+        <p:cNvPr id="1" name=""/>
+        <p:cNvGrpSpPr/>
+        <p:nvPr/>
+      </p:nvGrpSpPr>
+      <p:grpSpPr/>
+      <p:sp>
+        <p:nvSpPr>
+          <p:cNvPr id="2" name="Rectangle 1"/>
+          <p:cNvSpPr/>
+          <p:nvPr/>
+        </p:nvSpPr>
+        <p:spPr>
+          <a:xfrm>
+            <a:off x="0" y="0"/>
+            <a:ext cx="12188952" cy="6858000"/>
+          </a:xfrm>
+          <a:prstGeom prst="rect">
+            <a:avLst/>
+          </a:prstGeom>
+          <a:solidFill>
+            <a:srgbClr val="EDEDF3"/>
+          </a:solidFill>
+          <a:ln>
+            <a:noFill/>
+          </a:ln>
+        </p:spPr>
+        <p:style>
+          <a:lnRef idx="1">
+            <a:schemeClr val="accent1"/>
+          </a:lnRef>
+          <a:fillRef idx="3">
+            <a:schemeClr val="accent1"/>
+          </a:fillRef>
+          <a:effectRef idx="2">
+            <a:schemeClr val="accent1"/>
+          </a:effectRef>
+          <a:fontRef idx="minor">
+            <a:schemeClr val="lt1"/>
+          </a:fontRef>
+        </p:style>
+        <p:txBody>
+          <a:bodyPr rtlCol="0" anchor="ctr"/>
+          <a:lstStyle/>
+          <a:p>
+            <a:pPr algn="ctr"/>
+          </a:p>
+        </p:txBody>
+      </p:sp>
+      <p:sp>
+        <p:nvSpPr>
+          <p:cNvPr id="3" name="Rectangle 2"/>
+          <p:cNvSpPr/>
+          <p:nvPr/>
+        </p:nvSpPr>
+        <p:spPr>
+          <a:xfrm>
+            <a:off x="0" y="0"/>
+            <a:ext cx="12188952" cy="50292"/>
+          </a:xfrm>
+          <a:prstGeom prst="rect">
+            <a:avLst/>
+          </a:prstGeom>
+          <a:solidFill>
+            <a:srgbClr val="1F2C56"/>
+          </a:solidFill>
+          <a:ln>
+            <a:noFill/>
+          </a:ln>
+        </p:spPr>
+        <p:style>
+          <a:lnRef idx="1">
+            <a:schemeClr val="accent1"/>
+          </a:lnRef>
+          <a:fillRef idx="3">
+            <a:schemeClr val="accent1"/>
+          </a:fillRef>
+          <a:effectRef idx="2">
+            <a:schemeClr val="accent1"/>
+          </a:effectRef>
+          <a:fontRef idx="minor">
+            <a:schemeClr val="lt1"/>
+          </a:fontRef>
+        </p:style>
+        <p:txBody>
+          <a:bodyPr rtlCol="0" anchor="ctr"/>
+          <a:lstStyle/>
+          <a:p>
+            <a:pPr algn="ctr"/>
+          </a:p>
+        </p:txBody>
+      </p:sp>
+      <p:sp>
+        <p:nvSpPr>
+          <p:cNvPr id="4" name="TextBox 3"/>
+          <p:cNvSpPr txBox="1"/>
+          <p:nvPr/>
+        </p:nvSpPr>
+        <p:spPr>
+          <a:xfrm>
+            <a:off x="685800" y="109728"/>
+            <a:ext cx="10817352" cy="228600"/>
+          </a:xfrm>
+          <a:prstGeom prst="rect">
+            <a:avLst/>
+          </a:prstGeom>
+          <a:noFill/>
+        </p:spPr>
+        <p:txBody>
+          <a:bodyPr wrap="none">
+            <a:spAutoFit/>
+          </a:bodyPr>
+          <a:lstStyle/>
+          <a:p>
+            <a:pPr algn="l"/>
+            <a:r>
+              <a:rPr sz="750">
+                <a:solidFill>
+                  <a:srgbClr val="78808C"/>
+                </a:solidFill>
+                <a:latin typeface="Consolas"/>
+              </a:rPr>
+              <a:t>M23  ·  INHALT</a:t>
+            </a:r>
+          </a:p>
+        </p:txBody>
+      </p:sp>
+      <p:sp>
+        <p:nvSpPr>
+          <p:cNvPr id="5" name="Rectangle 4"/>
+          <p:cNvSpPr/>
+          <p:nvPr/>
+        </p:nvSpPr>
+        <p:spPr>
+          <a:xfrm>
+            <a:off x="0" y="1234440"/>
+            <a:ext cx="12188952" cy="12700"/>
+          </a:xfrm>
+          <a:prstGeom prst="rect">
+            <a:avLst/>
+          </a:prstGeom>
+          <a:solidFill>
+            <a:srgbClr val="D8DFE4"/>
+          </a:solidFill>
+          <a:ln>
+            <a:noFill/>
+          </a:ln>
+        </p:spPr>
+        <p:style>
+          <a:lnRef idx="1">
+            <a:schemeClr val="accent1"/>
+          </a:lnRef>
+          <a:fillRef idx="3">
+            <a:schemeClr val="accent1"/>
+          </a:fillRef>
+          <a:effectRef idx="2">
+            <a:schemeClr val="accent1"/>
+          </a:effectRef>
+          <a:fontRef idx="minor">
+            <a:schemeClr val="lt1"/>
+          </a:fontRef>
+        </p:style>
+        <p:txBody>
+          <a:bodyPr rtlCol="0" anchor="ctr"/>
+          <a:lstStyle/>
+          <a:p>
+            <a:pPr algn="ctr"/>
+          </a:p>
+        </p:txBody>
+      </p:sp>
+      <p:sp>
+        <p:nvSpPr>
+          <p:cNvPr id="6" name="Rectangle 5"/>
+          <p:cNvSpPr/>
+          <p:nvPr/>
+        </p:nvSpPr>
+        <p:spPr>
+          <a:xfrm>
+            <a:off x="685800" y="502920"/>
+            <a:ext cx="36576" cy="658368"/>
+          </a:xfrm>
+          <a:prstGeom prst="rect">
+            <a:avLst/>
+          </a:prstGeom>
+          <a:solidFill>
+            <a:srgbClr val="D9C089"/>
+          </a:solidFill>
+          <a:ln>
+            <a:noFill/>
+          </a:ln>
+        </p:spPr>
+        <p:style>
+          <a:lnRef idx="1">
+            <a:schemeClr val="accent1"/>
+          </a:lnRef>
+          <a:fillRef idx="3">
+            <a:schemeClr val="accent1"/>
+          </a:fillRef>
+          <a:effectRef idx="2">
+            <a:schemeClr val="accent1"/>
+          </a:effectRef>
+          <a:fontRef idx="minor">
+            <a:schemeClr val="lt1"/>
+          </a:fontRef>
+        </p:style>
+        <p:txBody>
+          <a:bodyPr rtlCol="0" anchor="ctr"/>
+          <a:lstStyle/>
+          <a:p>
+            <a:pPr algn="ctr"/>
+          </a:p>
+        </p:txBody>
+      </p:sp>
+      <p:sp>
+        <p:nvSpPr>
+          <p:cNvPr id="7" name="TextBox 6"/>
+          <p:cNvSpPr txBox="1"/>
+          <p:nvPr/>
+        </p:nvSpPr>
+        <p:spPr>
+          <a:xfrm>
+            <a:off x="813816" y="502920"/>
+            <a:ext cx="10634472" cy="685800"/>
+          </a:xfrm>
+          <a:prstGeom prst="rect">
+            <a:avLst/>
+          </a:prstGeom>
+          <a:noFill/>
+        </p:spPr>
+        <p:txBody>
+          <a:bodyPr wrap="square">
+            <a:spAutoFit/>
+          </a:bodyPr>
+          <a:lstStyle/>
+          <a:p>
+            <a:pPr algn="l"/>
+            <a:r>
+              <a:rPr sz="2400" b="1" i="0">
+                <a:solidFill>
+                  <a:srgbClr val="1F2C56"/>
+                </a:solidFill>
+                <a:latin typeface="Arial"/>
+              </a:rPr>
+              <a:t>Drei-Szenarien-Stresstest</a:t>
+            </a:r>
+          </a:p>
+        </p:txBody>
+      </p:sp>
+      <p:sp>
+        <p:nvSpPr>
+          <p:cNvPr id="8" name="TextBox 7"/>
+          <p:cNvSpPr txBox="1"/>
+          <p:nvPr/>
+        </p:nvSpPr>
+        <p:spPr>
+          <a:xfrm>
+            <a:off x="685800" y="1417320"/>
+            <a:ext cx="10817352" cy="4892040"/>
+          </a:xfrm>
+          <a:prstGeom prst="rect">
+            <a:avLst/>
+          </a:prstGeom>
+          <a:noFill/>
+        </p:spPr>
+        <p:txBody>
+          <a:bodyPr wrap="square" anchor="ctr">
+            <a:spAutoFit/>
+          </a:bodyPr>
+          <a:lstStyle/>
+          <a:p>
+            <a:pPr marL="177800" indent="-177800">
+              <a:spcBef>
+                <a:spcPts val="600"/>
+              </a:spcBef>
+              <a:spcAft>
+                <a:spcPts val="200"/>
+              </a:spcAft>
+            </a:pPr>
+            <a:r>
+              <a:rPr sz="1200" i="1">
+                <a:solidFill>
+                  <a:srgbClr val="3D5466"/>
+                </a:solidFill>
+                <a:latin typeface="Arial"/>
+              </a:rPr>
+              <a:t>→  Ein Plan überzeugt erst, wenn er den Downside überlebt – der Stresstest zeigt, wo es kippt.</a:t>
+            </a:r>
+          </a:p>
+          <a:p>
+            <a:pPr marL="190500" indent="-190500">
+              <a:spcBef>
+                <a:spcPts val="400"/>
+              </a:spcBef>
+              <a:spcAft>
+                <a:spcPts val="200"/>
+              </a:spcAft>
+            </a:pPr>
+            <a:r>
+              <a:rPr sz="1300">
+                <a:solidFill>
+                  <a:srgbClr val="3D5466"/>
+                </a:solidFill>
+                <a:latin typeface="Arial"/>
+              </a:rPr>
+              <a:t>▸  Base, Upside, Downside als drei Szenarien im Modell durchrechnen.</a:t>
+            </a:r>
+          </a:p>
+          <a:p>
+            <a:pPr marL="190500" indent="-190500">
+              <a:spcBef>
+                <a:spcPts val="400"/>
+              </a:spcBef>
+              <a:spcAft>
+                <a:spcPts val="200"/>
+              </a:spcAft>
+            </a:pPr>
+            <a:r>
+              <a:rPr sz="1300">
+                <a:solidFill>
+                  <a:srgbClr val="3D5466"/>
+                </a:solidFill>
+                <a:latin typeface="Arial"/>
+              </a:rPr>
+              <a:t>▸  Den Covenant-Bruchpunkt bestimmen: ab welcher Verschlechterung reißt eine Auflage?</a:t>
+            </a:r>
+          </a:p>
+        </p:txBody>
+      </p:sp>
+      <p:sp>
+        <p:nvSpPr>
+          <p:cNvPr id="9" name="Rectangle 8"/>
+          <p:cNvSpPr/>
+          <p:nvPr/>
+        </p:nvSpPr>
+        <p:spPr>
+          <a:xfrm>
+            <a:off x="0" y="6510528"/>
+            <a:ext cx="12188952" cy="347472"/>
+          </a:xfrm>
+          <a:prstGeom prst="rect">
+            <a:avLst/>
+          </a:prstGeom>
+          <a:solidFill>
+            <a:srgbClr val="0A1937"/>
+          </a:solidFill>
+          <a:ln>
+            <a:noFill/>
+          </a:ln>
+        </p:spPr>
+        <p:style>
+          <a:lnRef idx="1">
+            <a:schemeClr val="accent1"/>
+          </a:lnRef>
+          <a:fillRef idx="3">
+            <a:schemeClr val="accent1"/>
+          </a:fillRef>
+          <a:effectRef idx="2">
+            <a:schemeClr val="accent1"/>
+          </a:effectRef>
+          <a:fontRef idx="minor">
+            <a:schemeClr val="lt1"/>
+          </a:fontRef>
+        </p:style>
+        <p:txBody>
+          <a:bodyPr rtlCol="0" anchor="ctr"/>
+          <a:lstStyle/>
+          <a:p>
+            <a:pPr algn="ctr"/>
+          </a:p>
+        </p:txBody>
+      </p:sp>
+      <p:sp>
+        <p:nvSpPr>
+          <p:cNvPr id="10" name="TextBox 9"/>
+          <p:cNvSpPr txBox="1"/>
+          <p:nvPr/>
+        </p:nvSpPr>
+        <p:spPr>
+          <a:xfrm>
+            <a:off x="685800" y="6583680"/>
+            <a:ext cx="6490411" cy="256032"/>
+          </a:xfrm>
+          <a:prstGeom prst="rect">
+            <a:avLst/>
+          </a:prstGeom>
+          <a:noFill/>
+        </p:spPr>
+        <p:txBody>
+          <a:bodyPr wrap="none">
+            <a:spAutoFit/>
+          </a:bodyPr>
+          <a:lstStyle/>
+          <a:p>
+            <a:pPr algn="l"/>
+            <a:r>
+              <a:rPr sz="700">
+                <a:solidFill>
+                  <a:srgbClr val="A0B4D2"/>
+                </a:solidFill>
+                <a:latin typeface="Consolas"/>
+              </a:rPr>
+              <a:t>FKB Campus  ·  M23</a:t>
+            </a:r>
+          </a:p>
+        </p:txBody>
+      </p:sp>
+    </p:spTree>
+  </p:cSld>
+  <p:clrMapOvr>
+    <a:masterClrMapping/>
+  </p:clrMapOvr>
+</p:sld>
+</file>
+
 <file path=ppt/slides/slide2.xml><?xml version="1.0" encoding="utf-8"?>
 <p:sld xmlns:a="http://schemas.openxmlformats.org/drawingml/2006/main" xmlns:p="http://schemas.openxmlformats.org/presentationml/2006/main" xmlns:r="http://schemas.openxmlformats.org/officeDocument/2006/relationships">
   <p:cSld>
@@ -4627,6 +9541,2831 @@
       <p:sp>
         <p:nvSpPr>
           <p:cNvPr id="9" name="TextBox 8"/>
+          <p:cNvSpPr txBox="1"/>
+          <p:nvPr/>
+        </p:nvSpPr>
+        <p:spPr>
+          <a:xfrm>
+            <a:off x="685800" y="6583680"/>
+            <a:ext cx="6490411" cy="256032"/>
+          </a:xfrm>
+          <a:prstGeom prst="rect">
+            <a:avLst/>
+          </a:prstGeom>
+          <a:noFill/>
+        </p:spPr>
+        <p:txBody>
+          <a:bodyPr wrap="none">
+            <a:spAutoFit/>
+          </a:bodyPr>
+          <a:lstStyle/>
+          <a:p>
+            <a:pPr algn="l"/>
+            <a:r>
+              <a:rPr sz="700">
+                <a:solidFill>
+                  <a:srgbClr val="A0B4D2"/>
+                </a:solidFill>
+                <a:latin typeface="Consolas"/>
+              </a:rPr>
+              <a:t>FKB Campus  ·  M23</a:t>
+            </a:r>
+          </a:p>
+        </p:txBody>
+      </p:sp>
+    </p:spTree>
+  </p:cSld>
+  <p:clrMapOvr>
+    <a:masterClrMapping/>
+  </p:clrMapOvr>
+</p:sld>
+</file>
+
+<file path=ppt/slides/slide20.xml><?xml version="1.0" encoding="utf-8"?>
+<p:sld xmlns:a="http://schemas.openxmlformats.org/drawingml/2006/main" xmlns:p="http://schemas.openxmlformats.org/presentationml/2006/main" xmlns:r="http://schemas.openxmlformats.org/officeDocument/2006/relationships">
+  <p:cSld>
+    <p:spTree>
+      <p:nvGrpSpPr>
+        <p:cNvPr id="1" name=""/>
+        <p:cNvGrpSpPr/>
+        <p:nvPr/>
+      </p:nvGrpSpPr>
+      <p:grpSpPr/>
+      <p:sp>
+        <p:nvSpPr>
+          <p:cNvPr id="2" name="Rectangle 1"/>
+          <p:cNvSpPr/>
+          <p:nvPr/>
+        </p:nvSpPr>
+        <p:spPr>
+          <a:xfrm>
+            <a:off x="0" y="0"/>
+            <a:ext cx="12188952" cy="6858000"/>
+          </a:xfrm>
+          <a:prstGeom prst="rect">
+            <a:avLst/>
+          </a:prstGeom>
+          <a:solidFill>
+            <a:srgbClr val="EDEDF3"/>
+          </a:solidFill>
+          <a:ln>
+            <a:noFill/>
+          </a:ln>
+        </p:spPr>
+        <p:style>
+          <a:lnRef idx="1">
+            <a:schemeClr val="accent1"/>
+          </a:lnRef>
+          <a:fillRef idx="3">
+            <a:schemeClr val="accent1"/>
+          </a:fillRef>
+          <a:effectRef idx="2">
+            <a:schemeClr val="accent1"/>
+          </a:effectRef>
+          <a:fontRef idx="minor">
+            <a:schemeClr val="lt1"/>
+          </a:fontRef>
+        </p:style>
+        <p:txBody>
+          <a:bodyPr rtlCol="0" anchor="ctr"/>
+          <a:lstStyle/>
+          <a:p>
+            <a:pPr algn="ctr"/>
+          </a:p>
+        </p:txBody>
+      </p:sp>
+      <p:sp>
+        <p:nvSpPr>
+          <p:cNvPr id="3" name="Rectangle 2"/>
+          <p:cNvSpPr/>
+          <p:nvPr/>
+        </p:nvSpPr>
+        <p:spPr>
+          <a:xfrm>
+            <a:off x="0" y="0"/>
+            <a:ext cx="12188952" cy="50292"/>
+          </a:xfrm>
+          <a:prstGeom prst="rect">
+            <a:avLst/>
+          </a:prstGeom>
+          <a:solidFill>
+            <a:srgbClr val="1F2C56"/>
+          </a:solidFill>
+          <a:ln>
+            <a:noFill/>
+          </a:ln>
+        </p:spPr>
+        <p:style>
+          <a:lnRef idx="1">
+            <a:schemeClr val="accent1"/>
+          </a:lnRef>
+          <a:fillRef idx="3">
+            <a:schemeClr val="accent1"/>
+          </a:fillRef>
+          <a:effectRef idx="2">
+            <a:schemeClr val="accent1"/>
+          </a:effectRef>
+          <a:fontRef idx="minor">
+            <a:schemeClr val="lt1"/>
+          </a:fontRef>
+        </p:style>
+        <p:txBody>
+          <a:bodyPr rtlCol="0" anchor="ctr"/>
+          <a:lstStyle/>
+          <a:p>
+            <a:pPr algn="ctr"/>
+          </a:p>
+        </p:txBody>
+      </p:sp>
+      <p:sp>
+        <p:nvSpPr>
+          <p:cNvPr id="4" name="TextBox 3"/>
+          <p:cNvSpPr txBox="1"/>
+          <p:nvPr/>
+        </p:nvSpPr>
+        <p:spPr>
+          <a:xfrm>
+            <a:off x="685800" y="109728"/>
+            <a:ext cx="10817352" cy="228600"/>
+          </a:xfrm>
+          <a:prstGeom prst="rect">
+            <a:avLst/>
+          </a:prstGeom>
+          <a:noFill/>
+        </p:spPr>
+        <p:txBody>
+          <a:bodyPr wrap="none">
+            <a:spAutoFit/>
+          </a:bodyPr>
+          <a:lstStyle/>
+          <a:p>
+            <a:pPr algn="l"/>
+            <a:r>
+              <a:rPr sz="750">
+                <a:solidFill>
+                  <a:srgbClr val="78808C"/>
+                </a:solidFill>
+                <a:latin typeface="Consolas"/>
+              </a:rPr>
+              <a:t>M23  ·  ARBEITSBLATT</a:t>
+            </a:r>
+          </a:p>
+        </p:txBody>
+      </p:sp>
+      <p:sp>
+        <p:nvSpPr>
+          <p:cNvPr id="5" name="Rectangle 4"/>
+          <p:cNvSpPr/>
+          <p:nvPr/>
+        </p:nvSpPr>
+        <p:spPr>
+          <a:xfrm>
+            <a:off x="0" y="1234440"/>
+            <a:ext cx="12188952" cy="12700"/>
+          </a:xfrm>
+          <a:prstGeom prst="rect">
+            <a:avLst/>
+          </a:prstGeom>
+          <a:solidFill>
+            <a:srgbClr val="D8DFE4"/>
+          </a:solidFill>
+          <a:ln>
+            <a:noFill/>
+          </a:ln>
+        </p:spPr>
+        <p:style>
+          <a:lnRef idx="1">
+            <a:schemeClr val="accent1"/>
+          </a:lnRef>
+          <a:fillRef idx="3">
+            <a:schemeClr val="accent1"/>
+          </a:fillRef>
+          <a:effectRef idx="2">
+            <a:schemeClr val="accent1"/>
+          </a:effectRef>
+          <a:fontRef idx="minor">
+            <a:schemeClr val="lt1"/>
+          </a:fontRef>
+        </p:style>
+        <p:txBody>
+          <a:bodyPr rtlCol="0" anchor="ctr"/>
+          <a:lstStyle/>
+          <a:p>
+            <a:pPr algn="ctr"/>
+          </a:p>
+        </p:txBody>
+      </p:sp>
+      <p:sp>
+        <p:nvSpPr>
+          <p:cNvPr id="6" name="Rectangle 5"/>
+          <p:cNvSpPr/>
+          <p:nvPr/>
+        </p:nvSpPr>
+        <p:spPr>
+          <a:xfrm>
+            <a:off x="685800" y="502920"/>
+            <a:ext cx="36576" cy="658368"/>
+          </a:xfrm>
+          <a:prstGeom prst="rect">
+            <a:avLst/>
+          </a:prstGeom>
+          <a:solidFill>
+            <a:srgbClr val="D9C089"/>
+          </a:solidFill>
+          <a:ln>
+            <a:noFill/>
+          </a:ln>
+        </p:spPr>
+        <p:style>
+          <a:lnRef idx="1">
+            <a:schemeClr val="accent1"/>
+          </a:lnRef>
+          <a:fillRef idx="3">
+            <a:schemeClr val="accent1"/>
+          </a:fillRef>
+          <a:effectRef idx="2">
+            <a:schemeClr val="accent1"/>
+          </a:effectRef>
+          <a:fontRef idx="minor">
+            <a:schemeClr val="lt1"/>
+          </a:fontRef>
+        </p:style>
+        <p:txBody>
+          <a:bodyPr rtlCol="0" anchor="ctr"/>
+          <a:lstStyle/>
+          <a:p>
+            <a:pPr algn="ctr"/>
+          </a:p>
+        </p:txBody>
+      </p:sp>
+      <p:sp>
+        <p:nvSpPr>
+          <p:cNvPr id="7" name="TextBox 6"/>
+          <p:cNvSpPr txBox="1"/>
+          <p:nvPr/>
+        </p:nvSpPr>
+        <p:spPr>
+          <a:xfrm>
+            <a:off x="813816" y="502920"/>
+            <a:ext cx="10634472" cy="685800"/>
+          </a:xfrm>
+          <a:prstGeom prst="rect">
+            <a:avLst/>
+          </a:prstGeom>
+          <a:noFill/>
+        </p:spPr>
+        <p:txBody>
+          <a:bodyPr wrap="square">
+            <a:spAutoFit/>
+          </a:bodyPr>
+          <a:lstStyle/>
+          <a:p>
+            <a:pPr algn="l"/>
+            <a:r>
+              <a:rPr sz="2400" b="1" i="0">
+                <a:solidFill>
+                  <a:srgbClr val="1F2C56"/>
+                </a:solidFill>
+                <a:latin typeface="Arial"/>
+              </a:rPr>
+              <a:t>Stresstest bearbeiten</a:t>
+            </a:r>
+          </a:p>
+        </p:txBody>
+      </p:sp>
+      <p:sp>
+        <p:nvSpPr>
+          <p:cNvPr id="8" name="TextBox 7"/>
+          <p:cNvSpPr txBox="1"/>
+          <p:nvPr/>
+        </p:nvSpPr>
+        <p:spPr>
+          <a:xfrm>
+            <a:off x="685800" y="1554480"/>
+            <a:ext cx="10817352" cy="3840480"/>
+          </a:xfrm>
+          <a:prstGeom prst="rect">
+            <a:avLst/>
+          </a:prstGeom>
+          <a:noFill/>
+        </p:spPr>
+        <p:txBody>
+          <a:bodyPr wrap="square">
+            <a:spAutoFit/>
+          </a:bodyPr>
+          <a:lstStyle/>
+          <a:p>
+            <a:pPr marL="190500" indent="-190500">
+              <a:spcBef>
+                <a:spcPts val="400"/>
+              </a:spcBef>
+              <a:spcAft>
+                <a:spcPts val="200"/>
+              </a:spcAft>
+            </a:pPr>
+            <a:r>
+              <a:rPr sz="1400">
+                <a:solidFill>
+                  <a:srgbClr val="3D5466"/>
+                </a:solidFill>
+                <a:latin typeface="Arial"/>
+              </a:rPr>
+              <a:t>▸  Rechnen Sie Base, Upside und Downside im Modell durch (AB-5).</a:t>
+            </a:r>
+          </a:p>
+          <a:p>
+            <a:pPr marL="190500" indent="-190500">
+              <a:spcBef>
+                <a:spcPts val="400"/>
+              </a:spcBef>
+              <a:spcAft>
+                <a:spcPts val="200"/>
+              </a:spcAft>
+            </a:pPr>
+            <a:r>
+              <a:rPr sz="1400">
+                <a:solidFill>
+                  <a:srgbClr val="3D5466"/>
+                </a:solidFill>
+                <a:latin typeface="Arial"/>
+              </a:rPr>
+              <a:t>▸  Bestimmen Sie den Covenant-Bruchpunkt im Downside.</a:t>
+            </a:r>
+          </a:p>
+          <a:p>
+            <a:pPr marL="190500" indent="-190500">
+              <a:spcBef>
+                <a:spcPts val="400"/>
+              </a:spcBef>
+              <a:spcAft>
+                <a:spcPts val="200"/>
+              </a:spcAft>
+            </a:pPr>
+            <a:r>
+              <a:rPr sz="1400">
+                <a:solidFill>
+                  <a:srgbClr val="3D5466"/>
+                </a:solidFill>
+                <a:latin typeface="Arial"/>
+              </a:rPr>
+              <a:t>▸  Leiten Sie ab, welche Puffer die Finanzierung braucht.</a:t>
+            </a:r>
+          </a:p>
+        </p:txBody>
+      </p:sp>
+      <p:sp>
+        <p:nvSpPr>
+          <p:cNvPr id="9" name="Rectangle 8"/>
+          <p:cNvSpPr/>
+          <p:nvPr/>
+        </p:nvSpPr>
+        <p:spPr>
+          <a:xfrm>
+            <a:off x="685800" y="5486400"/>
+            <a:ext cx="10817352" cy="640080"/>
+          </a:xfrm>
+          <a:prstGeom prst="rect">
+            <a:avLst/>
+          </a:prstGeom>
+          <a:solidFill>
+            <a:srgbClr val="1F2C56"/>
+          </a:solidFill>
+          <a:ln>
+            <a:noFill/>
+          </a:ln>
+        </p:spPr>
+        <p:style>
+          <a:lnRef idx="1">
+            <a:schemeClr val="accent1"/>
+          </a:lnRef>
+          <a:fillRef idx="3">
+            <a:schemeClr val="accent1"/>
+          </a:fillRef>
+          <a:effectRef idx="2">
+            <a:schemeClr val="accent1"/>
+          </a:effectRef>
+          <a:fontRef idx="minor">
+            <a:schemeClr val="lt1"/>
+          </a:fontRef>
+        </p:style>
+        <p:txBody>
+          <a:bodyPr rtlCol="0" anchor="ctr"/>
+          <a:lstStyle/>
+          <a:p>
+            <a:pPr algn="ctr"/>
+          </a:p>
+        </p:txBody>
+      </p:sp>
+      <p:sp>
+        <p:nvSpPr>
+          <p:cNvPr id="10" name="TextBox 9"/>
+          <p:cNvSpPr txBox="1"/>
+          <p:nvPr/>
+        </p:nvSpPr>
+        <p:spPr>
+          <a:xfrm>
+            <a:off x="868680" y="5596128"/>
+            <a:ext cx="10451592" cy="457200"/>
+          </a:xfrm>
+          <a:prstGeom prst="rect">
+            <a:avLst/>
+          </a:prstGeom>
+          <a:noFill/>
+        </p:spPr>
+        <p:txBody>
+          <a:bodyPr wrap="square">
+            <a:spAutoFit/>
+          </a:bodyPr>
+          <a:lstStyle/>
+          <a:p>
+            <a:pPr algn="l"/>
+            <a:r>
+              <a:rPr sz="1300" b="1" i="0">
+                <a:solidFill>
+                  <a:srgbClr val="FFFFFF"/>
+                </a:solidFill>
+                <a:latin typeface="Arial"/>
+              </a:rPr>
+              <a:t>→  Bearbeitung im Teilnehmer-Workbook (Arbeitsblatt mit Ausfüllfeldern)</a:t>
+            </a:r>
+          </a:p>
+        </p:txBody>
+      </p:sp>
+      <p:sp>
+        <p:nvSpPr>
+          <p:cNvPr id="11" name="Rectangle 10"/>
+          <p:cNvSpPr/>
+          <p:nvPr/>
+        </p:nvSpPr>
+        <p:spPr>
+          <a:xfrm>
+            <a:off x="0" y="6510528"/>
+            <a:ext cx="12188952" cy="347472"/>
+          </a:xfrm>
+          <a:prstGeom prst="rect">
+            <a:avLst/>
+          </a:prstGeom>
+          <a:solidFill>
+            <a:srgbClr val="0A1937"/>
+          </a:solidFill>
+          <a:ln>
+            <a:noFill/>
+          </a:ln>
+        </p:spPr>
+        <p:style>
+          <a:lnRef idx="1">
+            <a:schemeClr val="accent1"/>
+          </a:lnRef>
+          <a:fillRef idx="3">
+            <a:schemeClr val="accent1"/>
+          </a:fillRef>
+          <a:effectRef idx="2">
+            <a:schemeClr val="accent1"/>
+          </a:effectRef>
+          <a:fontRef idx="minor">
+            <a:schemeClr val="lt1"/>
+          </a:fontRef>
+        </p:style>
+        <p:txBody>
+          <a:bodyPr rtlCol="0" anchor="ctr"/>
+          <a:lstStyle/>
+          <a:p>
+            <a:pPr algn="ctr"/>
+          </a:p>
+        </p:txBody>
+      </p:sp>
+      <p:sp>
+        <p:nvSpPr>
+          <p:cNvPr id="12" name="TextBox 11"/>
+          <p:cNvSpPr txBox="1"/>
+          <p:nvPr/>
+        </p:nvSpPr>
+        <p:spPr>
+          <a:xfrm>
+            <a:off x="685800" y="6583680"/>
+            <a:ext cx="6490411" cy="256032"/>
+          </a:xfrm>
+          <a:prstGeom prst="rect">
+            <a:avLst/>
+          </a:prstGeom>
+          <a:noFill/>
+        </p:spPr>
+        <p:txBody>
+          <a:bodyPr wrap="none">
+            <a:spAutoFit/>
+          </a:bodyPr>
+          <a:lstStyle/>
+          <a:p>
+            <a:pPr algn="l"/>
+            <a:r>
+              <a:rPr sz="700">
+                <a:solidFill>
+                  <a:srgbClr val="A0B4D2"/>
+                </a:solidFill>
+                <a:latin typeface="Consolas"/>
+              </a:rPr>
+              <a:t>FKB Campus  ·  M23</a:t>
+            </a:r>
+          </a:p>
+        </p:txBody>
+      </p:sp>
+    </p:spTree>
+  </p:cSld>
+  <p:clrMapOvr>
+    <a:masterClrMapping/>
+  </p:clrMapOvr>
+</p:sld>
+</file>
+
+<file path=ppt/slides/slide21.xml><?xml version="1.0" encoding="utf-8"?>
+<p:sld xmlns:a="http://schemas.openxmlformats.org/drawingml/2006/main" xmlns:p="http://schemas.openxmlformats.org/presentationml/2006/main" xmlns:r="http://schemas.openxmlformats.org/officeDocument/2006/relationships">
+  <p:cSld>
+    <p:spTree>
+      <p:nvGrpSpPr>
+        <p:cNvPr id="1" name=""/>
+        <p:cNvGrpSpPr/>
+        <p:nvPr/>
+      </p:nvGrpSpPr>
+      <p:grpSpPr/>
+      <p:sp>
+        <p:nvSpPr>
+          <p:cNvPr id="2" name="Rectangle 1"/>
+          <p:cNvSpPr/>
+          <p:nvPr/>
+        </p:nvSpPr>
+        <p:spPr>
+          <a:xfrm>
+            <a:off x="0" y="0"/>
+            <a:ext cx="12188952" cy="6858000"/>
+          </a:xfrm>
+          <a:prstGeom prst="rect">
+            <a:avLst/>
+          </a:prstGeom>
+          <a:solidFill>
+            <a:srgbClr val="1F2C56"/>
+          </a:solidFill>
+          <a:ln>
+            <a:noFill/>
+          </a:ln>
+        </p:spPr>
+        <p:style>
+          <a:lnRef idx="1">
+            <a:schemeClr val="accent1"/>
+          </a:lnRef>
+          <a:fillRef idx="3">
+            <a:schemeClr val="accent1"/>
+          </a:fillRef>
+          <a:effectRef idx="2">
+            <a:schemeClr val="accent1"/>
+          </a:effectRef>
+          <a:fontRef idx="minor">
+            <a:schemeClr val="lt1"/>
+          </a:fontRef>
+        </p:style>
+        <p:txBody>
+          <a:bodyPr rtlCol="0" anchor="ctr"/>
+          <a:lstStyle/>
+          <a:p>
+            <a:pPr algn="ctr"/>
+          </a:p>
+        </p:txBody>
+      </p:sp>
+      <p:sp>
+        <p:nvSpPr>
+          <p:cNvPr id="3" name="TextBox 2"/>
+          <p:cNvSpPr txBox="1"/>
+          <p:nvPr/>
+        </p:nvSpPr>
+        <p:spPr>
+          <a:xfrm>
+            <a:off x="685800" y="2377440"/>
+            <a:ext cx="10817352" cy="365760"/>
+          </a:xfrm>
+          <a:prstGeom prst="rect">
+            <a:avLst/>
+          </a:prstGeom>
+          <a:noFill/>
+        </p:spPr>
+        <p:txBody>
+          <a:bodyPr wrap="none">
+            <a:spAutoFit/>
+          </a:bodyPr>
+          <a:lstStyle/>
+          <a:p>
+            <a:pPr algn="l"/>
+            <a:r>
+              <a:rPr sz="1200">
+                <a:solidFill>
+                  <a:srgbClr val="D9C089"/>
+                </a:solidFill>
+                <a:latin typeface="Consolas"/>
+              </a:rPr>
+              <a:t>15:45–17:00</a:t>
+            </a:r>
+          </a:p>
+        </p:txBody>
+      </p:sp>
+      <p:sp>
+        <p:nvSpPr>
+          <p:cNvPr id="4" name="Rectangle 3"/>
+          <p:cNvSpPr/>
+          <p:nvPr/>
+        </p:nvSpPr>
+        <p:spPr>
+          <a:xfrm>
+            <a:off x="685800" y="2788920"/>
+            <a:ext cx="548640" cy="38100"/>
+          </a:xfrm>
+          <a:prstGeom prst="rect">
+            <a:avLst/>
+          </a:prstGeom>
+          <a:solidFill>
+            <a:srgbClr val="D9C089"/>
+          </a:solidFill>
+          <a:ln>
+            <a:noFill/>
+          </a:ln>
+        </p:spPr>
+        <p:style>
+          <a:lnRef idx="1">
+            <a:schemeClr val="accent1"/>
+          </a:lnRef>
+          <a:fillRef idx="3">
+            <a:schemeClr val="accent1"/>
+          </a:fillRef>
+          <a:effectRef idx="2">
+            <a:schemeClr val="accent1"/>
+          </a:effectRef>
+          <a:fontRef idx="minor">
+            <a:schemeClr val="lt1"/>
+          </a:fontRef>
+        </p:style>
+        <p:txBody>
+          <a:bodyPr rtlCol="0" anchor="ctr"/>
+          <a:lstStyle/>
+          <a:p>
+            <a:pPr algn="ctr"/>
+          </a:p>
+        </p:txBody>
+      </p:sp>
+      <p:sp>
+        <p:nvSpPr>
+          <p:cNvPr id="5" name="TextBox 4"/>
+          <p:cNvSpPr txBox="1"/>
+          <p:nvPr/>
+        </p:nvSpPr>
+        <p:spPr>
+          <a:xfrm>
+            <a:off x="685800" y="3017520"/>
+            <a:ext cx="10817352" cy="1463040"/>
+          </a:xfrm>
+          <a:prstGeom prst="rect">
+            <a:avLst/>
+          </a:prstGeom>
+          <a:noFill/>
+        </p:spPr>
+        <p:txBody>
+          <a:bodyPr wrap="square">
+            <a:spAutoFit/>
+          </a:bodyPr>
+          <a:lstStyle/>
+          <a:p>
+            <a:pPr algn="l"/>
+            <a:r>
+              <a:rPr sz="4000" b="1" i="0">
+                <a:solidFill>
+                  <a:srgbClr val="FFFFFF"/>
+                </a:solidFill>
+                <a:latin typeface="Arial"/>
+              </a:rPr>
+              <a:t>Übung 5: Ergebnis erklären</a:t>
+            </a:r>
+          </a:p>
+        </p:txBody>
+      </p:sp>
+      <p:sp>
+        <p:nvSpPr>
+          <p:cNvPr id="6" name="TextBox 5"/>
+          <p:cNvSpPr txBox="1"/>
+          <p:nvPr/>
+        </p:nvSpPr>
+        <p:spPr>
+          <a:xfrm>
+            <a:off x="685800" y="4480560"/>
+            <a:ext cx="8653881" cy="1280160"/>
+          </a:xfrm>
+          <a:prstGeom prst="rect">
+            <a:avLst/>
+          </a:prstGeom>
+          <a:noFill/>
+        </p:spPr>
+        <p:txBody>
+          <a:bodyPr wrap="square">
+            <a:spAutoFit/>
+          </a:bodyPr>
+          <a:lstStyle/>
+          <a:p>
+            <a:pPr algn="l"/>
+            <a:r>
+              <a:rPr sz="1600" b="0" i="0">
+                <a:solidFill>
+                  <a:srgbClr val="C8D2E6"/>
+                </a:solidFill>
+                <a:latin typeface="Arial"/>
+              </a:rPr>
+              <a:t>Das Modell dem Unternehmer erklären und eine Finanzierungsempfehlung formulieren.</a:t>
+            </a:r>
+          </a:p>
+        </p:txBody>
+      </p:sp>
+      <p:sp>
+        <p:nvSpPr>
+          <p:cNvPr id="7" name="TextBox 6"/>
+          <p:cNvSpPr txBox="1"/>
+          <p:nvPr/>
+        </p:nvSpPr>
+        <p:spPr>
+          <a:xfrm>
+            <a:off x="685800" y="6355080"/>
+            <a:ext cx="10817352" cy="274320"/>
+          </a:xfrm>
+          <a:prstGeom prst="rect">
+            <a:avLst/>
+          </a:prstGeom>
+          <a:noFill/>
+        </p:spPr>
+        <p:txBody>
+          <a:bodyPr wrap="none">
+            <a:spAutoFit/>
+          </a:bodyPr>
+          <a:lstStyle/>
+          <a:p>
+            <a:pPr algn="l"/>
+            <a:r>
+              <a:rPr sz="700">
+                <a:solidFill>
+                  <a:srgbClr val="8CA0C3"/>
+                </a:solidFill>
+                <a:latin typeface="Consolas"/>
+              </a:rPr>
+              <a:t>FKB Campus  ·  M23</a:t>
+            </a:r>
+          </a:p>
+        </p:txBody>
+      </p:sp>
+    </p:spTree>
+  </p:cSld>
+  <p:clrMapOvr>
+    <a:masterClrMapping/>
+  </p:clrMapOvr>
+</p:sld>
+</file>
+
+<file path=ppt/slides/slide22.xml><?xml version="1.0" encoding="utf-8"?>
+<p:sld xmlns:a="http://schemas.openxmlformats.org/drawingml/2006/main" xmlns:p="http://schemas.openxmlformats.org/presentationml/2006/main" xmlns:r="http://schemas.openxmlformats.org/officeDocument/2006/relationships">
+  <p:cSld>
+    <p:spTree>
+      <p:nvGrpSpPr>
+        <p:cNvPr id="1" name=""/>
+        <p:cNvGrpSpPr/>
+        <p:nvPr/>
+      </p:nvGrpSpPr>
+      <p:grpSpPr/>
+      <p:sp>
+        <p:nvSpPr>
+          <p:cNvPr id="2" name="Rectangle 1"/>
+          <p:cNvSpPr/>
+          <p:nvPr/>
+        </p:nvSpPr>
+        <p:spPr>
+          <a:xfrm>
+            <a:off x="0" y="0"/>
+            <a:ext cx="12188952" cy="6858000"/>
+          </a:xfrm>
+          <a:prstGeom prst="rect">
+            <a:avLst/>
+          </a:prstGeom>
+          <a:solidFill>
+            <a:srgbClr val="EDEDF3"/>
+          </a:solidFill>
+          <a:ln>
+            <a:noFill/>
+          </a:ln>
+        </p:spPr>
+        <p:style>
+          <a:lnRef idx="1">
+            <a:schemeClr val="accent1"/>
+          </a:lnRef>
+          <a:fillRef idx="3">
+            <a:schemeClr val="accent1"/>
+          </a:fillRef>
+          <a:effectRef idx="2">
+            <a:schemeClr val="accent1"/>
+          </a:effectRef>
+          <a:fontRef idx="minor">
+            <a:schemeClr val="lt1"/>
+          </a:fontRef>
+        </p:style>
+        <p:txBody>
+          <a:bodyPr rtlCol="0" anchor="ctr"/>
+          <a:lstStyle/>
+          <a:p>
+            <a:pPr algn="ctr"/>
+          </a:p>
+        </p:txBody>
+      </p:sp>
+      <p:sp>
+        <p:nvSpPr>
+          <p:cNvPr id="3" name="Rectangle 2"/>
+          <p:cNvSpPr/>
+          <p:nvPr/>
+        </p:nvSpPr>
+        <p:spPr>
+          <a:xfrm>
+            <a:off x="0" y="0"/>
+            <a:ext cx="12188952" cy="50292"/>
+          </a:xfrm>
+          <a:prstGeom prst="rect">
+            <a:avLst/>
+          </a:prstGeom>
+          <a:solidFill>
+            <a:srgbClr val="1F2C56"/>
+          </a:solidFill>
+          <a:ln>
+            <a:noFill/>
+          </a:ln>
+        </p:spPr>
+        <p:style>
+          <a:lnRef idx="1">
+            <a:schemeClr val="accent1"/>
+          </a:lnRef>
+          <a:fillRef idx="3">
+            <a:schemeClr val="accent1"/>
+          </a:fillRef>
+          <a:effectRef idx="2">
+            <a:schemeClr val="accent1"/>
+          </a:effectRef>
+          <a:fontRef idx="minor">
+            <a:schemeClr val="lt1"/>
+          </a:fontRef>
+        </p:style>
+        <p:txBody>
+          <a:bodyPr rtlCol="0" anchor="ctr"/>
+          <a:lstStyle/>
+          <a:p>
+            <a:pPr algn="ctr"/>
+          </a:p>
+        </p:txBody>
+      </p:sp>
+      <p:sp>
+        <p:nvSpPr>
+          <p:cNvPr id="4" name="TextBox 3"/>
+          <p:cNvSpPr txBox="1"/>
+          <p:nvPr/>
+        </p:nvSpPr>
+        <p:spPr>
+          <a:xfrm>
+            <a:off x="685800" y="109728"/>
+            <a:ext cx="10817352" cy="228600"/>
+          </a:xfrm>
+          <a:prstGeom prst="rect">
+            <a:avLst/>
+          </a:prstGeom>
+          <a:noFill/>
+        </p:spPr>
+        <p:txBody>
+          <a:bodyPr wrap="none">
+            <a:spAutoFit/>
+          </a:bodyPr>
+          <a:lstStyle/>
+          <a:p>
+            <a:pPr algn="l"/>
+            <a:r>
+              <a:rPr sz="750">
+                <a:solidFill>
+                  <a:srgbClr val="78808C"/>
+                </a:solidFill>
+                <a:latin typeface="Consolas"/>
+              </a:rPr>
+              <a:t>M23  ·  INHALT</a:t>
+            </a:r>
+          </a:p>
+        </p:txBody>
+      </p:sp>
+      <p:sp>
+        <p:nvSpPr>
+          <p:cNvPr id="5" name="Rectangle 4"/>
+          <p:cNvSpPr/>
+          <p:nvPr/>
+        </p:nvSpPr>
+        <p:spPr>
+          <a:xfrm>
+            <a:off x="0" y="1234440"/>
+            <a:ext cx="12188952" cy="12700"/>
+          </a:xfrm>
+          <a:prstGeom prst="rect">
+            <a:avLst/>
+          </a:prstGeom>
+          <a:solidFill>
+            <a:srgbClr val="D8DFE4"/>
+          </a:solidFill>
+          <a:ln>
+            <a:noFill/>
+          </a:ln>
+        </p:spPr>
+        <p:style>
+          <a:lnRef idx="1">
+            <a:schemeClr val="accent1"/>
+          </a:lnRef>
+          <a:fillRef idx="3">
+            <a:schemeClr val="accent1"/>
+          </a:fillRef>
+          <a:effectRef idx="2">
+            <a:schemeClr val="accent1"/>
+          </a:effectRef>
+          <a:fontRef idx="minor">
+            <a:schemeClr val="lt1"/>
+          </a:fontRef>
+        </p:style>
+        <p:txBody>
+          <a:bodyPr rtlCol="0" anchor="ctr"/>
+          <a:lstStyle/>
+          <a:p>
+            <a:pPr algn="ctr"/>
+          </a:p>
+        </p:txBody>
+      </p:sp>
+      <p:sp>
+        <p:nvSpPr>
+          <p:cNvPr id="6" name="Rectangle 5"/>
+          <p:cNvSpPr/>
+          <p:nvPr/>
+        </p:nvSpPr>
+        <p:spPr>
+          <a:xfrm>
+            <a:off x="685800" y="502920"/>
+            <a:ext cx="36576" cy="658368"/>
+          </a:xfrm>
+          <a:prstGeom prst="rect">
+            <a:avLst/>
+          </a:prstGeom>
+          <a:solidFill>
+            <a:srgbClr val="D9C089"/>
+          </a:solidFill>
+          <a:ln>
+            <a:noFill/>
+          </a:ln>
+        </p:spPr>
+        <p:style>
+          <a:lnRef idx="1">
+            <a:schemeClr val="accent1"/>
+          </a:lnRef>
+          <a:fillRef idx="3">
+            <a:schemeClr val="accent1"/>
+          </a:fillRef>
+          <a:effectRef idx="2">
+            <a:schemeClr val="accent1"/>
+          </a:effectRef>
+          <a:fontRef idx="minor">
+            <a:schemeClr val="lt1"/>
+          </a:fontRef>
+        </p:style>
+        <p:txBody>
+          <a:bodyPr rtlCol="0" anchor="ctr"/>
+          <a:lstStyle/>
+          <a:p>
+            <a:pPr algn="ctr"/>
+          </a:p>
+        </p:txBody>
+      </p:sp>
+      <p:sp>
+        <p:nvSpPr>
+          <p:cNvPr id="7" name="TextBox 6"/>
+          <p:cNvSpPr txBox="1"/>
+          <p:nvPr/>
+        </p:nvSpPr>
+        <p:spPr>
+          <a:xfrm>
+            <a:off x="813816" y="502920"/>
+            <a:ext cx="10634472" cy="685800"/>
+          </a:xfrm>
+          <a:prstGeom prst="rect">
+            <a:avLst/>
+          </a:prstGeom>
+          <a:noFill/>
+        </p:spPr>
+        <p:txBody>
+          <a:bodyPr wrap="square">
+            <a:spAutoFit/>
+          </a:bodyPr>
+          <a:lstStyle/>
+          <a:p>
+            <a:pPr algn="l"/>
+            <a:r>
+              <a:rPr sz="2400" b="1" i="0">
+                <a:solidFill>
+                  <a:srgbClr val="1F2C56"/>
+                </a:solidFill>
+                <a:latin typeface="Arial"/>
+              </a:rPr>
+              <a:t>Vom Modell zur Finanzierungsempfehlung</a:t>
+            </a:r>
+          </a:p>
+        </p:txBody>
+      </p:sp>
+      <p:sp>
+        <p:nvSpPr>
+          <p:cNvPr id="8" name="TextBox 7"/>
+          <p:cNvSpPr txBox="1"/>
+          <p:nvPr/>
+        </p:nvSpPr>
+        <p:spPr>
+          <a:xfrm>
+            <a:off x="685800" y="1417320"/>
+            <a:ext cx="10817352" cy="4892040"/>
+          </a:xfrm>
+          <a:prstGeom prst="rect">
+            <a:avLst/>
+          </a:prstGeom>
+          <a:noFill/>
+        </p:spPr>
+        <p:txBody>
+          <a:bodyPr wrap="square" anchor="ctr">
+            <a:spAutoFit/>
+          </a:bodyPr>
+          <a:lstStyle/>
+          <a:p>
+            <a:pPr marL="177800" indent="-177800">
+              <a:spcBef>
+                <a:spcPts val="600"/>
+              </a:spcBef>
+              <a:spcAft>
+                <a:spcPts val="200"/>
+              </a:spcAft>
+            </a:pPr>
+            <a:r>
+              <a:rPr sz="1200" i="1">
+                <a:solidFill>
+                  <a:srgbClr val="3D5466"/>
+                </a:solidFill>
+                <a:latin typeface="Arial"/>
+              </a:rPr>
+              <a:t>→  Das beste Modell nützt nichts, wenn der Unternehmer es nicht versteht – die Empfehlung übersetzt Zahlen in Entscheidungen.</a:t>
+            </a:r>
+          </a:p>
+          <a:p>
+            <a:pPr marL="190500" indent="-190500">
+              <a:spcBef>
+                <a:spcPts val="400"/>
+              </a:spcBef>
+              <a:spcAft>
+                <a:spcPts val="200"/>
+              </a:spcAft>
+            </a:pPr>
+            <a:r>
+              <a:rPr sz="1300">
+                <a:solidFill>
+                  <a:srgbClr val="3D5466"/>
+                </a:solidFill>
+                <a:latin typeface="Arial"/>
+              </a:rPr>
+              <a:t>▸  Das Ergebnis in der Sprache des Unternehmers erklären, nicht in Modellsprache.</a:t>
+            </a:r>
+          </a:p>
+          <a:p>
+            <a:pPr marL="190500" indent="-190500">
+              <a:spcBef>
+                <a:spcPts val="400"/>
+              </a:spcBef>
+              <a:spcAft>
+                <a:spcPts val="200"/>
+              </a:spcAft>
+            </a:pPr>
+            <a:r>
+              <a:rPr sz="1300">
+                <a:solidFill>
+                  <a:srgbClr val="3D5466"/>
+                </a:solidFill>
+                <a:latin typeface="Arial"/>
+              </a:rPr>
+              <a:t>▸  Eine klare Finanzierungsempfehlung ableiten – inklusive Struktur und Puffer.</a:t>
+            </a:r>
+          </a:p>
+        </p:txBody>
+      </p:sp>
+      <p:sp>
+        <p:nvSpPr>
+          <p:cNvPr id="9" name="Rectangle 8"/>
+          <p:cNvSpPr/>
+          <p:nvPr/>
+        </p:nvSpPr>
+        <p:spPr>
+          <a:xfrm>
+            <a:off x="0" y="6510528"/>
+            <a:ext cx="12188952" cy="347472"/>
+          </a:xfrm>
+          <a:prstGeom prst="rect">
+            <a:avLst/>
+          </a:prstGeom>
+          <a:solidFill>
+            <a:srgbClr val="0A1937"/>
+          </a:solidFill>
+          <a:ln>
+            <a:noFill/>
+          </a:ln>
+        </p:spPr>
+        <p:style>
+          <a:lnRef idx="1">
+            <a:schemeClr val="accent1"/>
+          </a:lnRef>
+          <a:fillRef idx="3">
+            <a:schemeClr val="accent1"/>
+          </a:fillRef>
+          <a:effectRef idx="2">
+            <a:schemeClr val="accent1"/>
+          </a:effectRef>
+          <a:fontRef idx="minor">
+            <a:schemeClr val="lt1"/>
+          </a:fontRef>
+        </p:style>
+        <p:txBody>
+          <a:bodyPr rtlCol="0" anchor="ctr"/>
+          <a:lstStyle/>
+          <a:p>
+            <a:pPr algn="ctr"/>
+          </a:p>
+        </p:txBody>
+      </p:sp>
+      <p:sp>
+        <p:nvSpPr>
+          <p:cNvPr id="10" name="TextBox 9"/>
+          <p:cNvSpPr txBox="1"/>
+          <p:nvPr/>
+        </p:nvSpPr>
+        <p:spPr>
+          <a:xfrm>
+            <a:off x="685800" y="6583680"/>
+            <a:ext cx="6490411" cy="256032"/>
+          </a:xfrm>
+          <a:prstGeom prst="rect">
+            <a:avLst/>
+          </a:prstGeom>
+          <a:noFill/>
+        </p:spPr>
+        <p:txBody>
+          <a:bodyPr wrap="none">
+            <a:spAutoFit/>
+          </a:bodyPr>
+          <a:lstStyle/>
+          <a:p>
+            <a:pPr algn="l"/>
+            <a:r>
+              <a:rPr sz="700">
+                <a:solidFill>
+                  <a:srgbClr val="A0B4D2"/>
+                </a:solidFill>
+                <a:latin typeface="Consolas"/>
+              </a:rPr>
+              <a:t>FKB Campus  ·  M23</a:t>
+            </a:r>
+          </a:p>
+        </p:txBody>
+      </p:sp>
+    </p:spTree>
+  </p:cSld>
+  <p:clrMapOvr>
+    <a:masterClrMapping/>
+  </p:clrMapOvr>
+</p:sld>
+</file>
+
+<file path=ppt/slides/slide23.xml><?xml version="1.0" encoding="utf-8"?>
+<p:sld xmlns:a="http://schemas.openxmlformats.org/drawingml/2006/main" xmlns:p="http://schemas.openxmlformats.org/presentationml/2006/main" xmlns:r="http://schemas.openxmlformats.org/officeDocument/2006/relationships">
+  <p:cSld>
+    <p:spTree>
+      <p:nvGrpSpPr>
+        <p:cNvPr id="1" name=""/>
+        <p:cNvGrpSpPr/>
+        <p:nvPr/>
+      </p:nvGrpSpPr>
+      <p:grpSpPr/>
+      <p:sp>
+        <p:nvSpPr>
+          <p:cNvPr id="2" name="Rectangle 1"/>
+          <p:cNvSpPr/>
+          <p:nvPr/>
+        </p:nvSpPr>
+        <p:spPr>
+          <a:xfrm>
+            <a:off x="0" y="0"/>
+            <a:ext cx="12188952" cy="6858000"/>
+          </a:xfrm>
+          <a:prstGeom prst="rect">
+            <a:avLst/>
+          </a:prstGeom>
+          <a:solidFill>
+            <a:srgbClr val="FFFFFF"/>
+          </a:solidFill>
+          <a:ln>
+            <a:noFill/>
+          </a:ln>
+        </p:spPr>
+        <p:style>
+          <a:lnRef idx="1">
+            <a:schemeClr val="accent1"/>
+          </a:lnRef>
+          <a:fillRef idx="3">
+            <a:schemeClr val="accent1"/>
+          </a:fillRef>
+          <a:effectRef idx="2">
+            <a:schemeClr val="accent1"/>
+          </a:effectRef>
+          <a:fontRef idx="minor">
+            <a:schemeClr val="lt1"/>
+          </a:fontRef>
+        </p:style>
+        <p:txBody>
+          <a:bodyPr rtlCol="0" anchor="ctr"/>
+          <a:lstStyle/>
+          <a:p>
+            <a:pPr algn="ctr"/>
+          </a:p>
+        </p:txBody>
+      </p:sp>
+      <p:sp>
+        <p:nvSpPr>
+          <p:cNvPr id="3" name="Rectangle 2"/>
+          <p:cNvSpPr/>
+          <p:nvPr/>
+        </p:nvSpPr>
+        <p:spPr>
+          <a:xfrm>
+            <a:off x="0" y="0"/>
+            <a:ext cx="12188952" cy="50292"/>
+          </a:xfrm>
+          <a:prstGeom prst="rect">
+            <a:avLst/>
+          </a:prstGeom>
+          <a:solidFill>
+            <a:srgbClr val="1F2C56"/>
+          </a:solidFill>
+          <a:ln>
+            <a:noFill/>
+          </a:ln>
+        </p:spPr>
+        <p:style>
+          <a:lnRef idx="1">
+            <a:schemeClr val="accent1"/>
+          </a:lnRef>
+          <a:fillRef idx="3">
+            <a:schemeClr val="accent1"/>
+          </a:fillRef>
+          <a:effectRef idx="2">
+            <a:schemeClr val="accent1"/>
+          </a:effectRef>
+          <a:fontRef idx="minor">
+            <a:schemeClr val="lt1"/>
+          </a:fontRef>
+        </p:style>
+        <p:txBody>
+          <a:bodyPr rtlCol="0" anchor="ctr"/>
+          <a:lstStyle/>
+          <a:p>
+            <a:pPr algn="ctr"/>
+          </a:p>
+        </p:txBody>
+      </p:sp>
+      <p:sp>
+        <p:nvSpPr>
+          <p:cNvPr id="4" name="TextBox 3"/>
+          <p:cNvSpPr txBox="1"/>
+          <p:nvPr/>
+        </p:nvSpPr>
+        <p:spPr>
+          <a:xfrm>
+            <a:off x="685800" y="109728"/>
+            <a:ext cx="10817352" cy="228600"/>
+          </a:xfrm>
+          <a:prstGeom prst="rect">
+            <a:avLst/>
+          </a:prstGeom>
+          <a:noFill/>
+        </p:spPr>
+        <p:txBody>
+          <a:bodyPr wrap="none">
+            <a:spAutoFit/>
+          </a:bodyPr>
+          <a:lstStyle/>
+          <a:p>
+            <a:pPr algn="l"/>
+            <a:r>
+              <a:rPr sz="750">
+                <a:solidFill>
+                  <a:srgbClr val="78808C"/>
+                </a:solidFill>
+                <a:latin typeface="Consolas"/>
+              </a:rPr>
+              <a:t>M23  ·  SCHAUBILD</a:t>
+            </a:r>
+          </a:p>
+        </p:txBody>
+      </p:sp>
+      <p:sp>
+        <p:nvSpPr>
+          <p:cNvPr id="5" name="TextBox 4"/>
+          <p:cNvSpPr txBox="1"/>
+          <p:nvPr/>
+        </p:nvSpPr>
+        <p:spPr>
+          <a:xfrm>
+            <a:off x="685800" y="502920"/>
+            <a:ext cx="10817352" cy="594360"/>
+          </a:xfrm>
+          <a:prstGeom prst="rect">
+            <a:avLst/>
+          </a:prstGeom>
+          <a:noFill/>
+        </p:spPr>
+        <p:txBody>
+          <a:bodyPr wrap="square">
+            <a:spAutoFit/>
+          </a:bodyPr>
+          <a:lstStyle/>
+          <a:p>
+            <a:pPr algn="l"/>
+            <a:r>
+              <a:rPr sz="2000" b="1" i="0">
+                <a:solidFill>
+                  <a:srgbClr val="1F2C56"/>
+                </a:solidFill>
+                <a:latin typeface="Arial"/>
+              </a:rPr>
+              <a:t>Handlungsempfehlung: vom Kennwert zur Kreditmaßnahme</a:t>
+            </a:r>
+          </a:p>
+        </p:txBody>
+      </p:sp>
+      <p:sp>
+        <p:nvSpPr>
+          <p:cNvPr id="6" name="Rectangle 5"/>
+          <p:cNvSpPr/>
+          <p:nvPr/>
+        </p:nvSpPr>
+        <p:spPr>
+          <a:xfrm>
+            <a:off x="685800" y="1143000"/>
+            <a:ext cx="10817352" cy="25400"/>
+          </a:xfrm>
+          <a:prstGeom prst="rect">
+            <a:avLst/>
+          </a:prstGeom>
+          <a:solidFill>
+            <a:srgbClr val="D9C089"/>
+          </a:solidFill>
+          <a:ln>
+            <a:noFill/>
+          </a:ln>
+        </p:spPr>
+        <p:style>
+          <a:lnRef idx="1">
+            <a:schemeClr val="accent1"/>
+          </a:lnRef>
+          <a:fillRef idx="3">
+            <a:schemeClr val="accent1"/>
+          </a:fillRef>
+          <a:effectRef idx="2">
+            <a:schemeClr val="accent1"/>
+          </a:effectRef>
+          <a:fontRef idx="minor">
+            <a:schemeClr val="lt1"/>
+          </a:fontRef>
+        </p:style>
+        <p:txBody>
+          <a:bodyPr rtlCol="0" anchor="ctr"/>
+          <a:lstStyle/>
+          <a:p>
+            <a:pPr algn="ctr"/>
+          </a:p>
+        </p:txBody>
+      </p:sp>
+      <p:pic>
+        <p:nvPicPr>
+          <p:cNvPr id="7" name="Picture 6" descr="image.png"/>
+          <p:cNvPicPr>
+            <a:picLocks noChangeAspect="1"/>
+          </p:cNvPicPr>
+          <p:nvPr/>
+        </p:nvPicPr>
+        <p:blipFill>
+          <a:blip r:embed="rId2"/>
+          <a:stretch>
+            <a:fillRect/>
+          </a:stretch>
+        </p:blipFill>
+        <p:spPr>
+          <a:xfrm>
+            <a:off x="2303489" y="1325880"/>
+            <a:ext cx="7581973" cy="4937760"/>
+          </a:xfrm>
+          <a:prstGeom prst="rect">
+            <a:avLst/>
+          </a:prstGeom>
+        </p:spPr>
+      </p:pic>
+      <p:sp>
+        <p:nvSpPr>
+          <p:cNvPr id="8" name="Rectangle 7"/>
+          <p:cNvSpPr/>
+          <p:nvPr/>
+        </p:nvSpPr>
+        <p:spPr>
+          <a:xfrm>
+            <a:off x="0" y="6510528"/>
+            <a:ext cx="12188952" cy="347472"/>
+          </a:xfrm>
+          <a:prstGeom prst="rect">
+            <a:avLst/>
+          </a:prstGeom>
+          <a:solidFill>
+            <a:srgbClr val="0A1937"/>
+          </a:solidFill>
+          <a:ln>
+            <a:noFill/>
+          </a:ln>
+        </p:spPr>
+        <p:style>
+          <a:lnRef idx="1">
+            <a:schemeClr val="accent1"/>
+          </a:lnRef>
+          <a:fillRef idx="3">
+            <a:schemeClr val="accent1"/>
+          </a:fillRef>
+          <a:effectRef idx="2">
+            <a:schemeClr val="accent1"/>
+          </a:effectRef>
+          <a:fontRef idx="minor">
+            <a:schemeClr val="lt1"/>
+          </a:fontRef>
+        </p:style>
+        <p:txBody>
+          <a:bodyPr rtlCol="0" anchor="ctr"/>
+          <a:lstStyle/>
+          <a:p>
+            <a:pPr algn="ctr"/>
+          </a:p>
+        </p:txBody>
+      </p:sp>
+      <p:sp>
+        <p:nvSpPr>
+          <p:cNvPr id="9" name="TextBox 8"/>
+          <p:cNvSpPr txBox="1"/>
+          <p:nvPr/>
+        </p:nvSpPr>
+        <p:spPr>
+          <a:xfrm>
+            <a:off x="685800" y="6583680"/>
+            <a:ext cx="6490411" cy="256032"/>
+          </a:xfrm>
+          <a:prstGeom prst="rect">
+            <a:avLst/>
+          </a:prstGeom>
+          <a:noFill/>
+        </p:spPr>
+        <p:txBody>
+          <a:bodyPr wrap="none">
+            <a:spAutoFit/>
+          </a:bodyPr>
+          <a:lstStyle/>
+          <a:p>
+            <a:pPr algn="l"/>
+            <a:r>
+              <a:rPr sz="700">
+                <a:solidFill>
+                  <a:srgbClr val="A0B4D2"/>
+                </a:solidFill>
+                <a:latin typeface="Consolas"/>
+              </a:rPr>
+              <a:t>FKB Campus  ·  M23</a:t>
+            </a:r>
+          </a:p>
+        </p:txBody>
+      </p:sp>
+      <p:sp>
+        <p:nvSpPr>
+          <p:cNvPr id="10" name="TextBox 9"/>
+          <p:cNvSpPr txBox="1"/>
+          <p:nvPr/>
+        </p:nvSpPr>
+        <p:spPr>
+          <a:xfrm>
+            <a:off x="7176211" y="6583680"/>
+            <a:ext cx="4326940" cy="256032"/>
+          </a:xfrm>
+          <a:prstGeom prst="rect">
+            <a:avLst/>
+          </a:prstGeom>
+          <a:noFill/>
+        </p:spPr>
+        <p:txBody>
+          <a:bodyPr wrap="none">
+            <a:spAutoFit/>
+          </a:bodyPr>
+          <a:lstStyle/>
+          <a:p>
+            <a:pPr algn="r"/>
+            <a:r>
+              <a:rPr sz="700">
+                <a:solidFill>
+                  <a:srgbClr val="A0B4D2"/>
+                </a:solidFill>
+                <a:latin typeface="Consolas"/>
+              </a:rPr>
+              <a:t>Schaubild</a:t>
+            </a:r>
+          </a:p>
+        </p:txBody>
+      </p:sp>
+    </p:spTree>
+  </p:cSld>
+  <p:clrMapOvr>
+    <a:masterClrMapping/>
+  </p:clrMapOvr>
+</p:sld>
+</file>
+
+<file path=ppt/slides/slide24.xml><?xml version="1.0" encoding="utf-8"?>
+<p:sld xmlns:a="http://schemas.openxmlformats.org/drawingml/2006/main" xmlns:p="http://schemas.openxmlformats.org/presentationml/2006/main" xmlns:r="http://schemas.openxmlformats.org/officeDocument/2006/relationships">
+  <p:cSld>
+    <p:spTree>
+      <p:nvGrpSpPr>
+        <p:cNvPr id="1" name=""/>
+        <p:cNvGrpSpPr/>
+        <p:nvPr/>
+      </p:nvGrpSpPr>
+      <p:grpSpPr/>
+      <p:sp>
+        <p:nvSpPr>
+          <p:cNvPr id="2" name="Rectangle 1"/>
+          <p:cNvSpPr/>
+          <p:nvPr/>
+        </p:nvSpPr>
+        <p:spPr>
+          <a:xfrm>
+            <a:off x="0" y="0"/>
+            <a:ext cx="12188952" cy="6858000"/>
+          </a:xfrm>
+          <a:prstGeom prst="rect">
+            <a:avLst/>
+          </a:prstGeom>
+          <a:solidFill>
+            <a:srgbClr val="EDEDF3"/>
+          </a:solidFill>
+          <a:ln>
+            <a:noFill/>
+          </a:ln>
+        </p:spPr>
+        <p:style>
+          <a:lnRef idx="1">
+            <a:schemeClr val="accent1"/>
+          </a:lnRef>
+          <a:fillRef idx="3">
+            <a:schemeClr val="accent1"/>
+          </a:fillRef>
+          <a:effectRef idx="2">
+            <a:schemeClr val="accent1"/>
+          </a:effectRef>
+          <a:fontRef idx="minor">
+            <a:schemeClr val="lt1"/>
+          </a:fontRef>
+        </p:style>
+        <p:txBody>
+          <a:bodyPr rtlCol="0" anchor="ctr"/>
+          <a:lstStyle/>
+          <a:p>
+            <a:pPr algn="ctr"/>
+          </a:p>
+        </p:txBody>
+      </p:sp>
+      <p:sp>
+        <p:nvSpPr>
+          <p:cNvPr id="3" name="Rectangle 2"/>
+          <p:cNvSpPr/>
+          <p:nvPr/>
+        </p:nvSpPr>
+        <p:spPr>
+          <a:xfrm>
+            <a:off x="0" y="0"/>
+            <a:ext cx="12188952" cy="50292"/>
+          </a:xfrm>
+          <a:prstGeom prst="rect">
+            <a:avLst/>
+          </a:prstGeom>
+          <a:solidFill>
+            <a:srgbClr val="1F2C56"/>
+          </a:solidFill>
+          <a:ln>
+            <a:noFill/>
+          </a:ln>
+        </p:spPr>
+        <p:style>
+          <a:lnRef idx="1">
+            <a:schemeClr val="accent1"/>
+          </a:lnRef>
+          <a:fillRef idx="3">
+            <a:schemeClr val="accent1"/>
+          </a:fillRef>
+          <a:effectRef idx="2">
+            <a:schemeClr val="accent1"/>
+          </a:effectRef>
+          <a:fontRef idx="minor">
+            <a:schemeClr val="lt1"/>
+          </a:fontRef>
+        </p:style>
+        <p:txBody>
+          <a:bodyPr rtlCol="0" anchor="ctr"/>
+          <a:lstStyle/>
+          <a:p>
+            <a:pPr algn="ctr"/>
+          </a:p>
+        </p:txBody>
+      </p:sp>
+      <p:sp>
+        <p:nvSpPr>
+          <p:cNvPr id="4" name="TextBox 3"/>
+          <p:cNvSpPr txBox="1"/>
+          <p:nvPr/>
+        </p:nvSpPr>
+        <p:spPr>
+          <a:xfrm>
+            <a:off x="685800" y="109728"/>
+            <a:ext cx="10817352" cy="228600"/>
+          </a:xfrm>
+          <a:prstGeom prst="rect">
+            <a:avLst/>
+          </a:prstGeom>
+          <a:noFill/>
+        </p:spPr>
+        <p:txBody>
+          <a:bodyPr wrap="none">
+            <a:spAutoFit/>
+          </a:bodyPr>
+          <a:lstStyle/>
+          <a:p>
+            <a:pPr algn="l"/>
+            <a:r>
+              <a:rPr sz="750">
+                <a:solidFill>
+                  <a:srgbClr val="78808C"/>
+                </a:solidFill>
+                <a:latin typeface="Consolas"/>
+              </a:rPr>
+              <a:t>M23  ·  ARBEITSBLATT</a:t>
+            </a:r>
+          </a:p>
+        </p:txBody>
+      </p:sp>
+      <p:sp>
+        <p:nvSpPr>
+          <p:cNvPr id="5" name="Rectangle 4"/>
+          <p:cNvSpPr/>
+          <p:nvPr/>
+        </p:nvSpPr>
+        <p:spPr>
+          <a:xfrm>
+            <a:off x="0" y="1234440"/>
+            <a:ext cx="12188952" cy="12700"/>
+          </a:xfrm>
+          <a:prstGeom prst="rect">
+            <a:avLst/>
+          </a:prstGeom>
+          <a:solidFill>
+            <a:srgbClr val="D8DFE4"/>
+          </a:solidFill>
+          <a:ln>
+            <a:noFill/>
+          </a:ln>
+        </p:spPr>
+        <p:style>
+          <a:lnRef idx="1">
+            <a:schemeClr val="accent1"/>
+          </a:lnRef>
+          <a:fillRef idx="3">
+            <a:schemeClr val="accent1"/>
+          </a:fillRef>
+          <a:effectRef idx="2">
+            <a:schemeClr val="accent1"/>
+          </a:effectRef>
+          <a:fontRef idx="minor">
+            <a:schemeClr val="lt1"/>
+          </a:fontRef>
+        </p:style>
+        <p:txBody>
+          <a:bodyPr rtlCol="0" anchor="ctr"/>
+          <a:lstStyle/>
+          <a:p>
+            <a:pPr algn="ctr"/>
+          </a:p>
+        </p:txBody>
+      </p:sp>
+      <p:sp>
+        <p:nvSpPr>
+          <p:cNvPr id="6" name="Rectangle 5"/>
+          <p:cNvSpPr/>
+          <p:nvPr/>
+        </p:nvSpPr>
+        <p:spPr>
+          <a:xfrm>
+            <a:off x="685800" y="502920"/>
+            <a:ext cx="36576" cy="658368"/>
+          </a:xfrm>
+          <a:prstGeom prst="rect">
+            <a:avLst/>
+          </a:prstGeom>
+          <a:solidFill>
+            <a:srgbClr val="D9C089"/>
+          </a:solidFill>
+          <a:ln>
+            <a:noFill/>
+          </a:ln>
+        </p:spPr>
+        <p:style>
+          <a:lnRef idx="1">
+            <a:schemeClr val="accent1"/>
+          </a:lnRef>
+          <a:fillRef idx="3">
+            <a:schemeClr val="accent1"/>
+          </a:fillRef>
+          <a:effectRef idx="2">
+            <a:schemeClr val="accent1"/>
+          </a:effectRef>
+          <a:fontRef idx="minor">
+            <a:schemeClr val="lt1"/>
+          </a:fontRef>
+        </p:style>
+        <p:txBody>
+          <a:bodyPr rtlCol="0" anchor="ctr"/>
+          <a:lstStyle/>
+          <a:p>
+            <a:pPr algn="ctr"/>
+          </a:p>
+        </p:txBody>
+      </p:sp>
+      <p:sp>
+        <p:nvSpPr>
+          <p:cNvPr id="7" name="TextBox 6"/>
+          <p:cNvSpPr txBox="1"/>
+          <p:nvPr/>
+        </p:nvSpPr>
+        <p:spPr>
+          <a:xfrm>
+            <a:off x="813816" y="502920"/>
+            <a:ext cx="10634472" cy="685800"/>
+          </a:xfrm>
+          <a:prstGeom prst="rect">
+            <a:avLst/>
+          </a:prstGeom>
+          <a:noFill/>
+        </p:spPr>
+        <p:txBody>
+          <a:bodyPr wrap="square">
+            <a:spAutoFit/>
+          </a:bodyPr>
+          <a:lstStyle/>
+          <a:p>
+            <a:pPr algn="l"/>
+            <a:r>
+              <a:rPr sz="2400" b="1" i="0">
+                <a:solidFill>
+                  <a:srgbClr val="1F2C56"/>
+                </a:solidFill>
+                <a:latin typeface="Arial"/>
+              </a:rPr>
+              <a:t>Ergebnis erklären und Monitoring aufsetzen</a:t>
+            </a:r>
+          </a:p>
+        </p:txBody>
+      </p:sp>
+      <p:sp>
+        <p:nvSpPr>
+          <p:cNvPr id="8" name="TextBox 7"/>
+          <p:cNvSpPr txBox="1"/>
+          <p:nvPr/>
+        </p:nvSpPr>
+        <p:spPr>
+          <a:xfrm>
+            <a:off x="685800" y="1554480"/>
+            <a:ext cx="10817352" cy="3840480"/>
+          </a:xfrm>
+          <a:prstGeom prst="rect">
+            <a:avLst/>
+          </a:prstGeom>
+          <a:noFill/>
+        </p:spPr>
+        <p:txBody>
+          <a:bodyPr wrap="square">
+            <a:spAutoFit/>
+          </a:bodyPr>
+          <a:lstStyle/>
+          <a:p>
+            <a:pPr marL="190500" indent="-190500">
+              <a:spcBef>
+                <a:spcPts val="400"/>
+              </a:spcBef>
+              <a:spcAft>
+                <a:spcPts val="200"/>
+              </a:spcAft>
+            </a:pPr>
+            <a:r>
+              <a:rPr sz="1400">
+                <a:solidFill>
+                  <a:srgbClr val="3D5466"/>
+                </a:solidFill>
+                <a:latin typeface="Arial"/>
+              </a:rPr>
+              <a:t>▸  Erklären Sie dem Unternehmer das Modellergebnis im Rollenspiel (AB-6).</a:t>
+            </a:r>
+          </a:p>
+          <a:p>
+            <a:pPr marL="190500" indent="-190500">
+              <a:spcBef>
+                <a:spcPts val="400"/>
+              </a:spcBef>
+              <a:spcAft>
+                <a:spcPts val="200"/>
+              </a:spcAft>
+            </a:pPr>
+            <a:r>
+              <a:rPr sz="1400">
+                <a:solidFill>
+                  <a:srgbClr val="3D5466"/>
+                </a:solidFill>
+                <a:latin typeface="Arial"/>
+              </a:rPr>
+              <a:t>▸  Formulieren Sie eine begründete Finanzierungsempfehlung.</a:t>
+            </a:r>
+          </a:p>
+          <a:p>
+            <a:pPr marL="190500" indent="-190500">
+              <a:spcBef>
+                <a:spcPts val="400"/>
+              </a:spcBef>
+              <a:spcAft>
+                <a:spcPts val="200"/>
+              </a:spcAft>
+            </a:pPr>
+            <a:r>
+              <a:rPr sz="1400">
+                <a:solidFill>
+                  <a:srgbClr val="3D5466"/>
+                </a:solidFill>
+                <a:latin typeface="Arial"/>
+              </a:rPr>
+              <a:t>▸  Richten Sie den Soll-Ist-Abgleich (Plan vs. BWA) als Monitoring ein und besprechen Sie die Covenants (AB-7).</a:t>
+            </a:r>
+          </a:p>
+        </p:txBody>
+      </p:sp>
+      <p:sp>
+        <p:nvSpPr>
+          <p:cNvPr id="9" name="Rectangle 8"/>
+          <p:cNvSpPr/>
+          <p:nvPr/>
+        </p:nvSpPr>
+        <p:spPr>
+          <a:xfrm>
+            <a:off x="685800" y="5486400"/>
+            <a:ext cx="10817352" cy="640080"/>
+          </a:xfrm>
+          <a:prstGeom prst="rect">
+            <a:avLst/>
+          </a:prstGeom>
+          <a:solidFill>
+            <a:srgbClr val="1F2C56"/>
+          </a:solidFill>
+          <a:ln>
+            <a:noFill/>
+          </a:ln>
+        </p:spPr>
+        <p:style>
+          <a:lnRef idx="1">
+            <a:schemeClr val="accent1"/>
+          </a:lnRef>
+          <a:fillRef idx="3">
+            <a:schemeClr val="accent1"/>
+          </a:fillRef>
+          <a:effectRef idx="2">
+            <a:schemeClr val="accent1"/>
+          </a:effectRef>
+          <a:fontRef idx="minor">
+            <a:schemeClr val="lt1"/>
+          </a:fontRef>
+        </p:style>
+        <p:txBody>
+          <a:bodyPr rtlCol="0" anchor="ctr"/>
+          <a:lstStyle/>
+          <a:p>
+            <a:pPr algn="ctr"/>
+          </a:p>
+        </p:txBody>
+      </p:sp>
+      <p:sp>
+        <p:nvSpPr>
+          <p:cNvPr id="10" name="TextBox 9"/>
+          <p:cNvSpPr txBox="1"/>
+          <p:nvPr/>
+        </p:nvSpPr>
+        <p:spPr>
+          <a:xfrm>
+            <a:off x="868680" y="5596128"/>
+            <a:ext cx="10451592" cy="457200"/>
+          </a:xfrm>
+          <a:prstGeom prst="rect">
+            <a:avLst/>
+          </a:prstGeom>
+          <a:noFill/>
+        </p:spPr>
+        <p:txBody>
+          <a:bodyPr wrap="square">
+            <a:spAutoFit/>
+          </a:bodyPr>
+          <a:lstStyle/>
+          <a:p>
+            <a:pPr algn="l"/>
+            <a:r>
+              <a:rPr sz="1300" b="1" i="0">
+                <a:solidFill>
+                  <a:srgbClr val="FFFFFF"/>
+                </a:solidFill>
+                <a:latin typeface="Arial"/>
+              </a:rPr>
+              <a:t>→  Bearbeitung im Teilnehmer-Workbook (Arbeitsblatt mit Ausfüllfeldern)</a:t>
+            </a:r>
+          </a:p>
+        </p:txBody>
+      </p:sp>
+      <p:sp>
+        <p:nvSpPr>
+          <p:cNvPr id="11" name="Rectangle 10"/>
+          <p:cNvSpPr/>
+          <p:nvPr/>
+        </p:nvSpPr>
+        <p:spPr>
+          <a:xfrm>
+            <a:off x="0" y="6510528"/>
+            <a:ext cx="12188952" cy="347472"/>
+          </a:xfrm>
+          <a:prstGeom prst="rect">
+            <a:avLst/>
+          </a:prstGeom>
+          <a:solidFill>
+            <a:srgbClr val="0A1937"/>
+          </a:solidFill>
+          <a:ln>
+            <a:noFill/>
+          </a:ln>
+        </p:spPr>
+        <p:style>
+          <a:lnRef idx="1">
+            <a:schemeClr val="accent1"/>
+          </a:lnRef>
+          <a:fillRef idx="3">
+            <a:schemeClr val="accent1"/>
+          </a:fillRef>
+          <a:effectRef idx="2">
+            <a:schemeClr val="accent1"/>
+          </a:effectRef>
+          <a:fontRef idx="minor">
+            <a:schemeClr val="lt1"/>
+          </a:fontRef>
+        </p:style>
+        <p:txBody>
+          <a:bodyPr rtlCol="0" anchor="ctr"/>
+          <a:lstStyle/>
+          <a:p>
+            <a:pPr algn="ctr"/>
+          </a:p>
+        </p:txBody>
+      </p:sp>
+      <p:sp>
+        <p:nvSpPr>
+          <p:cNvPr id="12" name="TextBox 11"/>
+          <p:cNvSpPr txBox="1"/>
+          <p:nvPr/>
+        </p:nvSpPr>
+        <p:spPr>
+          <a:xfrm>
+            <a:off x="685800" y="6583680"/>
+            <a:ext cx="6490411" cy="256032"/>
+          </a:xfrm>
+          <a:prstGeom prst="rect">
+            <a:avLst/>
+          </a:prstGeom>
+          <a:noFill/>
+        </p:spPr>
+        <p:txBody>
+          <a:bodyPr wrap="none">
+            <a:spAutoFit/>
+          </a:bodyPr>
+          <a:lstStyle/>
+          <a:p>
+            <a:pPr algn="l"/>
+            <a:r>
+              <a:rPr sz="700">
+                <a:solidFill>
+                  <a:srgbClr val="A0B4D2"/>
+                </a:solidFill>
+                <a:latin typeface="Consolas"/>
+              </a:rPr>
+              <a:t>FKB Campus  ·  M23</a:t>
+            </a:r>
+          </a:p>
+        </p:txBody>
+      </p:sp>
+    </p:spTree>
+  </p:cSld>
+  <p:clrMapOvr>
+    <a:masterClrMapping/>
+  </p:clrMapOvr>
+</p:sld>
+</file>
+
+<file path=ppt/slides/slide25.xml><?xml version="1.0" encoding="utf-8"?>
+<p:sld xmlns:a="http://schemas.openxmlformats.org/drawingml/2006/main" xmlns:p="http://schemas.openxmlformats.org/presentationml/2006/main" xmlns:r="http://schemas.openxmlformats.org/officeDocument/2006/relationships">
+  <p:cSld>
+    <p:spTree>
+      <p:nvGrpSpPr>
+        <p:cNvPr id="1" name=""/>
+        <p:cNvGrpSpPr/>
+        <p:nvPr/>
+      </p:nvGrpSpPr>
+      <p:grpSpPr/>
+      <p:sp>
+        <p:nvSpPr>
+          <p:cNvPr id="2" name="Rectangle 1"/>
+          <p:cNvSpPr/>
+          <p:nvPr/>
+        </p:nvSpPr>
+        <p:spPr>
+          <a:xfrm>
+            <a:off x="0" y="0"/>
+            <a:ext cx="12188952" cy="6858000"/>
+          </a:xfrm>
+          <a:prstGeom prst="rect">
+            <a:avLst/>
+          </a:prstGeom>
+          <a:solidFill>
+            <a:srgbClr val="EDEDF3"/>
+          </a:solidFill>
+          <a:ln>
+            <a:noFill/>
+          </a:ln>
+        </p:spPr>
+        <p:style>
+          <a:lnRef idx="1">
+            <a:schemeClr val="accent1"/>
+          </a:lnRef>
+          <a:fillRef idx="3">
+            <a:schemeClr val="accent1"/>
+          </a:fillRef>
+          <a:effectRef idx="2">
+            <a:schemeClr val="accent1"/>
+          </a:effectRef>
+          <a:fontRef idx="minor">
+            <a:schemeClr val="lt1"/>
+          </a:fontRef>
+        </p:style>
+        <p:txBody>
+          <a:bodyPr rtlCol="0" anchor="ctr"/>
+          <a:lstStyle/>
+          <a:p>
+            <a:pPr algn="ctr"/>
+          </a:p>
+        </p:txBody>
+      </p:sp>
+      <p:sp>
+        <p:nvSpPr>
+          <p:cNvPr id="3" name="Rectangle 2"/>
+          <p:cNvSpPr/>
+          <p:nvPr/>
+        </p:nvSpPr>
+        <p:spPr>
+          <a:xfrm>
+            <a:off x="0" y="0"/>
+            <a:ext cx="12188952" cy="50292"/>
+          </a:xfrm>
+          <a:prstGeom prst="rect">
+            <a:avLst/>
+          </a:prstGeom>
+          <a:solidFill>
+            <a:srgbClr val="1F2C56"/>
+          </a:solidFill>
+          <a:ln>
+            <a:noFill/>
+          </a:ln>
+        </p:spPr>
+        <p:style>
+          <a:lnRef idx="1">
+            <a:schemeClr val="accent1"/>
+          </a:lnRef>
+          <a:fillRef idx="3">
+            <a:schemeClr val="accent1"/>
+          </a:fillRef>
+          <a:effectRef idx="2">
+            <a:schemeClr val="accent1"/>
+          </a:effectRef>
+          <a:fontRef idx="minor">
+            <a:schemeClr val="lt1"/>
+          </a:fontRef>
+        </p:style>
+        <p:txBody>
+          <a:bodyPr rtlCol="0" anchor="ctr"/>
+          <a:lstStyle/>
+          <a:p>
+            <a:pPr algn="ctr"/>
+          </a:p>
+        </p:txBody>
+      </p:sp>
+      <p:sp>
+        <p:nvSpPr>
+          <p:cNvPr id="4" name="TextBox 3"/>
+          <p:cNvSpPr txBox="1"/>
+          <p:nvPr/>
+        </p:nvSpPr>
+        <p:spPr>
+          <a:xfrm>
+            <a:off x="685800" y="109728"/>
+            <a:ext cx="10817352" cy="228600"/>
+          </a:xfrm>
+          <a:prstGeom prst="rect">
+            <a:avLst/>
+          </a:prstGeom>
+          <a:noFill/>
+        </p:spPr>
+        <p:txBody>
+          <a:bodyPr wrap="none">
+            <a:spAutoFit/>
+          </a:bodyPr>
+          <a:lstStyle/>
+          <a:p>
+            <a:pPr algn="l"/>
+            <a:r>
+              <a:rPr sz="750">
+                <a:solidFill>
+                  <a:srgbClr val="78808C"/>
+                </a:solidFill>
+                <a:latin typeface="Consolas"/>
+              </a:rPr>
+              <a:t>M23  ·  INHALT</a:t>
+            </a:r>
+          </a:p>
+        </p:txBody>
+      </p:sp>
+      <p:sp>
+        <p:nvSpPr>
+          <p:cNvPr id="5" name="Rectangle 4"/>
+          <p:cNvSpPr/>
+          <p:nvPr/>
+        </p:nvSpPr>
+        <p:spPr>
+          <a:xfrm>
+            <a:off x="0" y="1234440"/>
+            <a:ext cx="12188952" cy="12700"/>
+          </a:xfrm>
+          <a:prstGeom prst="rect">
+            <a:avLst/>
+          </a:prstGeom>
+          <a:solidFill>
+            <a:srgbClr val="D8DFE4"/>
+          </a:solidFill>
+          <a:ln>
+            <a:noFill/>
+          </a:ln>
+        </p:spPr>
+        <p:style>
+          <a:lnRef idx="1">
+            <a:schemeClr val="accent1"/>
+          </a:lnRef>
+          <a:fillRef idx="3">
+            <a:schemeClr val="accent1"/>
+          </a:fillRef>
+          <a:effectRef idx="2">
+            <a:schemeClr val="accent1"/>
+          </a:effectRef>
+          <a:fontRef idx="minor">
+            <a:schemeClr val="lt1"/>
+          </a:fontRef>
+        </p:style>
+        <p:txBody>
+          <a:bodyPr rtlCol="0" anchor="ctr"/>
+          <a:lstStyle/>
+          <a:p>
+            <a:pPr algn="ctr"/>
+          </a:p>
+        </p:txBody>
+      </p:sp>
+      <p:sp>
+        <p:nvSpPr>
+          <p:cNvPr id="6" name="Rectangle 5"/>
+          <p:cNvSpPr/>
+          <p:nvPr/>
+        </p:nvSpPr>
+        <p:spPr>
+          <a:xfrm>
+            <a:off x="685800" y="502920"/>
+            <a:ext cx="36576" cy="658368"/>
+          </a:xfrm>
+          <a:prstGeom prst="rect">
+            <a:avLst/>
+          </a:prstGeom>
+          <a:solidFill>
+            <a:srgbClr val="D9C089"/>
+          </a:solidFill>
+          <a:ln>
+            <a:noFill/>
+          </a:ln>
+        </p:spPr>
+        <p:style>
+          <a:lnRef idx="1">
+            <a:schemeClr val="accent1"/>
+          </a:lnRef>
+          <a:fillRef idx="3">
+            <a:schemeClr val="accent1"/>
+          </a:fillRef>
+          <a:effectRef idx="2">
+            <a:schemeClr val="accent1"/>
+          </a:effectRef>
+          <a:fontRef idx="minor">
+            <a:schemeClr val="lt1"/>
+          </a:fontRef>
+        </p:style>
+        <p:txBody>
+          <a:bodyPr rtlCol="0" anchor="ctr"/>
+          <a:lstStyle/>
+          <a:p>
+            <a:pPr algn="ctr"/>
+          </a:p>
+        </p:txBody>
+      </p:sp>
+      <p:sp>
+        <p:nvSpPr>
+          <p:cNvPr id="7" name="TextBox 6"/>
+          <p:cNvSpPr txBox="1"/>
+          <p:nvPr/>
+        </p:nvSpPr>
+        <p:spPr>
+          <a:xfrm>
+            <a:off x="813816" y="502920"/>
+            <a:ext cx="10634472" cy="685800"/>
+          </a:xfrm>
+          <a:prstGeom prst="rect">
+            <a:avLst/>
+          </a:prstGeom>
+          <a:noFill/>
+        </p:spPr>
+        <p:txBody>
+          <a:bodyPr wrap="square">
+            <a:spAutoFit/>
+          </a:bodyPr>
+          <a:lstStyle/>
+          <a:p>
+            <a:pPr algn="l"/>
+            <a:r>
+              <a:rPr sz="2400" b="1" i="0">
+                <a:solidFill>
+                  <a:srgbClr val="1F2C56"/>
+                </a:solidFill>
+                <a:latin typeface="Arial"/>
+              </a:rPr>
+              <a:t>Prinzip dieses Moduls</a:t>
+            </a:r>
+          </a:p>
+        </p:txBody>
+      </p:sp>
+      <p:sp>
+        <p:nvSpPr>
+          <p:cNvPr id="8" name="TextBox 7"/>
+          <p:cNvSpPr txBox="1"/>
+          <p:nvPr/>
+        </p:nvSpPr>
+        <p:spPr>
+          <a:xfrm>
+            <a:off x="685800" y="1417320"/>
+            <a:ext cx="10817352" cy="4892040"/>
+          </a:xfrm>
+          <a:prstGeom prst="rect">
+            <a:avLst/>
+          </a:prstGeom>
+          <a:noFill/>
+        </p:spPr>
+        <p:txBody>
+          <a:bodyPr wrap="square" anchor="ctr">
+            <a:spAutoFit/>
+          </a:bodyPr>
+          <a:lstStyle/>
+          <a:p>
+            <a:pPr marL="177800" indent="-177800">
+              <a:spcBef>
+                <a:spcPts val="600"/>
+              </a:spcBef>
+              <a:spcAft>
+                <a:spcPts val="200"/>
+              </a:spcAft>
+            </a:pPr>
+            <a:r>
+              <a:rPr sz="1200" i="1">
+                <a:solidFill>
+                  <a:srgbClr val="3D5466"/>
+                </a:solidFill>
+                <a:latin typeface="Arial"/>
+              </a:rPr>
+              <a:t>→  Ein Plan, der sich nicht schließt, ist kein Plan.</a:t>
+            </a:r>
+          </a:p>
+          <a:p>
+            <a:pPr marL="190500" indent="-190500">
+              <a:spcBef>
+                <a:spcPts val="400"/>
+              </a:spcBef>
+              <a:spcAft>
+                <a:spcPts val="200"/>
+              </a:spcAft>
+            </a:pPr>
+            <a:r>
+              <a:rPr sz="1300">
+                <a:solidFill>
+                  <a:srgbClr val="3D5466"/>
+                </a:solidFill>
+                <a:latin typeface="Arial"/>
+              </a:rPr>
+              <a:t>▸  Prüfe GuV, Bilanz und Cashflow gegeneinander; hinterfrage die Annahme, nicht nur das Ergebnis.</a:t>
+            </a:r>
+          </a:p>
+        </p:txBody>
+      </p:sp>
+      <p:sp>
+        <p:nvSpPr>
+          <p:cNvPr id="9" name="Rectangle 8"/>
+          <p:cNvSpPr/>
+          <p:nvPr/>
+        </p:nvSpPr>
+        <p:spPr>
+          <a:xfrm>
+            <a:off x="0" y="6510528"/>
+            <a:ext cx="12188952" cy="347472"/>
+          </a:xfrm>
+          <a:prstGeom prst="rect">
+            <a:avLst/>
+          </a:prstGeom>
+          <a:solidFill>
+            <a:srgbClr val="0A1937"/>
+          </a:solidFill>
+          <a:ln>
+            <a:noFill/>
+          </a:ln>
+        </p:spPr>
+        <p:style>
+          <a:lnRef idx="1">
+            <a:schemeClr val="accent1"/>
+          </a:lnRef>
+          <a:fillRef idx="3">
+            <a:schemeClr val="accent1"/>
+          </a:fillRef>
+          <a:effectRef idx="2">
+            <a:schemeClr val="accent1"/>
+          </a:effectRef>
+          <a:fontRef idx="minor">
+            <a:schemeClr val="lt1"/>
+          </a:fontRef>
+        </p:style>
+        <p:txBody>
+          <a:bodyPr rtlCol="0" anchor="ctr"/>
+          <a:lstStyle/>
+          <a:p>
+            <a:pPr algn="ctr"/>
+          </a:p>
+        </p:txBody>
+      </p:sp>
+      <p:sp>
+        <p:nvSpPr>
+          <p:cNvPr id="10" name="TextBox 9"/>
+          <p:cNvSpPr txBox="1"/>
+          <p:nvPr/>
+        </p:nvSpPr>
+        <p:spPr>
+          <a:xfrm>
+            <a:off x="685800" y="6583680"/>
+            <a:ext cx="6490411" cy="256032"/>
+          </a:xfrm>
+          <a:prstGeom prst="rect">
+            <a:avLst/>
+          </a:prstGeom>
+          <a:noFill/>
+        </p:spPr>
+        <p:txBody>
+          <a:bodyPr wrap="none">
+            <a:spAutoFit/>
+          </a:bodyPr>
+          <a:lstStyle/>
+          <a:p>
+            <a:pPr algn="l"/>
+            <a:r>
+              <a:rPr sz="700">
+                <a:solidFill>
+                  <a:srgbClr val="A0B4D2"/>
+                </a:solidFill>
+                <a:latin typeface="Consolas"/>
+              </a:rPr>
+              <a:t>FKB Campus  ·  M23</a:t>
+            </a:r>
+          </a:p>
+        </p:txBody>
+      </p:sp>
+    </p:spTree>
+  </p:cSld>
+  <p:clrMapOvr>
+    <a:masterClrMapping/>
+  </p:clrMapOvr>
+</p:sld>
+</file>
+
+<file path=ppt/slides/slide26.xml><?xml version="1.0" encoding="utf-8"?>
+<p:sld xmlns:a="http://schemas.openxmlformats.org/drawingml/2006/main" xmlns:p="http://schemas.openxmlformats.org/presentationml/2006/main" xmlns:r="http://schemas.openxmlformats.org/officeDocument/2006/relationships">
+  <p:cSld>
+    <p:spTree>
+      <p:nvGrpSpPr>
+        <p:cNvPr id="1" name=""/>
+        <p:cNvGrpSpPr/>
+        <p:nvPr/>
+      </p:nvGrpSpPr>
+      <p:grpSpPr/>
+      <p:sp>
+        <p:nvSpPr>
+          <p:cNvPr id="2" name="Rectangle 1"/>
+          <p:cNvSpPr/>
+          <p:nvPr/>
+        </p:nvSpPr>
+        <p:spPr>
+          <a:xfrm>
+            <a:off x="0" y="0"/>
+            <a:ext cx="12188952" cy="6858000"/>
+          </a:xfrm>
+          <a:prstGeom prst="rect">
+            <a:avLst/>
+          </a:prstGeom>
+          <a:solidFill>
+            <a:srgbClr val="EDEDF3"/>
+          </a:solidFill>
+          <a:ln>
+            <a:noFill/>
+          </a:ln>
+        </p:spPr>
+        <p:style>
+          <a:lnRef idx="1">
+            <a:schemeClr val="accent1"/>
+          </a:lnRef>
+          <a:fillRef idx="3">
+            <a:schemeClr val="accent1"/>
+          </a:fillRef>
+          <a:effectRef idx="2">
+            <a:schemeClr val="accent1"/>
+          </a:effectRef>
+          <a:fontRef idx="minor">
+            <a:schemeClr val="lt1"/>
+          </a:fontRef>
+        </p:style>
+        <p:txBody>
+          <a:bodyPr rtlCol="0" anchor="ctr"/>
+          <a:lstStyle/>
+          <a:p>
+            <a:pPr algn="ctr"/>
+          </a:p>
+        </p:txBody>
+      </p:sp>
+      <p:sp>
+        <p:nvSpPr>
+          <p:cNvPr id="3" name="Rectangle 2"/>
+          <p:cNvSpPr/>
+          <p:nvPr/>
+        </p:nvSpPr>
+        <p:spPr>
+          <a:xfrm>
+            <a:off x="0" y="0"/>
+            <a:ext cx="12188952" cy="50292"/>
+          </a:xfrm>
+          <a:prstGeom prst="rect">
+            <a:avLst/>
+          </a:prstGeom>
+          <a:solidFill>
+            <a:srgbClr val="1F2C56"/>
+          </a:solidFill>
+          <a:ln>
+            <a:noFill/>
+          </a:ln>
+        </p:spPr>
+        <p:style>
+          <a:lnRef idx="1">
+            <a:schemeClr val="accent1"/>
+          </a:lnRef>
+          <a:fillRef idx="3">
+            <a:schemeClr val="accent1"/>
+          </a:fillRef>
+          <a:effectRef idx="2">
+            <a:schemeClr val="accent1"/>
+          </a:effectRef>
+          <a:fontRef idx="minor">
+            <a:schemeClr val="lt1"/>
+          </a:fontRef>
+        </p:style>
+        <p:txBody>
+          <a:bodyPr rtlCol="0" anchor="ctr"/>
+          <a:lstStyle/>
+          <a:p>
+            <a:pPr algn="ctr"/>
+          </a:p>
+        </p:txBody>
+      </p:sp>
+      <p:sp>
+        <p:nvSpPr>
+          <p:cNvPr id="4" name="TextBox 3"/>
+          <p:cNvSpPr txBox="1"/>
+          <p:nvPr/>
+        </p:nvSpPr>
+        <p:spPr>
+          <a:xfrm>
+            <a:off x="685800" y="109728"/>
+            <a:ext cx="10817352" cy="228600"/>
+          </a:xfrm>
+          <a:prstGeom prst="rect">
+            <a:avLst/>
+          </a:prstGeom>
+          <a:noFill/>
+        </p:spPr>
+        <p:txBody>
+          <a:bodyPr wrap="none">
+            <a:spAutoFit/>
+          </a:bodyPr>
+          <a:lstStyle/>
+          <a:p>
+            <a:pPr algn="l"/>
+            <a:r>
+              <a:rPr sz="750">
+                <a:solidFill>
+                  <a:srgbClr val="78808C"/>
+                </a:solidFill>
+                <a:latin typeface="Consolas"/>
+              </a:rPr>
+              <a:t>M23  ·  INHALT</a:t>
+            </a:r>
+          </a:p>
+        </p:txBody>
+      </p:sp>
+      <p:sp>
+        <p:nvSpPr>
+          <p:cNvPr id="5" name="Rectangle 4"/>
+          <p:cNvSpPr/>
+          <p:nvPr/>
+        </p:nvSpPr>
+        <p:spPr>
+          <a:xfrm>
+            <a:off x="0" y="1234440"/>
+            <a:ext cx="12188952" cy="12700"/>
+          </a:xfrm>
+          <a:prstGeom prst="rect">
+            <a:avLst/>
+          </a:prstGeom>
+          <a:solidFill>
+            <a:srgbClr val="D8DFE4"/>
+          </a:solidFill>
+          <a:ln>
+            <a:noFill/>
+          </a:ln>
+        </p:spPr>
+        <p:style>
+          <a:lnRef idx="1">
+            <a:schemeClr val="accent1"/>
+          </a:lnRef>
+          <a:fillRef idx="3">
+            <a:schemeClr val="accent1"/>
+          </a:fillRef>
+          <a:effectRef idx="2">
+            <a:schemeClr val="accent1"/>
+          </a:effectRef>
+          <a:fontRef idx="minor">
+            <a:schemeClr val="lt1"/>
+          </a:fontRef>
+        </p:style>
+        <p:txBody>
+          <a:bodyPr rtlCol="0" anchor="ctr"/>
+          <a:lstStyle/>
+          <a:p>
+            <a:pPr algn="ctr"/>
+          </a:p>
+        </p:txBody>
+      </p:sp>
+      <p:sp>
+        <p:nvSpPr>
+          <p:cNvPr id="6" name="Rectangle 5"/>
+          <p:cNvSpPr/>
+          <p:nvPr/>
+        </p:nvSpPr>
+        <p:spPr>
+          <a:xfrm>
+            <a:off x="685800" y="502920"/>
+            <a:ext cx="36576" cy="658368"/>
+          </a:xfrm>
+          <a:prstGeom prst="rect">
+            <a:avLst/>
+          </a:prstGeom>
+          <a:solidFill>
+            <a:srgbClr val="D9C089"/>
+          </a:solidFill>
+          <a:ln>
+            <a:noFill/>
+          </a:ln>
+        </p:spPr>
+        <p:style>
+          <a:lnRef idx="1">
+            <a:schemeClr val="accent1"/>
+          </a:lnRef>
+          <a:fillRef idx="3">
+            <a:schemeClr val="accent1"/>
+          </a:fillRef>
+          <a:effectRef idx="2">
+            <a:schemeClr val="accent1"/>
+          </a:effectRef>
+          <a:fontRef idx="minor">
+            <a:schemeClr val="lt1"/>
+          </a:fontRef>
+        </p:style>
+        <p:txBody>
+          <a:bodyPr rtlCol="0" anchor="ctr"/>
+          <a:lstStyle/>
+          <a:p>
+            <a:pPr algn="ctr"/>
+          </a:p>
+        </p:txBody>
+      </p:sp>
+      <p:sp>
+        <p:nvSpPr>
+          <p:cNvPr id="7" name="TextBox 6"/>
+          <p:cNvSpPr txBox="1"/>
+          <p:nvPr/>
+        </p:nvSpPr>
+        <p:spPr>
+          <a:xfrm>
+            <a:off x="813816" y="502920"/>
+            <a:ext cx="10634472" cy="685800"/>
+          </a:xfrm>
+          <a:prstGeom prst="rect">
+            <a:avLst/>
+          </a:prstGeom>
+          <a:noFill/>
+        </p:spPr>
+        <p:txBody>
+          <a:bodyPr wrap="square">
+            <a:spAutoFit/>
+          </a:bodyPr>
+          <a:lstStyle/>
+          <a:p>
+            <a:pPr algn="l"/>
+            <a:r>
+              <a:rPr sz="2400" b="1" i="0">
+                <a:solidFill>
+                  <a:srgbClr val="1F2C56"/>
+                </a:solidFill>
+                <a:latin typeface="Arial"/>
+              </a:rPr>
+              <a:t>Reflexion und Selbstcheck</a:t>
+            </a:r>
+          </a:p>
+        </p:txBody>
+      </p:sp>
+      <p:sp>
+        <p:nvSpPr>
+          <p:cNvPr id="8" name="TextBox 7"/>
+          <p:cNvSpPr txBox="1"/>
+          <p:nvPr/>
+        </p:nvSpPr>
+        <p:spPr>
+          <a:xfrm>
+            <a:off x="685800" y="1417320"/>
+            <a:ext cx="10817352" cy="4892040"/>
+          </a:xfrm>
+          <a:prstGeom prst="rect">
+            <a:avLst/>
+          </a:prstGeom>
+          <a:noFill/>
+        </p:spPr>
+        <p:txBody>
+          <a:bodyPr wrap="square" anchor="ctr">
+            <a:spAutoFit/>
+          </a:bodyPr>
+          <a:lstStyle/>
+          <a:p>
+            <a:pPr marL="190500" indent="-190500">
+              <a:spcBef>
+                <a:spcPts val="400"/>
+              </a:spcBef>
+              <a:spcAft>
+                <a:spcPts val="200"/>
+              </a:spcAft>
+            </a:pPr>
+            <a:r>
+              <a:rPr sz="1300">
+                <a:solidFill>
+                  <a:srgbClr val="3D5466"/>
+                </a:solidFill>
+                <a:latin typeface="Arial"/>
+              </a:rPr>
+              <a:t>▸  Welcher reale Kunde in Ihrem Portfolio käme für ein Planungsmodell in Frage?</a:t>
+            </a:r>
+          </a:p>
+          <a:p>
+            <a:pPr marL="190500" indent="-190500">
+              <a:spcBef>
+                <a:spcPts val="400"/>
+              </a:spcBef>
+              <a:spcAft>
+                <a:spcPts val="200"/>
+              </a:spcAft>
+            </a:pPr>
+            <a:r>
+              <a:rPr sz="1300">
+                <a:solidFill>
+                  <a:srgbClr val="3D5466"/>
+                </a:solidFill>
+                <a:latin typeface="Arial"/>
+              </a:rPr>
+              <a:t>▸  An welcher Annahme würde Ihr Modell am ehesten scheitern – und wie testen Sie das?</a:t>
+            </a:r>
+          </a:p>
+          <a:p>
+            <a:pPr marL="190500" indent="-190500">
+              <a:spcBef>
+                <a:spcPts val="400"/>
+              </a:spcBef>
+              <a:spcAft>
+                <a:spcPts val="200"/>
+              </a:spcAft>
+            </a:pPr>
+            <a:r>
+              <a:rPr sz="1300">
+                <a:solidFill>
+                  <a:srgbClr val="3D5466"/>
+                </a:solidFill>
+                <a:latin typeface="Arial"/>
+              </a:rPr>
+              <a:t>▸  Wie erklären Sie einem Unternehmer den DSCR in einem Satz?</a:t>
+            </a:r>
+          </a:p>
+        </p:txBody>
+      </p:sp>
+      <p:sp>
+        <p:nvSpPr>
+          <p:cNvPr id="9" name="Rectangle 8"/>
+          <p:cNvSpPr/>
+          <p:nvPr/>
+        </p:nvSpPr>
+        <p:spPr>
+          <a:xfrm>
+            <a:off x="0" y="6510528"/>
+            <a:ext cx="12188952" cy="347472"/>
+          </a:xfrm>
+          <a:prstGeom prst="rect">
+            <a:avLst/>
+          </a:prstGeom>
+          <a:solidFill>
+            <a:srgbClr val="0A1937"/>
+          </a:solidFill>
+          <a:ln>
+            <a:noFill/>
+          </a:ln>
+        </p:spPr>
+        <p:style>
+          <a:lnRef idx="1">
+            <a:schemeClr val="accent1"/>
+          </a:lnRef>
+          <a:fillRef idx="3">
+            <a:schemeClr val="accent1"/>
+          </a:fillRef>
+          <a:effectRef idx="2">
+            <a:schemeClr val="accent1"/>
+          </a:effectRef>
+          <a:fontRef idx="minor">
+            <a:schemeClr val="lt1"/>
+          </a:fontRef>
+        </p:style>
+        <p:txBody>
+          <a:bodyPr rtlCol="0" anchor="ctr"/>
+          <a:lstStyle/>
+          <a:p>
+            <a:pPr algn="ctr"/>
+          </a:p>
+        </p:txBody>
+      </p:sp>
+      <p:sp>
+        <p:nvSpPr>
+          <p:cNvPr id="10" name="TextBox 9"/>
           <p:cNvSpPr txBox="1"/>
           <p:nvPr/>
         </p:nvSpPr>
@@ -5896,7 +13635,7 @@
             <a:avLst/>
           </a:prstGeom>
           <a:solidFill>
-            <a:srgbClr val="EDEDF3"/>
+            <a:srgbClr val="1F2C56"/>
           </a:solidFill>
           <a:ln>
             <a:noFill/>
@@ -5926,57 +13665,14 @@
       </p:sp>
       <p:sp>
         <p:nvSpPr>
-          <p:cNvPr id="3" name="Rectangle 2"/>
-          <p:cNvSpPr/>
-          <p:nvPr/>
-        </p:nvSpPr>
-        <p:spPr>
-          <a:xfrm>
-            <a:off x="0" y="0"/>
-            <a:ext cx="12188952" cy="50292"/>
-          </a:xfrm>
-          <a:prstGeom prst="rect">
-            <a:avLst/>
-          </a:prstGeom>
-          <a:solidFill>
-            <a:srgbClr val="1F2C56"/>
-          </a:solidFill>
-          <a:ln>
-            <a:noFill/>
-          </a:ln>
-        </p:spPr>
-        <p:style>
-          <a:lnRef idx="1">
-            <a:schemeClr val="accent1"/>
-          </a:lnRef>
-          <a:fillRef idx="3">
-            <a:schemeClr val="accent1"/>
-          </a:fillRef>
-          <a:effectRef idx="2">
-            <a:schemeClr val="accent1"/>
-          </a:effectRef>
-          <a:fontRef idx="minor">
-            <a:schemeClr val="lt1"/>
-          </a:fontRef>
-        </p:style>
-        <p:txBody>
-          <a:bodyPr rtlCol="0" anchor="ctr"/>
-          <a:lstStyle/>
-          <a:p>
-            <a:pPr algn="ctr"/>
-          </a:p>
-        </p:txBody>
-      </p:sp>
-      <p:sp>
-        <p:nvSpPr>
-          <p:cNvPr id="4" name="TextBox 3"/>
+          <p:cNvPr id="3" name="TextBox 2"/>
           <p:cNvSpPr txBox="1"/>
           <p:nvPr/>
         </p:nvSpPr>
         <p:spPr>
           <a:xfrm>
-            <a:off x="685800" y="109728"/>
-            <a:ext cx="10817352" cy="228600"/>
+            <a:off x="685800" y="2377440"/>
+            <a:ext cx="10817352" cy="365760"/>
           </a:xfrm>
           <a:prstGeom prst="rect">
             <a:avLst/>
@@ -5991,70 +13687,27 @@
           <a:p>
             <a:pPr algn="l"/>
             <a:r>
-              <a:rPr sz="750">
-                <a:solidFill>
-                  <a:srgbClr val="78808C"/>
+              <a:rPr sz="1200">
+                <a:solidFill>
+                  <a:srgbClr val="D9C089"/>
                 </a:solidFill>
                 <a:latin typeface="Consolas"/>
               </a:rPr>
-              <a:t>M23  ·  INHALT</a:t>
-            </a:r>
-          </a:p>
-        </p:txBody>
-      </p:sp>
-      <p:sp>
-        <p:nvSpPr>
-          <p:cNvPr id="5" name="Rectangle 4"/>
+              <a:t>09:00–09:20</a:t>
+            </a:r>
+          </a:p>
+        </p:txBody>
+      </p:sp>
+      <p:sp>
+        <p:nvSpPr>
+          <p:cNvPr id="4" name="Rectangle 3"/>
           <p:cNvSpPr/>
           <p:nvPr/>
         </p:nvSpPr>
         <p:spPr>
           <a:xfrm>
-            <a:off x="0" y="1234440"/>
-            <a:ext cx="12188952" cy="12700"/>
-          </a:xfrm>
-          <a:prstGeom prst="rect">
-            <a:avLst/>
-          </a:prstGeom>
-          <a:solidFill>
-            <a:srgbClr val="D8DFE4"/>
-          </a:solidFill>
-          <a:ln>
-            <a:noFill/>
-          </a:ln>
-        </p:spPr>
-        <p:style>
-          <a:lnRef idx="1">
-            <a:schemeClr val="accent1"/>
-          </a:lnRef>
-          <a:fillRef idx="3">
-            <a:schemeClr val="accent1"/>
-          </a:fillRef>
-          <a:effectRef idx="2">
-            <a:schemeClr val="accent1"/>
-          </a:effectRef>
-          <a:fontRef idx="minor">
-            <a:schemeClr val="lt1"/>
-          </a:fontRef>
-        </p:style>
-        <p:txBody>
-          <a:bodyPr rtlCol="0" anchor="ctr"/>
-          <a:lstStyle/>
-          <a:p>
-            <a:pPr algn="ctr"/>
-          </a:p>
-        </p:txBody>
-      </p:sp>
-      <p:sp>
-        <p:nvSpPr>
-          <p:cNvPr id="6" name="Rectangle 5"/>
-          <p:cNvSpPr/>
-          <p:nvPr/>
-        </p:nvSpPr>
-        <p:spPr>
-          <a:xfrm>
-            <a:off x="685800" y="502920"/>
-            <a:ext cx="36576" cy="658368"/>
+            <a:off x="685800" y="2788920"/>
+            <a:ext cx="548640" cy="38100"/>
           </a:xfrm>
           <a:prstGeom prst="rect">
             <a:avLst/>
@@ -6090,14 +13743,14 @@
       </p:sp>
       <p:sp>
         <p:nvSpPr>
-          <p:cNvPr id="7" name="TextBox 6"/>
+          <p:cNvPr id="5" name="TextBox 4"/>
           <p:cNvSpPr txBox="1"/>
           <p:nvPr/>
         </p:nvSpPr>
         <p:spPr>
           <a:xfrm>
-            <a:off x="813816" y="502920"/>
-            <a:ext cx="10634472" cy="685800"/>
+            <a:off x="685800" y="3017520"/>
+            <a:ext cx="10817352" cy="1463040"/>
           </a:xfrm>
           <a:prstGeom prst="rect">
             <a:avLst/>
@@ -6112,27 +13765,27 @@
           <a:p>
             <a:pPr algn="l"/>
             <a:r>
-              <a:rPr sz="2400" b="1" i="0">
-                <a:solidFill>
-                  <a:srgbClr val="1F2C56"/>
+              <a:rPr sz="4000" b="1" i="0">
+                <a:solidFill>
+                  <a:srgbClr val="FFFFFF"/>
                 </a:solidFill>
                 <a:latin typeface="Arial"/>
               </a:rPr>
-              <a:t>Theorie-Input: Das integrierte Planungsmodell</a:t>
-            </a:r>
-          </a:p>
-        </p:txBody>
-      </p:sp>
-      <p:sp>
-        <p:nvSpPr>
-          <p:cNvPr id="8" name="TextBox 7"/>
+              <a:t>Einstieg</a:t>
+            </a:r>
+          </a:p>
+        </p:txBody>
+      </p:sp>
+      <p:sp>
+        <p:nvSpPr>
+          <p:cNvPr id="6" name="TextBox 5"/>
           <p:cNvSpPr txBox="1"/>
           <p:nvPr/>
         </p:nvSpPr>
         <p:spPr>
           <a:xfrm>
-            <a:off x="685800" y="1417320"/>
-            <a:ext cx="10817352" cy="4892040"/>
+            <a:off x="685800" y="4480560"/>
+            <a:ext cx="8653881" cy="1280160"/>
           </a:xfrm>
           <a:prstGeom prst="rect">
             <a:avLst/>
@@ -6140,160 +13793,34 @@
           <a:noFill/>
         </p:spPr>
         <p:txBody>
-          <a:bodyPr wrap="square" anchor="ctr">
+          <a:bodyPr wrap="square">
             <a:spAutoFit/>
           </a:bodyPr>
           <a:lstStyle/>
           <a:p>
-            <a:pPr>
-              <a:spcBef>
-                <a:spcPts val="1000"/>
-              </a:spcBef>
-              <a:spcAft>
-                <a:spcPts val="200"/>
-              </a:spcAft>
-            </a:pPr>
-            <a:r>
-              <a:rPr sz="800" b="1">
-                <a:solidFill>
-                  <a:srgbClr val="78808C"/>
-                </a:solidFill>
-                <a:latin typeface="Consolas"/>
-              </a:rPr>
-              <a:t>DIE DREI RECHENWERKE UND IHRE VERKNÜPFUNG</a:t>
-            </a:r>
-          </a:p>
-          <a:p>
-            <a:pPr marL="190500" indent="-190500">
-              <a:spcBef>
-                <a:spcPts val="400"/>
-              </a:spcBef>
-              <a:spcAft>
-                <a:spcPts val="200"/>
-              </a:spcAft>
-            </a:pPr>
-            <a:r>
-              <a:rPr sz="1300">
-                <a:solidFill>
-                  <a:srgbClr val="3D5466"/>
+            <a:pPr algn="l"/>
+            <a:r>
+              <a:rPr sz="1600" b="0" i="0">
+                <a:solidFill>
+                  <a:srgbClr val="C8D2E6"/>
                 </a:solidFill>
                 <a:latin typeface="Arial"/>
               </a:rPr>
-              <a:t>▸  Ein integriertes Modell verbindet GuV, Bilanz und Cashflow so, dass sie sich nicht widersprechen können:</a:t>
-            </a:r>
-          </a:p>
-          <a:p>
-            <a:pPr marL="190500" indent="-190500">
-              <a:spcBef>
-                <a:spcPts val="400"/>
-              </a:spcBef>
-              <a:spcAft>
-                <a:spcPts val="200"/>
-              </a:spcAft>
-            </a:pPr>
-            <a:r>
-              <a:rPr sz="1300">
-                <a:solidFill>
-                  <a:srgbClr val="3D5466"/>
-                </a:solidFill>
-                <a:latin typeface="Arial"/>
-              </a:rPr>
-              <a:t>▸  Das Periodenergebnis (GuV) erhöht oder mindert das Eigenkapital (Bilanz).</a:t>
-            </a:r>
-          </a:p>
-          <a:p>
-            <a:pPr marL="190500" indent="-190500">
-              <a:spcBef>
-                <a:spcPts val="400"/>
-              </a:spcBef>
-              <a:spcAft>
-                <a:spcPts val="200"/>
-              </a:spcAft>
-            </a:pPr>
-            <a:r>
-              <a:rPr sz="1300">
-                <a:solidFill>
-                  <a:srgbClr val="3D5466"/>
-                </a:solidFill>
-                <a:latin typeface="Arial"/>
-              </a:rPr>
-              <a:t>▸  Investitionen und Finanzierung (Bilanz/Debt Schedule) erzeugen den Investitions- und Finanzierungs-Cashflow.</a:t>
-            </a:r>
-          </a:p>
-          <a:p>
-            <a:pPr marL="190500" indent="-190500">
-              <a:spcBef>
-                <a:spcPts val="400"/>
-              </a:spcBef>
-              <a:spcAft>
-                <a:spcPts val="200"/>
-              </a:spcAft>
-            </a:pPr>
-            <a:r>
-              <a:rPr sz="1300">
-                <a:solidFill>
-                  <a:srgbClr val="3D5466"/>
-                </a:solidFill>
-                <a:latin typeface="Arial"/>
-              </a:rPr>
-              <a:t>▸  Die Veränderung des Working Capital (Vorräte, Forderungen, Verbindlichkeiten) ist das Bindeglied zwischen Ergebnis und operativem Cashflow.</a:t>
-            </a:r>
-          </a:p>
-        </p:txBody>
-      </p:sp>
-      <p:sp>
-        <p:nvSpPr>
-          <p:cNvPr id="9" name="Rectangle 8"/>
-          <p:cNvSpPr/>
-          <p:nvPr/>
-        </p:nvSpPr>
-        <p:spPr>
-          <a:xfrm>
-            <a:off x="0" y="6510528"/>
-            <a:ext cx="12188952" cy="347472"/>
-          </a:xfrm>
-          <a:prstGeom prst="rect">
-            <a:avLst/>
-          </a:prstGeom>
-          <a:solidFill>
-            <a:srgbClr val="0A1937"/>
-          </a:solidFill>
-          <a:ln>
-            <a:noFill/>
-          </a:ln>
-        </p:spPr>
-        <p:style>
-          <a:lnRef idx="1">
-            <a:schemeClr val="accent1"/>
-          </a:lnRef>
-          <a:fillRef idx="3">
-            <a:schemeClr val="accent1"/>
-          </a:fillRef>
-          <a:effectRef idx="2">
-            <a:schemeClr val="accent1"/>
-          </a:effectRef>
-          <a:fontRef idx="minor">
-            <a:schemeClr val="lt1"/>
-          </a:fontRef>
-        </p:style>
-        <p:txBody>
-          <a:bodyPr rtlCol="0" anchor="ctr"/>
-          <a:lstStyle/>
-          <a:p>
-            <a:pPr algn="ctr"/>
-          </a:p>
-        </p:txBody>
-      </p:sp>
-      <p:sp>
-        <p:nvSpPr>
-          <p:cNvPr id="10" name="TextBox 9"/>
+              <a:t>Vom Bilanzanalysten zum Planungspartner werden.</a:t>
+            </a:r>
+          </a:p>
+        </p:txBody>
+      </p:sp>
+      <p:sp>
+        <p:nvSpPr>
+          <p:cNvPr id="7" name="TextBox 6"/>
           <p:cNvSpPr txBox="1"/>
           <p:nvPr/>
         </p:nvSpPr>
         <p:spPr>
           <a:xfrm>
-            <a:off x="685800" y="6583680"/>
-            <a:ext cx="6490411" cy="256032"/>
+            <a:off x="685800" y="6355080"/>
+            <a:ext cx="10817352" cy="274320"/>
           </a:xfrm>
           <a:prstGeom prst="rect">
             <a:avLst/>
@@ -6310,7 +13837,7 @@
             <a:r>
               <a:rPr sz="700">
                 <a:solidFill>
-                  <a:srgbClr val="A0B4D2"/>
+                  <a:srgbClr val="8CA0C3"/>
                 </a:solidFill>
                 <a:latin typeface="Consolas"/>
               </a:rPr>
@@ -6453,7 +13980,7 @@
                 </a:solidFill>
                 <a:latin typeface="Consolas"/>
               </a:rPr>
-              <a:t>M23  ·  ARBEITSBLATT</a:t>
+              <a:t>M23  ·  INHALT</a:t>
             </a:r>
           </a:p>
         </p:txBody>
@@ -6574,7 +14101,7 @@
                 </a:solidFill>
                 <a:latin typeface="Arial"/>
               </a:rPr>
-              <a:t>Praxisfall: Garten- und Landschaftsbau Musterregion GmbH</a:t>
+              <a:t>Warum Planung? Der Blick nach vorn</a:t>
             </a:r>
           </a:p>
         </p:txBody>
@@ -6587,8 +14114,8 @@
         </p:nvSpPr>
         <p:spPr>
           <a:xfrm>
-            <a:off x="685800" y="1554480"/>
-            <a:ext cx="10817352" cy="3840480"/>
+            <a:off x="685800" y="1417320"/>
+            <a:ext cx="10817352" cy="4892040"/>
           </a:xfrm>
           <a:prstGeom prst="rect">
             <a:avLst/>
@@ -6596,10 +14123,29 @@
           <a:noFill/>
         </p:spPr>
         <p:txBody>
-          <a:bodyPr wrap="square">
+          <a:bodyPr wrap="square" anchor="ctr">
             <a:spAutoFit/>
           </a:bodyPr>
           <a:lstStyle/>
+          <a:p>
+            <a:pPr marL="177800" indent="-177800">
+              <a:spcBef>
+                <a:spcPts val="600"/>
+              </a:spcBef>
+              <a:spcAft>
+                <a:spcPts val="200"/>
+              </a:spcAft>
+            </a:pPr>
+            <a:r>
+              <a:rPr sz="1200" i="1">
+                <a:solidFill>
+                  <a:srgbClr val="3D5466"/>
+                </a:solidFill>
+                <a:latin typeface="Arial"/>
+              </a:rPr>
+              <a:t>→  Ein Plan, der sich nicht schließt, ist kein Plan – prüfe GuV, Bilanz und Cashflow gegeneinander.</a:t>
+            </a:r>
+          </a:p>
           <a:p>
             <a:pPr marL="190500" indent="-190500">
               <a:spcBef>
@@ -6610,13 +14156,13 @@
               </a:spcAft>
             </a:pPr>
             <a:r>
-              <a:rPr sz="1400">
+              <a:rPr sz="1300">
                 <a:solidFill>
                   <a:srgbClr val="3D5466"/>
                 </a:solidFill>
                 <a:latin typeface="Arial"/>
               </a:rPr>
-              <a:t>▸  Unternehmensportrait (anonymisiert, branchentypisch)</a:t>
+              <a:t>▸  Der Jahresabschluss erklärt die Vergangenheit; die Kreditentscheidung fragt nach der Zukunft.</a:t>
             </a:r>
           </a:p>
           <a:p>
@@ -6629,70 +14175,13 @@
               </a:spcAft>
             </a:pPr>
             <a:r>
-              <a:rPr sz="1400">
+              <a:rPr sz="1300">
                 <a:solidFill>
                   <a:srgbClr val="3D5466"/>
                 </a:solidFill>
                 <a:latin typeface="Arial"/>
               </a:rPr>
-              <a:t>▸  Ist-Zahlen aus der agree-Auswertung (TEUR):</a:t>
-            </a:r>
-          </a:p>
-          <a:p>
-            <a:pPr marL="190500" indent="-190500">
-              <a:spcBef>
-                <a:spcPts val="400"/>
-              </a:spcBef>
-              <a:spcAft>
-                <a:spcPts val="200"/>
-              </a:spcAft>
-            </a:pPr>
-            <a:r>
-              <a:rPr sz="1400">
-                <a:solidFill>
-                  <a:srgbClr val="3D5466"/>
-                </a:solidFill>
-                <a:latin typeface="Arial"/>
-              </a:rPr>
-              <a:t>▸  Die folgende Handlungsempfehlung verknüpft typische Planungsbefunde mit der passenden Finanzierungsreaktion – nutzen Sie sie bei der Auswertung des Falls.</a:t>
-            </a:r>
-          </a:p>
-          <a:p>
-            <a:pPr marL="190500" indent="-190500">
-              <a:spcBef>
-                <a:spcPts val="400"/>
-              </a:spcBef>
-              <a:spcAft>
-                <a:spcPts val="200"/>
-              </a:spcAft>
-            </a:pPr>
-            <a:r>
-              <a:rPr sz="1400">
-                <a:solidFill>
-                  <a:srgbClr val="3D5466"/>
-                </a:solidFill>
-                <a:latin typeface="Arial"/>
-              </a:rPr>
-              <a:t>▸  agree-Export sichten</a:t>
-            </a:r>
-          </a:p>
-          <a:p>
-            <a:pPr marL="190500" indent="-190500">
-              <a:spcBef>
-                <a:spcPts val="400"/>
-              </a:spcBef>
-              <a:spcAft>
-                <a:spcPts val="200"/>
-              </a:spcAft>
-            </a:pPr>
-            <a:r>
-              <a:rPr sz="1400">
-                <a:solidFill>
-                  <a:srgbClr val="3D5466"/>
-                </a:solidFill>
-                <a:latin typeface="Arial"/>
-              </a:rPr>
-              <a:t>▸  Anleitung: Öffnen Sie im Planungsmodell das Blatt Input (agree Daten). Beantworten Sie:</a:t>
+              <a:t>▸  Financial Modelling überführt die Analyse aus M01/M04 in eine integrierte, zukunftsgerichtete Planung.</a:t>
             </a:r>
           </a:p>
         </p:txBody>
@@ -6700,84 +14189,6 @@
       <p:sp>
         <p:nvSpPr>
           <p:cNvPr id="9" name="Rectangle 8"/>
-          <p:cNvSpPr/>
-          <p:nvPr/>
-        </p:nvSpPr>
-        <p:spPr>
-          <a:xfrm>
-            <a:off x="685800" y="5486400"/>
-            <a:ext cx="10817352" cy="640080"/>
-          </a:xfrm>
-          <a:prstGeom prst="rect">
-            <a:avLst/>
-          </a:prstGeom>
-          <a:solidFill>
-            <a:srgbClr val="1F2C56"/>
-          </a:solidFill>
-          <a:ln>
-            <a:noFill/>
-          </a:ln>
-        </p:spPr>
-        <p:style>
-          <a:lnRef idx="1">
-            <a:schemeClr val="accent1"/>
-          </a:lnRef>
-          <a:fillRef idx="3">
-            <a:schemeClr val="accent1"/>
-          </a:fillRef>
-          <a:effectRef idx="2">
-            <a:schemeClr val="accent1"/>
-          </a:effectRef>
-          <a:fontRef idx="minor">
-            <a:schemeClr val="lt1"/>
-          </a:fontRef>
-        </p:style>
-        <p:txBody>
-          <a:bodyPr rtlCol="0" anchor="ctr"/>
-          <a:lstStyle/>
-          <a:p>
-            <a:pPr algn="ctr"/>
-          </a:p>
-        </p:txBody>
-      </p:sp>
-      <p:sp>
-        <p:nvSpPr>
-          <p:cNvPr id="10" name="TextBox 9"/>
-          <p:cNvSpPr txBox="1"/>
-          <p:nvPr/>
-        </p:nvSpPr>
-        <p:spPr>
-          <a:xfrm>
-            <a:off x="868680" y="5596128"/>
-            <a:ext cx="10451592" cy="457200"/>
-          </a:xfrm>
-          <a:prstGeom prst="rect">
-            <a:avLst/>
-          </a:prstGeom>
-          <a:noFill/>
-        </p:spPr>
-        <p:txBody>
-          <a:bodyPr wrap="square">
-            <a:spAutoFit/>
-          </a:bodyPr>
-          <a:lstStyle/>
-          <a:p>
-            <a:pPr algn="l"/>
-            <a:r>
-              <a:rPr sz="1300" b="1" i="0">
-                <a:solidFill>
-                  <a:srgbClr val="FFFFFF"/>
-                </a:solidFill>
-                <a:latin typeface="Arial"/>
-              </a:rPr>
-              <a:t>→  Bearbeitung im Teilnehmer-Workbook (Arbeitsblatt mit Ausfüllfeldern)</a:t>
-            </a:r>
-          </a:p>
-        </p:txBody>
-      </p:sp>
-      <p:sp>
-        <p:nvSpPr>
-          <p:cNvPr id="11" name="Rectangle 10"/>
           <p:cNvSpPr/>
           <p:nvPr/>
         </p:nvSpPr>
@@ -6820,7 +14231,7 @@
       </p:sp>
       <p:sp>
         <p:nvSpPr>
-          <p:cNvPr id="12" name="TextBox 11"/>
+          <p:cNvPr id="10" name="TextBox 9"/>
           <p:cNvSpPr txBox="1"/>
           <p:nvPr/>
         </p:nvSpPr>
@@ -6886,7 +14297,7 @@
             <a:avLst/>
           </a:prstGeom>
           <a:solidFill>
-            <a:srgbClr val="FFFFFF"/>
+            <a:srgbClr val="1F2C56"/>
           </a:solidFill>
           <a:ln>
             <a:noFill/>
@@ -6916,57 +14327,14 @@
       </p:sp>
       <p:sp>
         <p:nvSpPr>
-          <p:cNvPr id="3" name="Rectangle 2"/>
-          <p:cNvSpPr/>
-          <p:nvPr/>
-        </p:nvSpPr>
-        <p:spPr>
-          <a:xfrm>
-            <a:off x="0" y="0"/>
-            <a:ext cx="12188952" cy="50292"/>
-          </a:xfrm>
-          <a:prstGeom prst="rect">
-            <a:avLst/>
-          </a:prstGeom>
-          <a:solidFill>
-            <a:srgbClr val="1F2C56"/>
-          </a:solidFill>
-          <a:ln>
-            <a:noFill/>
-          </a:ln>
-        </p:spPr>
-        <p:style>
-          <a:lnRef idx="1">
-            <a:schemeClr val="accent1"/>
-          </a:lnRef>
-          <a:fillRef idx="3">
-            <a:schemeClr val="accent1"/>
-          </a:fillRef>
-          <a:effectRef idx="2">
-            <a:schemeClr val="accent1"/>
-          </a:effectRef>
-          <a:fontRef idx="minor">
-            <a:schemeClr val="lt1"/>
-          </a:fontRef>
-        </p:style>
-        <p:txBody>
-          <a:bodyPr rtlCol="0" anchor="ctr"/>
-          <a:lstStyle/>
-          <a:p>
-            <a:pPr algn="ctr"/>
-          </a:p>
-        </p:txBody>
-      </p:sp>
-      <p:sp>
-        <p:nvSpPr>
-          <p:cNvPr id="4" name="TextBox 3"/>
+          <p:cNvPr id="3" name="TextBox 2"/>
           <p:cNvSpPr txBox="1"/>
           <p:nvPr/>
         </p:nvSpPr>
         <p:spPr>
           <a:xfrm>
-            <a:off x="685800" y="109728"/>
-            <a:ext cx="10817352" cy="228600"/>
+            <a:off x="685800" y="2377440"/>
+            <a:ext cx="10817352" cy="365760"/>
           </a:xfrm>
           <a:prstGeom prst="rect">
             <a:avLst/>
@@ -6981,62 +14349,27 @@
           <a:p>
             <a:pPr algn="l"/>
             <a:r>
-              <a:rPr sz="750">
-                <a:solidFill>
-                  <a:srgbClr val="78808C"/>
+              <a:rPr sz="1200">
+                <a:solidFill>
+                  <a:srgbClr val="D9C089"/>
                 </a:solidFill>
                 <a:latin typeface="Consolas"/>
               </a:rPr>
-              <a:t>M23  ·  SCHAUBILD</a:t>
-            </a:r>
-          </a:p>
-        </p:txBody>
-      </p:sp>
-      <p:sp>
-        <p:nvSpPr>
-          <p:cNvPr id="5" name="TextBox 4"/>
-          <p:cNvSpPr txBox="1"/>
-          <p:nvPr/>
-        </p:nvSpPr>
-        <p:spPr>
-          <a:xfrm>
-            <a:off x="685800" y="502920"/>
-            <a:ext cx="10817352" cy="594360"/>
-          </a:xfrm>
-          <a:prstGeom prst="rect">
-            <a:avLst/>
-          </a:prstGeom>
-          <a:noFill/>
-        </p:spPr>
-        <p:txBody>
-          <a:bodyPr wrap="square">
-            <a:spAutoFit/>
-          </a:bodyPr>
-          <a:lstStyle/>
-          <a:p>
-            <a:pPr algn="l"/>
-            <a:r>
-              <a:rPr sz="2000" b="1" i="0">
-                <a:solidFill>
-                  <a:srgbClr val="1F2C56"/>
-                </a:solidFill>
-                <a:latin typeface="Arial"/>
-              </a:rPr>
-              <a:t>Architektur des integrierten Planungsmodells</a:t>
-            </a:r>
-          </a:p>
-        </p:txBody>
-      </p:sp>
-      <p:sp>
-        <p:nvSpPr>
-          <p:cNvPr id="6" name="Rectangle 5"/>
+              <a:t>09:20–11:00</a:t>
+            </a:r>
+          </a:p>
+        </p:txBody>
+      </p:sp>
+      <p:sp>
+        <p:nvSpPr>
+          <p:cNvPr id="4" name="Rectangle 3"/>
           <p:cNvSpPr/>
           <p:nvPr/>
         </p:nvSpPr>
         <p:spPr>
           <a:xfrm>
-            <a:off x="685800" y="1143000"/>
-            <a:ext cx="10817352" cy="25400"/>
+            <a:off x="685800" y="2788920"/>
+            <a:ext cx="548640" cy="38100"/>
           </a:xfrm>
           <a:prstGeom prst="rect">
             <a:avLst/>
@@ -7070,83 +14403,86 @@
           </a:p>
         </p:txBody>
       </p:sp>
-      <p:pic>
-        <p:nvPicPr>
-          <p:cNvPr id="7" name="Picture 6" descr="image.png"/>
-          <p:cNvPicPr>
-            <a:picLocks noChangeAspect="1"/>
-          </p:cNvPicPr>
-          <p:nvPr/>
-        </p:nvPicPr>
-        <p:blipFill>
-          <a:blip r:embed="rId2"/>
-          <a:stretch>
-            <a:fillRect/>
-          </a:stretch>
-        </p:blipFill>
-        <p:spPr>
-          <a:xfrm>
-            <a:off x="2009463" y="1325880"/>
-            <a:ext cx="8170026" cy="4937760"/>
-          </a:xfrm>
-          <a:prstGeom prst="rect">
-            <a:avLst/>
-          </a:prstGeom>
-        </p:spPr>
-      </p:pic>
-      <p:sp>
-        <p:nvSpPr>
-          <p:cNvPr id="8" name="Rectangle 7"/>
-          <p:cNvSpPr/>
-          <p:nvPr/>
-        </p:nvSpPr>
-        <p:spPr>
-          <a:xfrm>
-            <a:off x="0" y="6510528"/>
-            <a:ext cx="12188952" cy="347472"/>
-          </a:xfrm>
-          <a:prstGeom prst="rect">
-            <a:avLst/>
-          </a:prstGeom>
-          <a:solidFill>
-            <a:srgbClr val="0A1937"/>
-          </a:solidFill>
-          <a:ln>
-            <a:noFill/>
-          </a:ln>
-        </p:spPr>
-        <p:style>
-          <a:lnRef idx="1">
-            <a:schemeClr val="accent1"/>
-          </a:lnRef>
-          <a:fillRef idx="3">
-            <a:schemeClr val="accent1"/>
-          </a:fillRef>
-          <a:effectRef idx="2">
-            <a:schemeClr val="accent1"/>
-          </a:effectRef>
-          <a:fontRef idx="minor">
-            <a:schemeClr val="lt1"/>
-          </a:fontRef>
-        </p:style>
-        <p:txBody>
-          <a:bodyPr rtlCol="0" anchor="ctr"/>
-          <a:lstStyle/>
-          <a:p>
-            <a:pPr algn="ctr"/>
-          </a:p>
-        </p:txBody>
-      </p:sp>
-      <p:sp>
-        <p:nvSpPr>
-          <p:cNvPr id="9" name="TextBox 8"/>
+      <p:sp>
+        <p:nvSpPr>
+          <p:cNvPr id="5" name="TextBox 4"/>
           <p:cNvSpPr txBox="1"/>
           <p:nvPr/>
         </p:nvSpPr>
         <p:spPr>
           <a:xfrm>
-            <a:off x="685800" y="6583680"/>
-            <a:ext cx="6490411" cy="256032"/>
+            <a:off x="685800" y="3017520"/>
+            <a:ext cx="10817352" cy="1463040"/>
+          </a:xfrm>
+          <a:prstGeom prst="rect">
+            <a:avLst/>
+          </a:prstGeom>
+          <a:noFill/>
+        </p:spPr>
+        <p:txBody>
+          <a:bodyPr wrap="square">
+            <a:spAutoFit/>
+          </a:bodyPr>
+          <a:lstStyle/>
+          <a:p>
+            <a:pPr algn="l"/>
+            <a:r>
+              <a:rPr sz="4000" b="1" i="0">
+                <a:solidFill>
+                  <a:srgbClr val="FFFFFF"/>
+                </a:solidFill>
+                <a:latin typeface="Arial"/>
+              </a:rPr>
+              <a:t>Input 1 &amp; Übung 1: Modellarchitektur</a:t>
+            </a:r>
+          </a:p>
+        </p:txBody>
+      </p:sp>
+      <p:sp>
+        <p:nvSpPr>
+          <p:cNvPr id="6" name="TextBox 5"/>
+          <p:cNvSpPr txBox="1"/>
+          <p:nvPr/>
+        </p:nvSpPr>
+        <p:spPr>
+          <a:xfrm>
+            <a:off x="685800" y="4480560"/>
+            <a:ext cx="8653881" cy="1280160"/>
+          </a:xfrm>
+          <a:prstGeom prst="rect">
+            <a:avLst/>
+          </a:prstGeom>
+          <a:noFill/>
+        </p:spPr>
+        <p:txBody>
+          <a:bodyPr wrap="square">
+            <a:spAutoFit/>
+          </a:bodyPr>
+          <a:lstStyle/>
+          <a:p>
+            <a:pPr algn="l"/>
+            <a:r>
+              <a:rPr sz="1600" b="0" i="0">
+                <a:solidFill>
+                  <a:srgbClr val="C8D2E6"/>
+                </a:solidFill>
+                <a:latin typeface="Arial"/>
+              </a:rPr>
+              <a:t>Die Architektur des integrierten Modells verstehen und agree-Daten überführen.</a:t>
+            </a:r>
+          </a:p>
+        </p:txBody>
+      </p:sp>
+      <p:sp>
+        <p:nvSpPr>
+          <p:cNvPr id="7" name="TextBox 6"/>
+          <p:cNvSpPr txBox="1"/>
+          <p:nvPr/>
+        </p:nvSpPr>
+        <p:spPr>
+          <a:xfrm>
+            <a:off x="685800" y="6355080"/>
+            <a:ext cx="10817352" cy="274320"/>
           </a:xfrm>
           <a:prstGeom prst="rect">
             <a:avLst/>
@@ -7163,46 +14499,11 @@
             <a:r>
               <a:rPr sz="700">
                 <a:solidFill>
-                  <a:srgbClr val="A0B4D2"/>
+                  <a:srgbClr val="8CA0C3"/>
                 </a:solidFill>
                 <a:latin typeface="Consolas"/>
               </a:rPr>
               <a:t>FKB Campus  ·  M23</a:t>
-            </a:r>
-          </a:p>
-        </p:txBody>
-      </p:sp>
-      <p:sp>
-        <p:nvSpPr>
-          <p:cNvPr id="10" name="TextBox 9"/>
-          <p:cNvSpPr txBox="1"/>
-          <p:nvPr/>
-        </p:nvSpPr>
-        <p:spPr>
-          <a:xfrm>
-            <a:off x="7176211" y="6583680"/>
-            <a:ext cx="4326940" cy="256032"/>
-          </a:xfrm>
-          <a:prstGeom prst="rect">
-            <a:avLst/>
-          </a:prstGeom>
-          <a:noFill/>
-        </p:spPr>
-        <p:txBody>
-          <a:bodyPr wrap="none">
-            <a:spAutoFit/>
-          </a:bodyPr>
-          <a:lstStyle/>
-          <a:p>
-            <a:pPr algn="r"/>
-            <a:r>
-              <a:rPr sz="700">
-                <a:solidFill>
-                  <a:srgbClr val="A0B4D2"/>
-                </a:solidFill>
-                <a:latin typeface="Consolas"/>
-              </a:rPr>
-              <a:t>Schaubild</a:t>
             </a:r>
           </a:p>
         </p:txBody>
@@ -7240,7 +14541,7 @@
             <a:avLst/>
           </a:prstGeom>
           <a:solidFill>
-            <a:srgbClr val="FFFFFF"/>
+            <a:srgbClr val="EDEDF3"/>
           </a:solidFill>
           <a:ln>
             <a:noFill/>
@@ -7341,43 +14642,51 @@
                 </a:solidFill>
                 <a:latin typeface="Consolas"/>
               </a:rPr>
-              <a:t>M23  ·  SCHAUBILD</a:t>
-            </a:r>
-          </a:p>
-        </p:txBody>
-      </p:sp>
-      <p:sp>
-        <p:nvSpPr>
-          <p:cNvPr id="5" name="TextBox 4"/>
-          <p:cNvSpPr txBox="1"/>
-          <p:nvPr/>
-        </p:nvSpPr>
-        <p:spPr>
-          <a:xfrm>
-            <a:off x="685800" y="502920"/>
-            <a:ext cx="10817352" cy="594360"/>
-          </a:xfrm>
-          <a:prstGeom prst="rect">
-            <a:avLst/>
-          </a:prstGeom>
-          <a:noFill/>
-        </p:spPr>
-        <p:txBody>
-          <a:bodyPr wrap="square">
-            <a:spAutoFit/>
-          </a:bodyPr>
-          <a:lstStyle/>
-          <a:p>
-            <a:pPr algn="l"/>
-            <a:r>
-              <a:rPr sz="2000" b="1" i="0">
-                <a:solidFill>
-                  <a:srgbClr val="1F2C56"/>
-                </a:solidFill>
-                <a:latin typeface="Arial"/>
-              </a:rPr>
-              <a:t>Handlungsempfehlung</a:t>
-            </a:r>
+              <a:t>M23  ·  INHALT</a:t>
+            </a:r>
+          </a:p>
+        </p:txBody>
+      </p:sp>
+      <p:sp>
+        <p:nvSpPr>
+          <p:cNvPr id="5" name="Rectangle 4"/>
+          <p:cNvSpPr/>
+          <p:nvPr/>
+        </p:nvSpPr>
+        <p:spPr>
+          <a:xfrm>
+            <a:off x="0" y="1234440"/>
+            <a:ext cx="12188952" cy="12700"/>
+          </a:xfrm>
+          <a:prstGeom prst="rect">
+            <a:avLst/>
+          </a:prstGeom>
+          <a:solidFill>
+            <a:srgbClr val="D8DFE4"/>
+          </a:solidFill>
+          <a:ln>
+            <a:noFill/>
+          </a:ln>
+        </p:spPr>
+        <p:style>
+          <a:lnRef idx="1">
+            <a:schemeClr val="accent1"/>
+          </a:lnRef>
+          <a:fillRef idx="3">
+            <a:schemeClr val="accent1"/>
+          </a:fillRef>
+          <a:effectRef idx="2">
+            <a:schemeClr val="accent1"/>
+          </a:effectRef>
+          <a:fontRef idx="minor">
+            <a:schemeClr val="lt1"/>
+          </a:fontRef>
+        </p:style>
+        <p:txBody>
+          <a:bodyPr rtlCol="0" anchor="ctr"/>
+          <a:lstStyle/>
+          <a:p>
+            <a:pPr algn="ctr"/>
           </a:p>
         </p:txBody>
       </p:sp>
@@ -7389,8 +14698,8 @@
         </p:nvSpPr>
         <p:spPr>
           <a:xfrm>
-            <a:off x="685800" y="1143000"/>
-            <a:ext cx="10817352" cy="25400"/>
+            <a:off x="685800" y="502920"/>
+            <a:ext cx="36576" cy="658368"/>
           </a:xfrm>
           <a:prstGeom prst="rect">
             <a:avLst/>
@@ -7424,33 +14733,124 @@
           </a:p>
         </p:txBody>
       </p:sp>
-      <p:pic>
-        <p:nvPicPr>
-          <p:cNvPr id="7" name="Picture 6" descr="image.png"/>
-          <p:cNvPicPr>
-            <a:picLocks noChangeAspect="1"/>
-          </p:cNvPicPr>
-          <p:nvPr/>
-        </p:nvPicPr>
-        <p:blipFill>
-          <a:blip r:embed="rId2"/>
-          <a:stretch>
-            <a:fillRect/>
-          </a:stretch>
-        </p:blipFill>
-        <p:spPr>
-          <a:xfrm>
-            <a:off x="2303489" y="1325880"/>
-            <a:ext cx="7581973" cy="4937760"/>
-          </a:xfrm>
-          <a:prstGeom prst="rect">
-            <a:avLst/>
-          </a:prstGeom>
-        </p:spPr>
-      </p:pic>
-      <p:sp>
-        <p:nvSpPr>
-          <p:cNvPr id="8" name="Rectangle 7"/>
+      <p:sp>
+        <p:nvSpPr>
+          <p:cNvPr id="7" name="TextBox 6"/>
+          <p:cNvSpPr txBox="1"/>
+          <p:nvPr/>
+        </p:nvSpPr>
+        <p:spPr>
+          <a:xfrm>
+            <a:off x="813816" y="502920"/>
+            <a:ext cx="10634472" cy="685800"/>
+          </a:xfrm>
+          <a:prstGeom prst="rect">
+            <a:avLst/>
+          </a:prstGeom>
+          <a:noFill/>
+        </p:spPr>
+        <p:txBody>
+          <a:bodyPr wrap="square">
+            <a:spAutoFit/>
+          </a:bodyPr>
+          <a:lstStyle/>
+          <a:p>
+            <a:pPr algn="l"/>
+            <a:r>
+              <a:rPr sz="2400" b="1" i="0">
+                <a:solidFill>
+                  <a:srgbClr val="1F2C56"/>
+                </a:solidFill>
+                <a:latin typeface="Arial"/>
+              </a:rPr>
+              <a:t>Das integrierte Planungsmodell</a:t>
+            </a:r>
+          </a:p>
+        </p:txBody>
+      </p:sp>
+      <p:sp>
+        <p:nvSpPr>
+          <p:cNvPr id="8" name="TextBox 7"/>
+          <p:cNvSpPr txBox="1"/>
+          <p:nvPr/>
+        </p:nvSpPr>
+        <p:spPr>
+          <a:xfrm>
+            <a:off x="685800" y="1417320"/>
+            <a:ext cx="10817352" cy="4892040"/>
+          </a:xfrm>
+          <a:prstGeom prst="rect">
+            <a:avLst/>
+          </a:prstGeom>
+          <a:noFill/>
+        </p:spPr>
+        <p:txBody>
+          <a:bodyPr wrap="square" anchor="ctr">
+            <a:spAutoFit/>
+          </a:bodyPr>
+          <a:lstStyle/>
+          <a:p>
+            <a:pPr marL="177800" indent="-177800">
+              <a:spcBef>
+                <a:spcPts val="600"/>
+              </a:spcBef>
+              <a:spcAft>
+                <a:spcPts val="200"/>
+              </a:spcAft>
+            </a:pPr>
+            <a:r>
+              <a:rPr sz="1200" i="1">
+                <a:solidFill>
+                  <a:srgbClr val="3D5466"/>
+                </a:solidFill>
+                <a:latin typeface="Arial"/>
+              </a:rPr>
+              <a:t>→  GuV, Bilanz und Cashflow sind kein Nebeneinander, sondern ein geschlossenes System – jede Annahme wirkt in alle drei.</a:t>
+            </a:r>
+          </a:p>
+          <a:p>
+            <a:pPr marL="190500" indent="-190500">
+              <a:spcBef>
+                <a:spcPts val="400"/>
+              </a:spcBef>
+              <a:spcAft>
+                <a:spcPts val="200"/>
+              </a:spcAft>
+            </a:pPr>
+            <a:r>
+              <a:rPr sz="1300">
+                <a:solidFill>
+                  <a:srgbClr val="3D5466"/>
+                </a:solidFill>
+                <a:latin typeface="Arial"/>
+              </a:rPr>
+              <a:t>▸  Der agree-Export wird über eine Mapping-Tabelle ins Modell überführt.</a:t>
+            </a:r>
+          </a:p>
+          <a:p>
+            <a:pPr marL="190500" indent="-190500">
+              <a:spcBef>
+                <a:spcPts val="400"/>
+              </a:spcBef>
+              <a:spcAft>
+                <a:spcPts val="200"/>
+              </a:spcAft>
+            </a:pPr>
+            <a:r>
+              <a:rPr sz="1300">
+                <a:solidFill>
+                  <a:srgbClr val="3D5466"/>
+                </a:solidFill>
+                <a:latin typeface="Arial"/>
+              </a:rPr>
+              <a:t>▸  Die drei Rechenwerke schließen sich gegenseitig – der Bilanzausgleich ist der Härtetest.</a:t>
+            </a:r>
+          </a:p>
+        </p:txBody>
+      </p:sp>
+      <p:sp>
+        <p:nvSpPr>
+          <p:cNvPr id="9" name="Rectangle 8"/>
           <p:cNvSpPr/>
           <p:nvPr/>
         </p:nvSpPr>
@@ -7493,7 +14893,7 @@
       </p:sp>
       <p:sp>
         <p:nvSpPr>
-          <p:cNvPr id="9" name="TextBox 8"/>
+          <p:cNvPr id="10" name="TextBox 9"/>
           <p:cNvSpPr txBox="1"/>
           <p:nvPr/>
         </p:nvSpPr>
@@ -7522,41 +14922,6 @@
                 <a:latin typeface="Consolas"/>
               </a:rPr>
               <a:t>FKB Campus  ·  M23</a:t>
-            </a:r>
-          </a:p>
-        </p:txBody>
-      </p:sp>
-      <p:sp>
-        <p:nvSpPr>
-          <p:cNvPr id="10" name="TextBox 9"/>
-          <p:cNvSpPr txBox="1"/>
-          <p:nvPr/>
-        </p:nvSpPr>
-        <p:spPr>
-          <a:xfrm>
-            <a:off x="7176211" y="6583680"/>
-            <a:ext cx="4326940" cy="256032"/>
-          </a:xfrm>
-          <a:prstGeom prst="rect">
-            <a:avLst/>
-          </a:prstGeom>
-          <a:noFill/>
-        </p:spPr>
-        <p:txBody>
-          <a:bodyPr wrap="none">
-            <a:spAutoFit/>
-          </a:bodyPr>
-          <a:lstStyle/>
-          <a:p>
-            <a:pPr algn="r"/>
-            <a:r>
-              <a:rPr sz="700">
-                <a:solidFill>
-                  <a:srgbClr val="A0B4D2"/>
-                </a:solidFill>
-                <a:latin typeface="Consolas"/>
-              </a:rPr>
-              <a:t>Schaubild</a:t>
             </a:r>
           </a:p>
         </p:txBody>
@@ -7594,7 +14959,7 @@
             <a:avLst/>
           </a:prstGeom>
           <a:solidFill>
-            <a:srgbClr val="EDEDF3"/>
+            <a:srgbClr val="FFFFFF"/>
           </a:solidFill>
           <a:ln>
             <a:noFill/>
@@ -7695,51 +15060,43 @@
                 </a:solidFill>
                 <a:latin typeface="Consolas"/>
               </a:rPr>
-              <a:t>M23  ·  INHALT</a:t>
-            </a:r>
-          </a:p>
-        </p:txBody>
-      </p:sp>
-      <p:sp>
-        <p:nvSpPr>
-          <p:cNvPr id="5" name="Rectangle 4"/>
-          <p:cNvSpPr/>
-          <p:nvPr/>
-        </p:nvSpPr>
-        <p:spPr>
-          <a:xfrm>
-            <a:off x="0" y="1234440"/>
-            <a:ext cx="12188952" cy="12700"/>
-          </a:xfrm>
-          <a:prstGeom prst="rect">
-            <a:avLst/>
-          </a:prstGeom>
-          <a:solidFill>
-            <a:srgbClr val="D8DFE4"/>
-          </a:solidFill>
-          <a:ln>
-            <a:noFill/>
-          </a:ln>
-        </p:spPr>
-        <p:style>
-          <a:lnRef idx="1">
-            <a:schemeClr val="accent1"/>
-          </a:lnRef>
-          <a:fillRef idx="3">
-            <a:schemeClr val="accent1"/>
-          </a:fillRef>
-          <a:effectRef idx="2">
-            <a:schemeClr val="accent1"/>
-          </a:effectRef>
-          <a:fontRef idx="minor">
-            <a:schemeClr val="lt1"/>
-          </a:fontRef>
-        </p:style>
-        <p:txBody>
-          <a:bodyPr rtlCol="0" anchor="ctr"/>
-          <a:lstStyle/>
-          <a:p>
-            <a:pPr algn="ctr"/>
+              <a:t>M23  ·  SCHAUBILD</a:t>
+            </a:r>
+          </a:p>
+        </p:txBody>
+      </p:sp>
+      <p:sp>
+        <p:nvSpPr>
+          <p:cNvPr id="5" name="TextBox 4"/>
+          <p:cNvSpPr txBox="1"/>
+          <p:nvPr/>
+        </p:nvSpPr>
+        <p:spPr>
+          <a:xfrm>
+            <a:off x="685800" y="502920"/>
+            <a:ext cx="10817352" cy="594360"/>
+          </a:xfrm>
+          <a:prstGeom prst="rect">
+            <a:avLst/>
+          </a:prstGeom>
+          <a:noFill/>
+        </p:spPr>
+        <p:txBody>
+          <a:bodyPr wrap="square">
+            <a:spAutoFit/>
+          </a:bodyPr>
+          <a:lstStyle/>
+          <a:p>
+            <a:pPr algn="l"/>
+            <a:r>
+              <a:rPr sz="2000" b="1" i="0">
+                <a:solidFill>
+                  <a:srgbClr val="1F2C56"/>
+                </a:solidFill>
+                <a:latin typeface="Arial"/>
+              </a:rPr>
+              <a:t>Architektur des integrierten Planungsmodells</a:t>
+            </a:r>
           </a:p>
         </p:txBody>
       </p:sp>
@@ -7751,8 +15108,8 @@
         </p:nvSpPr>
         <p:spPr>
           <a:xfrm>
-            <a:off x="685800" y="502920"/>
-            <a:ext cx="36576" cy="658368"/>
+            <a:off x="685800" y="1143000"/>
+            <a:ext cx="10817352" cy="25400"/>
           </a:xfrm>
           <a:prstGeom prst="rect">
             <a:avLst/>
@@ -7786,143 +15143,33 @@
           </a:p>
         </p:txBody>
       </p:sp>
-      <p:sp>
-        <p:nvSpPr>
-          <p:cNvPr id="7" name="TextBox 6"/>
-          <p:cNvSpPr txBox="1"/>
-          <p:nvPr/>
-        </p:nvSpPr>
-        <p:spPr>
-          <a:xfrm>
-            <a:off x="813816" y="502920"/>
-            <a:ext cx="10634472" cy="685800"/>
-          </a:xfrm>
-          <a:prstGeom prst="rect">
-            <a:avLst/>
-          </a:prstGeom>
-          <a:noFill/>
-        </p:spPr>
-        <p:txBody>
-          <a:bodyPr wrap="square">
-            <a:spAutoFit/>
-          </a:bodyPr>
-          <a:lstStyle/>
-          <a:p>
-            <a:pPr algn="l"/>
-            <a:r>
-              <a:rPr sz="2400" b="1" i="0">
-                <a:solidFill>
-                  <a:srgbClr val="1F2C56"/>
-                </a:solidFill>
-                <a:latin typeface="Arial"/>
-              </a:rPr>
-              <a:t>Reflexionsfragen</a:t>
-            </a:r>
-          </a:p>
-        </p:txBody>
-      </p:sp>
-      <p:sp>
-        <p:nvSpPr>
-          <p:cNvPr id="8" name="TextBox 7"/>
-          <p:cNvSpPr txBox="1"/>
-          <p:nvPr/>
-        </p:nvSpPr>
-        <p:spPr>
-          <a:xfrm>
-            <a:off x="685800" y="1417320"/>
-            <a:ext cx="10817352" cy="4892040"/>
-          </a:xfrm>
-          <a:prstGeom prst="rect">
-            <a:avLst/>
-          </a:prstGeom>
-          <a:noFill/>
-        </p:spPr>
-        <p:txBody>
-          <a:bodyPr wrap="square" anchor="ctr">
-            <a:spAutoFit/>
-          </a:bodyPr>
-          <a:lstStyle/>
-          <a:p>
-            <a:pPr marL="190500" indent="-190500">
-              <a:spcBef>
-                <a:spcPts val="400"/>
-              </a:spcBef>
-              <a:spcAft>
-                <a:spcPts val="200"/>
-              </a:spcAft>
-            </a:pPr>
-            <a:r>
-              <a:rPr sz="1300">
-                <a:solidFill>
-                  <a:srgbClr val="3D5466"/>
-                </a:solidFill>
-                <a:latin typeface="Arial"/>
-              </a:rPr>
-              <a:t>▸  An welcher Stelle hat Sie das Modell zu einer Annahme gezwungen, die Sie vorher nie explizit gemacht hätten?</a:t>
-            </a:r>
-          </a:p>
-          <a:p>
-            <a:pPr marL="190500" indent="-190500">
-              <a:spcBef>
-                <a:spcPts val="400"/>
-              </a:spcBef>
-              <a:spcAft>
-                <a:spcPts val="200"/>
-              </a:spcAft>
-            </a:pPr>
-            <a:r>
-              <a:rPr sz="1300">
-                <a:solidFill>
-                  <a:srgbClr val="3D5466"/>
-                </a:solidFill>
-                <a:latin typeface="Arial"/>
-              </a:rPr>
-              <a:t>▸  Welcher Werttreiber hat im GaLaBau-Fall den größten Einfluss auf den DSCR?</a:t>
-            </a:r>
-          </a:p>
-          <a:p>
-            <a:pPr marL="190500" indent="-190500">
-              <a:spcBef>
-                <a:spcPts val="400"/>
-              </a:spcBef>
-              <a:spcAft>
-                <a:spcPts val="200"/>
-              </a:spcAft>
-            </a:pPr>
-            <a:r>
-              <a:rPr sz="1300">
-                <a:solidFill>
-                  <a:srgbClr val="3D5466"/>
-                </a:solidFill>
-                <a:latin typeface="Arial"/>
-              </a:rPr>
-              <a:t>▸  Welcher Ihrer realen Kunden hat ein Vorhaben, bei dem ein gemeinsames Planungsmodell den Unterschied machen würde?</a:t>
-            </a:r>
-          </a:p>
-          <a:p>
-            <a:pPr marL="190500" indent="-190500">
-              <a:spcBef>
-                <a:spcPts val="400"/>
-              </a:spcBef>
-              <a:spcAft>
-                <a:spcPts val="200"/>
-              </a:spcAft>
-            </a:pPr>
-            <a:r>
-              <a:rPr sz="1300">
-                <a:solidFill>
-                  <a:srgbClr val="3D5466"/>
-                </a:solidFill>
-                <a:latin typeface="Arial"/>
-              </a:rPr>
-              <a:t>▸  Wie erklären Sie einem Unternehmer mit 2 % EK-Quote, dass sein gut laufender Betrieb trotzdem ein Finanzierungsrisiko trägt?</a:t>
-            </a:r>
-          </a:p>
-        </p:txBody>
-      </p:sp>
-      <p:sp>
-        <p:nvSpPr>
-          <p:cNvPr id="9" name="Rectangle 8"/>
+      <p:pic>
+        <p:nvPicPr>
+          <p:cNvPr id="7" name="Picture 6" descr="image.png"/>
+          <p:cNvPicPr>
+            <a:picLocks noChangeAspect="1"/>
+          </p:cNvPicPr>
+          <p:nvPr/>
+        </p:nvPicPr>
+        <p:blipFill>
+          <a:blip r:embed="rId2"/>
+          <a:stretch>
+            <a:fillRect/>
+          </a:stretch>
+        </p:blipFill>
+        <p:spPr>
+          <a:xfrm>
+            <a:off x="2009463" y="1325880"/>
+            <a:ext cx="8170026" cy="4937760"/>
+          </a:xfrm>
+          <a:prstGeom prst="rect">
+            <a:avLst/>
+          </a:prstGeom>
+        </p:spPr>
+      </p:pic>
+      <p:sp>
+        <p:nvSpPr>
+          <p:cNvPr id="8" name="Rectangle 7"/>
           <p:cNvSpPr/>
           <p:nvPr/>
         </p:nvSpPr>
@@ -7965,7 +15212,7 @@
       </p:sp>
       <p:sp>
         <p:nvSpPr>
-          <p:cNvPr id="10" name="TextBox 9"/>
+          <p:cNvPr id="9" name="TextBox 8"/>
           <p:cNvSpPr txBox="1"/>
           <p:nvPr/>
         </p:nvSpPr>
@@ -7994,6 +15241,41 @@
                 <a:latin typeface="Consolas"/>
               </a:rPr>
               <a:t>FKB Campus  ·  M23</a:t>
+            </a:r>
+          </a:p>
+        </p:txBody>
+      </p:sp>
+      <p:sp>
+        <p:nvSpPr>
+          <p:cNvPr id="10" name="TextBox 9"/>
+          <p:cNvSpPr txBox="1"/>
+          <p:nvPr/>
+        </p:nvSpPr>
+        <p:spPr>
+          <a:xfrm>
+            <a:off x="7176211" y="6583680"/>
+            <a:ext cx="4326940" cy="256032"/>
+          </a:xfrm>
+          <a:prstGeom prst="rect">
+            <a:avLst/>
+          </a:prstGeom>
+          <a:noFill/>
+        </p:spPr>
+        <p:txBody>
+          <a:bodyPr wrap="none">
+            <a:spAutoFit/>
+          </a:bodyPr>
+          <a:lstStyle/>
+          <a:p>
+            <a:pPr algn="r"/>
+            <a:r>
+              <a:rPr sz="700">
+                <a:solidFill>
+                  <a:srgbClr val="A0B4D2"/>
+                </a:solidFill>
+                <a:latin typeface="Consolas"/>
+              </a:rPr>
+              <a:t>Schaubild</a:t>
             </a:r>
           </a:p>
         </p:txBody>
